--- a/LectureNotes/M2-Phong-Slides/2-3.LightSources.pptx
+++ b/LectureNotes/M2-Phong-Slides/2-3.LightSources.pptx
@@ -20,8 +20,11 @@
     <p:sldId id="382" r:id="rId14"/>
     <p:sldId id="383" r:id="rId15"/>
     <p:sldId id="384" r:id="rId16"/>
-    <p:sldId id="348" r:id="rId17"/>
-    <p:sldId id="385" r:id="rId18"/>
+    <p:sldId id="386" r:id="rId17"/>
+    <p:sldId id="387" r:id="rId18"/>
+    <p:sldId id="388" r:id="rId19"/>
+    <p:sldId id="348" r:id="rId20"/>
+    <p:sldId id="385" r:id="rId21"/>
   </p:sldIdLst>
   <p:sldSz cx="9144000" cy="6858000" type="screen4x3"/>
   <p:notesSz cx="6858000" cy="9144000"/>
@@ -177,10 +180,9 @@
           <a:lstStyle/>
           <a:p>
             <a:r>
-              <a:rPr lang="en-US" smtClean="0"/>
+              <a:rPr lang="en-US"/>
               <a:t>Click to edit Master title style</a:t>
             </a:r>
-            <a:endParaRPr lang="en-US"/>
           </a:p>
         </p:txBody>
       </p:sp>
@@ -296,10 +298,9 @@
           </a:lstStyle>
           <a:p>
             <a:r>
-              <a:rPr lang="en-US" smtClean="0"/>
+              <a:rPr lang="en-US"/>
               <a:t>Click to edit Master subtitle style</a:t>
             </a:r>
-            <a:endParaRPr lang="en-US"/>
           </a:p>
         </p:txBody>
       </p:sp>
@@ -321,7 +322,7 @@
             <a:fld id="{1D8BD707-D9CF-40AE-B4C6-C98DA3205C09}" type="datetimeFigureOut">
               <a:rPr lang="en-US" smtClean="0"/>
               <a:pPr/>
-              <a:t>1/24/2016</a:t>
+              <a:t>1/27/2026</a:t>
             </a:fld>
             <a:endParaRPr lang="en-US"/>
           </a:p>
@@ -416,10 +417,9 @@
           <a:lstStyle/>
           <a:p>
             <a:r>
-              <a:rPr lang="en-US" smtClean="0"/>
+              <a:rPr lang="en-US"/>
               <a:t>Click to edit Master title style</a:t>
             </a:r>
-            <a:endParaRPr lang="en-US"/>
           </a:p>
         </p:txBody>
       </p:sp>
@@ -440,38 +440,37 @@
           <a:p>
             <a:pPr lvl="0"/>
             <a:r>
-              <a:rPr lang="en-US" smtClean="0"/>
+              <a:rPr lang="en-US"/>
               <a:t>Click to edit Master text styles</a:t>
             </a:r>
           </a:p>
           <a:p>
             <a:pPr lvl="1"/>
             <a:r>
-              <a:rPr lang="en-US" smtClean="0"/>
+              <a:rPr lang="en-US"/>
               <a:t>Second level</a:t>
             </a:r>
           </a:p>
           <a:p>
             <a:pPr lvl="2"/>
             <a:r>
-              <a:rPr lang="en-US" smtClean="0"/>
+              <a:rPr lang="en-US"/>
               <a:t>Third level</a:t>
             </a:r>
           </a:p>
           <a:p>
             <a:pPr lvl="3"/>
             <a:r>
-              <a:rPr lang="en-US" smtClean="0"/>
+              <a:rPr lang="en-US"/>
               <a:t>Fourth level</a:t>
             </a:r>
           </a:p>
           <a:p>
             <a:pPr lvl="4"/>
             <a:r>
-              <a:rPr lang="en-US" smtClean="0"/>
+              <a:rPr lang="en-US"/>
               <a:t>Fifth level</a:t>
             </a:r>
-            <a:endParaRPr lang="en-US"/>
           </a:p>
         </p:txBody>
       </p:sp>
@@ -493,7 +492,7 @@
             <a:fld id="{1D8BD707-D9CF-40AE-B4C6-C98DA3205C09}" type="datetimeFigureOut">
               <a:rPr lang="en-US" smtClean="0"/>
               <a:pPr/>
-              <a:t>1/24/2016</a:t>
+              <a:t>1/27/2026</a:t>
             </a:fld>
             <a:endParaRPr lang="en-US"/>
           </a:p>
@@ -593,10 +592,9 @@
           <a:lstStyle/>
           <a:p>
             <a:r>
-              <a:rPr lang="en-US" smtClean="0"/>
+              <a:rPr lang="en-US"/>
               <a:t>Click to edit Master title style</a:t>
             </a:r>
-            <a:endParaRPr lang="en-US"/>
           </a:p>
         </p:txBody>
       </p:sp>
@@ -622,38 +620,37 @@
           <a:p>
             <a:pPr lvl="0"/>
             <a:r>
-              <a:rPr lang="en-US" smtClean="0"/>
+              <a:rPr lang="en-US"/>
               <a:t>Click to edit Master text styles</a:t>
             </a:r>
           </a:p>
           <a:p>
             <a:pPr lvl="1"/>
             <a:r>
-              <a:rPr lang="en-US" smtClean="0"/>
+              <a:rPr lang="en-US"/>
               <a:t>Second level</a:t>
             </a:r>
           </a:p>
           <a:p>
             <a:pPr lvl="2"/>
             <a:r>
-              <a:rPr lang="en-US" smtClean="0"/>
+              <a:rPr lang="en-US"/>
               <a:t>Third level</a:t>
             </a:r>
           </a:p>
           <a:p>
             <a:pPr lvl="3"/>
             <a:r>
-              <a:rPr lang="en-US" smtClean="0"/>
+              <a:rPr lang="en-US"/>
               <a:t>Fourth level</a:t>
             </a:r>
           </a:p>
           <a:p>
             <a:pPr lvl="4"/>
             <a:r>
-              <a:rPr lang="en-US" smtClean="0"/>
+              <a:rPr lang="en-US"/>
               <a:t>Fifth level</a:t>
             </a:r>
-            <a:endParaRPr lang="en-US"/>
           </a:p>
         </p:txBody>
       </p:sp>
@@ -675,7 +672,7 @@
             <a:fld id="{1D8BD707-D9CF-40AE-B4C6-C98DA3205C09}" type="datetimeFigureOut">
               <a:rPr lang="en-US" smtClean="0"/>
               <a:pPr/>
-              <a:t>1/24/2016</a:t>
+              <a:t>1/27/2026</a:t>
             </a:fld>
             <a:endParaRPr lang="en-US"/>
           </a:p>
@@ -770,10 +767,9 @@
           <a:lstStyle/>
           <a:p>
             <a:r>
-              <a:rPr lang="en-US" smtClean="0"/>
+              <a:rPr lang="en-US"/>
               <a:t>Click to edit Master title style</a:t>
             </a:r>
-            <a:endParaRPr lang="en-US"/>
           </a:p>
         </p:txBody>
       </p:sp>
@@ -794,38 +790,37 @@
           <a:p>
             <a:pPr lvl="0"/>
             <a:r>
-              <a:rPr lang="en-US" smtClean="0"/>
+              <a:rPr lang="en-US"/>
               <a:t>Click to edit Master text styles</a:t>
             </a:r>
           </a:p>
           <a:p>
             <a:pPr lvl="1"/>
             <a:r>
-              <a:rPr lang="en-US" smtClean="0"/>
+              <a:rPr lang="en-US"/>
               <a:t>Second level</a:t>
             </a:r>
           </a:p>
           <a:p>
             <a:pPr lvl="2"/>
             <a:r>
-              <a:rPr lang="en-US" smtClean="0"/>
+              <a:rPr lang="en-US"/>
               <a:t>Third level</a:t>
             </a:r>
           </a:p>
           <a:p>
             <a:pPr lvl="3"/>
             <a:r>
-              <a:rPr lang="en-US" smtClean="0"/>
+              <a:rPr lang="en-US"/>
               <a:t>Fourth level</a:t>
             </a:r>
           </a:p>
           <a:p>
             <a:pPr lvl="4"/>
             <a:r>
-              <a:rPr lang="en-US" smtClean="0"/>
+              <a:rPr lang="en-US"/>
               <a:t>Fifth level</a:t>
             </a:r>
-            <a:endParaRPr lang="en-US"/>
           </a:p>
         </p:txBody>
       </p:sp>
@@ -847,7 +842,7 @@
             <a:fld id="{1D8BD707-D9CF-40AE-B4C6-C98DA3205C09}" type="datetimeFigureOut">
               <a:rPr lang="en-US" smtClean="0"/>
               <a:pPr/>
-              <a:t>1/24/2016</a:t>
+              <a:t>1/27/2026</a:t>
             </a:fld>
             <a:endParaRPr lang="en-US"/>
           </a:p>
@@ -951,10 +946,9 @@
           </a:lstStyle>
           <a:p>
             <a:r>
-              <a:rPr lang="en-US" smtClean="0"/>
+              <a:rPr lang="en-US"/>
               <a:t>Click to edit Master title style</a:t>
             </a:r>
-            <a:endParaRPr lang="en-US"/>
           </a:p>
         </p:txBody>
       </p:sp>
@@ -1071,7 +1065,7 @@
           <a:p>
             <a:pPr lvl="0"/>
             <a:r>
-              <a:rPr lang="en-US" smtClean="0"/>
+              <a:rPr lang="en-US"/>
               <a:t>Click to edit Master text styles</a:t>
             </a:r>
           </a:p>
@@ -1095,7 +1089,7 @@
             <a:fld id="{1D8BD707-D9CF-40AE-B4C6-C98DA3205C09}" type="datetimeFigureOut">
               <a:rPr lang="en-US" smtClean="0"/>
               <a:pPr/>
-              <a:t>1/24/2016</a:t>
+              <a:t>1/27/2026</a:t>
             </a:fld>
             <a:endParaRPr lang="en-US"/>
           </a:p>
@@ -1190,10 +1184,9 @@
           <a:lstStyle/>
           <a:p>
             <a:r>
-              <a:rPr lang="en-US" smtClean="0"/>
+              <a:rPr lang="en-US"/>
               <a:t>Click to edit Master title style</a:t>
             </a:r>
-            <a:endParaRPr lang="en-US"/>
           </a:p>
         </p:txBody>
       </p:sp>
@@ -1247,38 +1240,37 @@
           <a:p>
             <a:pPr lvl="0"/>
             <a:r>
-              <a:rPr lang="en-US" smtClean="0"/>
+              <a:rPr lang="en-US"/>
               <a:t>Click to edit Master text styles</a:t>
             </a:r>
           </a:p>
           <a:p>
             <a:pPr lvl="1"/>
             <a:r>
-              <a:rPr lang="en-US" smtClean="0"/>
+              <a:rPr lang="en-US"/>
               <a:t>Second level</a:t>
             </a:r>
           </a:p>
           <a:p>
             <a:pPr lvl="2"/>
             <a:r>
-              <a:rPr lang="en-US" smtClean="0"/>
+              <a:rPr lang="en-US"/>
               <a:t>Third level</a:t>
             </a:r>
           </a:p>
           <a:p>
             <a:pPr lvl="3"/>
             <a:r>
-              <a:rPr lang="en-US" smtClean="0"/>
+              <a:rPr lang="en-US"/>
               <a:t>Fourth level</a:t>
             </a:r>
           </a:p>
           <a:p>
             <a:pPr lvl="4"/>
             <a:r>
-              <a:rPr lang="en-US" smtClean="0"/>
+              <a:rPr lang="en-US"/>
               <a:t>Fifth level</a:t>
             </a:r>
-            <a:endParaRPr lang="en-US"/>
           </a:p>
         </p:txBody>
       </p:sp>
@@ -1332,38 +1324,37 @@
           <a:p>
             <a:pPr lvl="0"/>
             <a:r>
-              <a:rPr lang="en-US" smtClean="0"/>
+              <a:rPr lang="en-US"/>
               <a:t>Click to edit Master text styles</a:t>
             </a:r>
           </a:p>
           <a:p>
             <a:pPr lvl="1"/>
             <a:r>
-              <a:rPr lang="en-US" smtClean="0"/>
+              <a:rPr lang="en-US"/>
               <a:t>Second level</a:t>
             </a:r>
           </a:p>
           <a:p>
             <a:pPr lvl="2"/>
             <a:r>
-              <a:rPr lang="en-US" smtClean="0"/>
+              <a:rPr lang="en-US"/>
               <a:t>Third level</a:t>
             </a:r>
           </a:p>
           <a:p>
             <a:pPr lvl="3"/>
             <a:r>
-              <a:rPr lang="en-US" smtClean="0"/>
+              <a:rPr lang="en-US"/>
               <a:t>Fourth level</a:t>
             </a:r>
           </a:p>
           <a:p>
             <a:pPr lvl="4"/>
             <a:r>
-              <a:rPr lang="en-US" smtClean="0"/>
+              <a:rPr lang="en-US"/>
               <a:t>Fifth level</a:t>
             </a:r>
-            <a:endParaRPr lang="en-US"/>
           </a:p>
         </p:txBody>
       </p:sp>
@@ -1385,7 +1376,7 @@
             <a:fld id="{1D8BD707-D9CF-40AE-B4C6-C98DA3205C09}" type="datetimeFigureOut">
               <a:rPr lang="en-US" smtClean="0"/>
               <a:pPr/>
-              <a:t>1/24/2016</a:t>
+              <a:t>1/27/2026</a:t>
             </a:fld>
             <a:endParaRPr lang="en-US"/>
           </a:p>
@@ -1484,10 +1475,9 @@
           </a:lstStyle>
           <a:p>
             <a:r>
-              <a:rPr lang="en-US" smtClean="0"/>
+              <a:rPr lang="en-US"/>
               <a:t>Click to edit Master title style</a:t>
             </a:r>
-            <a:endParaRPr lang="en-US"/>
           </a:p>
         </p:txBody>
       </p:sp>
@@ -1550,7 +1540,7 @@
           <a:p>
             <a:pPr lvl="0"/>
             <a:r>
-              <a:rPr lang="en-US" smtClean="0"/>
+              <a:rPr lang="en-US"/>
               <a:t>Click to edit Master text styles</a:t>
             </a:r>
           </a:p>
@@ -1606,38 +1596,37 @@
           <a:p>
             <a:pPr lvl="0"/>
             <a:r>
-              <a:rPr lang="en-US" smtClean="0"/>
+              <a:rPr lang="en-US"/>
               <a:t>Click to edit Master text styles</a:t>
             </a:r>
           </a:p>
           <a:p>
             <a:pPr lvl="1"/>
             <a:r>
-              <a:rPr lang="en-US" smtClean="0"/>
+              <a:rPr lang="en-US"/>
               <a:t>Second level</a:t>
             </a:r>
           </a:p>
           <a:p>
             <a:pPr lvl="2"/>
             <a:r>
-              <a:rPr lang="en-US" smtClean="0"/>
+              <a:rPr lang="en-US"/>
               <a:t>Third level</a:t>
             </a:r>
           </a:p>
           <a:p>
             <a:pPr lvl="3"/>
             <a:r>
-              <a:rPr lang="en-US" smtClean="0"/>
+              <a:rPr lang="en-US"/>
               <a:t>Fourth level</a:t>
             </a:r>
           </a:p>
           <a:p>
             <a:pPr lvl="4"/>
             <a:r>
-              <a:rPr lang="en-US" smtClean="0"/>
+              <a:rPr lang="en-US"/>
               <a:t>Fifth level</a:t>
             </a:r>
-            <a:endParaRPr lang="en-US"/>
           </a:p>
         </p:txBody>
       </p:sp>
@@ -1700,7 +1689,7 @@
           <a:p>
             <a:pPr lvl="0"/>
             <a:r>
-              <a:rPr lang="en-US" smtClean="0"/>
+              <a:rPr lang="en-US"/>
               <a:t>Click to edit Master text styles</a:t>
             </a:r>
           </a:p>
@@ -1756,38 +1745,37 @@
           <a:p>
             <a:pPr lvl="0"/>
             <a:r>
-              <a:rPr lang="en-US" smtClean="0"/>
+              <a:rPr lang="en-US"/>
               <a:t>Click to edit Master text styles</a:t>
             </a:r>
           </a:p>
           <a:p>
             <a:pPr lvl="1"/>
             <a:r>
-              <a:rPr lang="en-US" smtClean="0"/>
+              <a:rPr lang="en-US"/>
               <a:t>Second level</a:t>
             </a:r>
           </a:p>
           <a:p>
             <a:pPr lvl="2"/>
             <a:r>
-              <a:rPr lang="en-US" smtClean="0"/>
+              <a:rPr lang="en-US"/>
               <a:t>Third level</a:t>
             </a:r>
           </a:p>
           <a:p>
             <a:pPr lvl="3"/>
             <a:r>
-              <a:rPr lang="en-US" smtClean="0"/>
+              <a:rPr lang="en-US"/>
               <a:t>Fourth level</a:t>
             </a:r>
           </a:p>
           <a:p>
             <a:pPr lvl="4"/>
             <a:r>
-              <a:rPr lang="en-US" smtClean="0"/>
+              <a:rPr lang="en-US"/>
               <a:t>Fifth level</a:t>
             </a:r>
-            <a:endParaRPr lang="en-US"/>
           </a:p>
         </p:txBody>
       </p:sp>
@@ -1809,7 +1797,7 @@
             <a:fld id="{1D8BD707-D9CF-40AE-B4C6-C98DA3205C09}" type="datetimeFigureOut">
               <a:rPr lang="en-US" smtClean="0"/>
               <a:pPr/>
-              <a:t>1/24/2016</a:t>
+              <a:t>1/27/2026</a:t>
             </a:fld>
             <a:endParaRPr lang="en-US"/>
           </a:p>
@@ -1904,10 +1892,9 @@
           <a:lstStyle/>
           <a:p>
             <a:r>
-              <a:rPr lang="en-US" smtClean="0"/>
+              <a:rPr lang="en-US"/>
               <a:t>Click to edit Master title style</a:t>
             </a:r>
-            <a:endParaRPr lang="en-US"/>
           </a:p>
         </p:txBody>
       </p:sp>
@@ -1929,7 +1916,7 @@
             <a:fld id="{1D8BD707-D9CF-40AE-B4C6-C98DA3205C09}" type="datetimeFigureOut">
               <a:rPr lang="en-US" smtClean="0"/>
               <a:pPr/>
-              <a:t>1/24/2016</a:t>
+              <a:t>1/27/2026</a:t>
             </a:fld>
             <a:endParaRPr lang="en-US"/>
           </a:p>
@@ -2026,7 +2013,7 @@
             <a:fld id="{1D8BD707-D9CF-40AE-B4C6-C98DA3205C09}" type="datetimeFigureOut">
               <a:rPr lang="en-US" smtClean="0"/>
               <a:pPr/>
-              <a:t>1/24/2016</a:t>
+              <a:t>1/27/2026</a:t>
             </a:fld>
             <a:endParaRPr lang="en-US"/>
           </a:p>
@@ -2130,10 +2117,9 @@
           </a:lstStyle>
           <a:p>
             <a:r>
-              <a:rPr lang="en-US" smtClean="0"/>
+              <a:rPr lang="en-US"/>
               <a:t>Click to edit Master title style</a:t>
             </a:r>
-            <a:endParaRPr lang="en-US"/>
           </a:p>
         </p:txBody>
       </p:sp>
@@ -2187,38 +2173,37 @@
           <a:p>
             <a:pPr lvl="0"/>
             <a:r>
-              <a:rPr lang="en-US" smtClean="0"/>
+              <a:rPr lang="en-US"/>
               <a:t>Click to edit Master text styles</a:t>
             </a:r>
           </a:p>
           <a:p>
             <a:pPr lvl="1"/>
             <a:r>
-              <a:rPr lang="en-US" smtClean="0"/>
+              <a:rPr lang="en-US"/>
               <a:t>Second level</a:t>
             </a:r>
           </a:p>
           <a:p>
             <a:pPr lvl="2"/>
             <a:r>
-              <a:rPr lang="en-US" smtClean="0"/>
+              <a:rPr lang="en-US"/>
               <a:t>Third level</a:t>
             </a:r>
           </a:p>
           <a:p>
             <a:pPr lvl="3"/>
             <a:r>
-              <a:rPr lang="en-US" smtClean="0"/>
+              <a:rPr lang="en-US"/>
               <a:t>Fourth level</a:t>
             </a:r>
           </a:p>
           <a:p>
             <a:pPr lvl="4"/>
             <a:r>
-              <a:rPr lang="en-US" smtClean="0"/>
+              <a:rPr lang="en-US"/>
               <a:t>Fifth level</a:t>
             </a:r>
-            <a:endParaRPr lang="en-US"/>
           </a:p>
         </p:txBody>
       </p:sp>
@@ -2281,7 +2266,7 @@
           <a:p>
             <a:pPr lvl="0"/>
             <a:r>
-              <a:rPr lang="en-US" smtClean="0"/>
+              <a:rPr lang="en-US"/>
               <a:t>Click to edit Master text styles</a:t>
             </a:r>
           </a:p>
@@ -2305,7 +2290,7 @@
             <a:fld id="{1D8BD707-D9CF-40AE-B4C6-C98DA3205C09}" type="datetimeFigureOut">
               <a:rPr lang="en-US" smtClean="0"/>
               <a:pPr/>
-              <a:t>1/24/2016</a:t>
+              <a:t>1/27/2026</a:t>
             </a:fld>
             <a:endParaRPr lang="en-US"/>
           </a:p>
@@ -2409,10 +2394,9 @@
           </a:lstStyle>
           <a:p>
             <a:r>
-              <a:rPr lang="en-US" smtClean="0"/>
+              <a:rPr lang="en-US"/>
               <a:t>Click to edit Master title style</a:t>
             </a:r>
-            <a:endParaRPr lang="en-US"/>
           </a:p>
         </p:txBody>
       </p:sp>
@@ -2536,7 +2520,7 @@
           <a:p>
             <a:pPr lvl="0"/>
             <a:r>
-              <a:rPr lang="en-US" smtClean="0"/>
+              <a:rPr lang="en-US"/>
               <a:t>Click to edit Master text styles</a:t>
             </a:r>
           </a:p>
@@ -2560,7 +2544,7 @@
             <a:fld id="{1D8BD707-D9CF-40AE-B4C6-C98DA3205C09}" type="datetimeFigureOut">
               <a:rPr lang="en-US" smtClean="0"/>
               <a:pPr/>
-              <a:t>1/24/2016</a:t>
+              <a:t>1/27/2026</a:t>
             </a:fld>
             <a:endParaRPr lang="en-US"/>
           </a:p>
@@ -2670,10 +2654,9 @@
           <a:lstStyle/>
           <a:p>
             <a:r>
-              <a:rPr lang="en-US" smtClean="0"/>
+              <a:rPr lang="en-US"/>
               <a:t>Click to edit Master title style</a:t>
             </a:r>
-            <a:endParaRPr lang="en-US"/>
           </a:p>
         </p:txBody>
       </p:sp>
@@ -2704,38 +2687,37 @@
           <a:p>
             <a:pPr lvl="0"/>
             <a:r>
-              <a:rPr lang="en-US" smtClean="0"/>
+              <a:rPr lang="en-US"/>
               <a:t>Click to edit Master text styles</a:t>
             </a:r>
           </a:p>
           <a:p>
             <a:pPr lvl="1"/>
             <a:r>
-              <a:rPr lang="en-US" smtClean="0"/>
+              <a:rPr lang="en-US"/>
               <a:t>Second level</a:t>
             </a:r>
           </a:p>
           <a:p>
             <a:pPr lvl="2"/>
             <a:r>
-              <a:rPr lang="en-US" smtClean="0"/>
+              <a:rPr lang="en-US"/>
               <a:t>Third level</a:t>
             </a:r>
           </a:p>
           <a:p>
             <a:pPr lvl="3"/>
             <a:r>
-              <a:rPr lang="en-US" smtClean="0"/>
+              <a:rPr lang="en-US"/>
               <a:t>Fourth level</a:t>
             </a:r>
           </a:p>
           <a:p>
             <a:pPr lvl="4"/>
             <a:r>
-              <a:rPr lang="en-US" smtClean="0"/>
+              <a:rPr lang="en-US"/>
               <a:t>Fifth level</a:t>
             </a:r>
-            <a:endParaRPr lang="en-US"/>
           </a:p>
         </p:txBody>
       </p:sp>
@@ -2775,7 +2757,7 @@
             <a:fld id="{1D8BD707-D9CF-40AE-B4C6-C98DA3205C09}" type="datetimeFigureOut">
               <a:rPr lang="en-US" smtClean="0"/>
               <a:pPr/>
-              <a:t>1/24/2016</a:t>
+              <a:t>1/27/2026</a:t>
             </a:fld>
             <a:endParaRPr lang="en-US"/>
           </a:p>
@@ -3167,18 +3149,17 @@
           <a:lstStyle/>
           <a:p>
             <a:r>
-              <a:rPr lang="en-US" dirty="0" smtClean="0"/>
+              <a:rPr lang="en-US" dirty="0"/>
               <a:t>Lights in the </a:t>
             </a:r>
             <a:r>
-              <a:rPr lang="en-US" dirty="0" err="1" smtClean="0"/>
+              <a:rPr lang="en-US" dirty="0" err="1"/>
               <a:t>Phong</a:t>
             </a:r>
             <a:r>
-              <a:rPr lang="en-US" dirty="0" smtClean="0"/>
+              <a:rPr lang="en-US" dirty="0"/>
               <a:t> Model</a:t>
             </a:r>
-            <a:endParaRPr lang="en-US" dirty="0"/>
           </a:p>
         </p:txBody>
       </p:sp>
@@ -3614,7 +3595,7 @@
           <a:lstStyle/>
           <a:p>
             <a:r>
-              <a:rPr lang="en-US" sz="1600" dirty="0" smtClean="0">
+              <a:rPr lang="en-US" sz="1600" dirty="0">
                 <a:solidFill>
                   <a:schemeClr val="tx1"/>
                 </a:solidFill>
@@ -4570,7 +4551,7 @@
           <a:lstStyle/>
           <a:p>
             <a:r>
-              <a:rPr lang="en-US" sz="1600" dirty="0" smtClean="0">
+              <a:rPr lang="en-US" sz="1600" dirty="0">
                 <a:solidFill>
                   <a:schemeClr val="tx1"/>
                 </a:solidFill>
@@ -4578,25 +4559,20 @@
               <a:t>1. How to </a:t>
             </a:r>
             <a:br>
-              <a:rPr lang="en-US" sz="1600" dirty="0" smtClean="0">
+              <a:rPr lang="en-US" sz="1600" dirty="0">
                 <a:solidFill>
                   <a:schemeClr val="tx1"/>
                 </a:solidFill>
               </a:rPr>
             </a:br>
             <a:r>
-              <a:rPr lang="en-US" sz="1600" dirty="0" smtClean="0">
+              <a:rPr lang="en-US" sz="1600" dirty="0">
                 <a:solidFill>
                   <a:schemeClr val="tx1"/>
                 </a:solidFill>
               </a:rPr>
               <a:t>compute these?</a:t>
             </a:r>
-            <a:endParaRPr lang="en-US" sz="1600" dirty="0">
-              <a:solidFill>
-                <a:schemeClr val="tx1"/>
-              </a:solidFill>
-            </a:endParaRPr>
           </a:p>
         </p:txBody>
       </p:sp>
@@ -4758,13 +4734,6 @@
   <p:clrMapOvr>
     <a:masterClrMapping/>
   </p:clrMapOvr>
-  <p:timing>
-    <p:tnLst>
-      <p:par>
-        <p:cTn id="1" dur="indefinite" restart="never" nodeType="tmRoot"/>
-      </p:par>
-    </p:tnLst>
-  </p:timing>
 </p:sld>
 </file>
 
@@ -4903,7 +4872,7 @@
             <a:lstStyle/>
             <a:p>
               <a:r>
-                <a:rPr lang="en-US" sz="1600" dirty="0" smtClean="0">
+                <a:rPr lang="en-US" sz="1600" dirty="0">
                   <a:solidFill>
                     <a:schemeClr val="bg1"/>
                   </a:solidFill>
@@ -5250,7 +5219,7 @@
               <a:buNone/>
             </a:pPr>
             <a:r>
-              <a:rPr lang="en-US" dirty="0" smtClean="0">
+              <a:rPr lang="en-US" dirty="0">
                 <a:hlinkClick r:id="rId8" action="ppaction://hlinkfile"/>
               </a:rPr>
               <a:t>Maya Scene</a:t>
@@ -5299,18 +5268,13 @@
           <a:lstStyle/>
           <a:p>
             <a:r>
-              <a:rPr lang="en-US" sz="1600" dirty="0" smtClean="0">
+              <a:rPr lang="en-US" sz="1600" dirty="0">
                 <a:solidFill>
                   <a:schemeClr val="tx1"/>
                 </a:solidFill>
               </a:rPr>
               <a:t>Cone boundaries</a:t>
             </a:r>
-            <a:endParaRPr lang="en-US" sz="1600" dirty="0">
-              <a:solidFill>
-                <a:schemeClr val="tx1"/>
-              </a:solidFill>
-            </a:endParaRPr>
           </a:p>
         </p:txBody>
       </p:sp>
@@ -5696,13 +5660,6 @@
   <p:clrMapOvr>
     <a:masterClrMapping/>
   </p:clrMapOvr>
-  <p:timing>
-    <p:tnLst>
-      <p:par>
-        <p:cTn id="1" dur="indefinite" restart="never" nodeType="tmRoot"/>
-      </p:par>
-    </p:tnLst>
-  </p:timing>
 </p:sld>
 </file>
 
@@ -5739,10 +5696,9 @@
           <a:lstStyle/>
           <a:p>
             <a:r>
-              <a:rPr lang="en-US" dirty="0" smtClean="0"/>
+              <a:rPr lang="en-US" dirty="0"/>
               <a:t>Spotlight bounds</a:t>
             </a:r>
-            <a:endParaRPr lang="en-US" dirty="0"/>
           </a:p>
         </p:txBody>
       </p:sp>
@@ -5909,7 +5865,7 @@
               <a:p>
                 <a:pPr lvl="1"/>
                 <a:r>
-                  <a:rPr lang="en-US" dirty="0" smtClean="0"/>
+                  <a:rPr lang="en-US" dirty="0"/>
                   <a:t>Position: </a:t>
                 </a:r>
                 <a14:m>
@@ -5944,12 +5900,12 @@
                     </m:sSub>
                   </m:oMath>
                 </a14:m>
-                <a:endParaRPr lang="en-US" dirty="0" smtClean="0"/>
+                <a:endParaRPr lang="en-US" dirty="0"/>
               </a:p>
               <a:p>
                 <a:pPr lvl="1"/>
                 <a:r>
-                  <a:rPr lang="en-US" dirty="0" smtClean="0"/>
+                  <a:rPr lang="en-US" dirty="0"/>
                   <a:t>Main direction</a:t>
                 </a:r>
                 <a14:m>
@@ -6005,7 +5961,7 @@
                     </m:acc>
                   </m:oMath>
                 </a14:m>
-                <a:endParaRPr lang="en-US" b="1" dirty="0" smtClean="0">
+                <a:endParaRPr lang="en-US" b="1" dirty="0">
                   <a:ea typeface="Cambria Math"/>
                 </a:endParaRPr>
               </a:p>
@@ -6026,7 +5982,7 @@
                   </m:oMath>
                 </a14:m>
                 <a:r>
-                  <a:rPr lang="en-US" dirty="0" smtClean="0">
+                  <a:rPr lang="en-US" dirty="0">
                     <a:ea typeface="Cambria Math"/>
                   </a:rPr>
                   <a:t>: cone angle</a:t>
@@ -6035,7 +5991,7 @@
               <a:p>
                 <a:pPr lvl="1"/>
                 <a:r>
-                  <a:rPr lang="el-GR" b="1" dirty="0" smtClean="0">
+                  <a:rPr lang="el-GR" b="1" dirty="0">
                     <a:solidFill>
                       <a:srgbClr val="00FF00"/>
                     </a:solidFill>
@@ -6043,14 +5999,14 @@
                   <a:t>θ</a:t>
                 </a:r>
                 <a:r>
-                  <a:rPr lang="en-US" dirty="0" smtClean="0"/>
+                  <a:rPr lang="en-US" dirty="0"/>
                   <a:t>: regions of full </a:t>
                 </a:r>
                 <a:br>
-                  <a:rPr lang="en-US" dirty="0" smtClean="0"/>
+                  <a:rPr lang="en-US" dirty="0"/>
                 </a:br>
                 <a:r>
-                  <a:rPr lang="en-US" dirty="0" smtClean="0"/>
+                  <a:rPr lang="en-US" dirty="0"/>
                   <a:t>     illumination </a:t>
                 </a:r>
               </a:p>
@@ -6080,25 +6036,25 @@
                   </m:oMath>
                 </a14:m>
                 <a:r>
-                  <a:rPr lang="en-US" dirty="0" smtClean="0"/>
+                  <a:rPr lang="en-US" dirty="0"/>
                   <a:t>angle to position</a:t>
                 </a:r>
                 <a:br>
-                  <a:rPr lang="en-US" dirty="0" smtClean="0"/>
+                  <a:rPr lang="en-US" dirty="0"/>
                 </a:br>
                 <a:r>
-                  <a:rPr lang="en-US" dirty="0" smtClean="0"/>
+                  <a:rPr lang="en-US" dirty="0"/>
                   <a:t>      for illumination</a:t>
                 </a:r>
               </a:p>
               <a:p>
                 <a:pPr lvl="1"/>
                 <a:r>
-                  <a:rPr lang="en-US" dirty="0" smtClean="0"/>
+                  <a:rPr lang="en-US" dirty="0"/>
                   <a:t>If </a:t>
                 </a:r>
                 <a:r>
-                  <a:rPr lang="el-GR" b="1" dirty="0" smtClean="0">
+                  <a:rPr lang="el-GR" b="1" dirty="0">
                     <a:solidFill>
                       <a:srgbClr val="00FF00"/>
                     </a:solidFill>
@@ -6138,7 +6094,7 @@
                   </m:oMath>
                 </a14:m>
                 <a:r>
-                  <a:rPr lang="en-US" dirty="0" smtClean="0"/>
+                  <a:rPr lang="en-US" dirty="0"/>
                   <a:t> &lt; </a:t>
                 </a:r>
                 <a14:m>
@@ -6166,7 +6122,7 @@
                   </m:oMath>
                 </a14:m>
                 <a:r>
-                  <a:rPr lang="en-US" dirty="0" smtClean="0"/>
+                  <a:rPr lang="en-US" dirty="0"/>
                   <a:t>Illumination drops off  according to:</a:t>
                 </a:r>
               </a:p>
@@ -6441,7 +6397,7 @@
               <a:lstStyle/>
               <a:p>
                 <a:r>
-                  <a:rPr lang="el-GR" b="1" dirty="0" smtClean="0">
+                  <a:rPr lang="el-GR" b="1" dirty="0">
                     <a:solidFill>
                       <a:srgbClr val="00FF00"/>
                     </a:solidFill>
@@ -7431,7 +7387,7 @@
               <a:lstStyle/>
               <a:p>
                 <a:r>
-                  <a:rPr lang="en-US" sz="1600" dirty="0" smtClean="0">
+                  <a:rPr lang="en-US" sz="1600" dirty="0">
                     <a:solidFill>
                       <a:schemeClr val="tx1"/>
                     </a:solidFill>
@@ -7439,25 +7395,20 @@
                   <a:t>Region: </a:t>
                 </a:r>
                 <a:br>
-                  <a:rPr lang="en-US" sz="1600" dirty="0" smtClean="0">
+                  <a:rPr lang="en-US" sz="1600" dirty="0">
                     <a:solidFill>
                       <a:schemeClr val="tx1"/>
                     </a:solidFill>
                   </a:rPr>
                 </a:br>
                 <a:r>
-                  <a:rPr lang="en-US" sz="1600" dirty="0" smtClean="0">
+                  <a:rPr lang="en-US" sz="1600" dirty="0">
                     <a:solidFill>
                       <a:schemeClr val="tx1"/>
                     </a:solidFill>
                   </a:rPr>
                   <a:t>fully illuminated</a:t>
                 </a:r>
-                <a:endParaRPr lang="en-US" sz="1600" dirty="0">
-                  <a:solidFill>
-                    <a:schemeClr val="tx1"/>
-                  </a:solidFill>
-                </a:endParaRPr>
               </a:p>
             </p:txBody>
           </p:sp>
@@ -7501,18 +7452,13 @@
               <a:lstStyle/>
               <a:p>
                 <a:r>
-                  <a:rPr lang="en-US" sz="1600" dirty="0" smtClean="0">
+                  <a:rPr lang="en-US" sz="1600" dirty="0">
                     <a:solidFill>
                       <a:schemeClr val="tx1"/>
                     </a:solidFill>
                   </a:rPr>
                   <a:t>Penumbra Region: gradual drop off</a:t>
                 </a:r>
-                <a:endParaRPr lang="en-US" sz="1600" dirty="0">
-                  <a:solidFill>
-                    <a:schemeClr val="tx1"/>
-                  </a:solidFill>
-                </a:endParaRPr>
               </a:p>
             </p:txBody>
           </p:sp>
@@ -7816,7 +7762,7 @@
               <a:lstStyle/>
               <a:p>
                 <a:r>
-                  <a:rPr lang="en-US" sz="1600" dirty="0" smtClean="0">
+                  <a:rPr lang="en-US" sz="1600" dirty="0">
                     <a:solidFill>
                       <a:schemeClr val="tx1"/>
                     </a:solidFill>
@@ -8333,10 +8279,9 @@
           <a:lstStyle/>
           <a:p>
             <a:r>
-              <a:rPr lang="en-US" dirty="0" smtClean="0"/>
+              <a:rPr lang="en-US" dirty="0"/>
               <a:t>Drop off behavior</a:t>
             </a:r>
-            <a:endParaRPr lang="en-US" dirty="0"/>
           </a:p>
         </p:txBody>
       </p:sp>
@@ -8740,18 +8685,13 @@
           <a:lstStyle/>
           <a:p>
             <a:r>
-              <a:rPr lang="en-US" sz="1600" dirty="0" smtClean="0">
+              <a:rPr lang="en-US" sz="1600" dirty="0">
                 <a:solidFill>
                   <a:schemeClr val="tx1"/>
                 </a:solidFill>
               </a:rPr>
               <a:t>Drop off p=1</a:t>
             </a:r>
-            <a:endParaRPr lang="en-US" sz="1600" dirty="0">
-              <a:solidFill>
-                <a:schemeClr val="tx1"/>
-              </a:solidFill>
-            </a:endParaRPr>
           </a:p>
         </p:txBody>
       </p:sp>
@@ -8814,10 +8754,9 @@
           <a:lstStyle/>
           <a:p>
             <a:r>
-              <a:rPr lang="en-US" dirty="0" smtClean="0"/>
+              <a:rPr lang="en-US" dirty="0"/>
               <a:t>p=0.2</a:t>
             </a:r>
-            <a:endParaRPr lang="en-US" dirty="0"/>
           </a:p>
         </p:txBody>
       </p:sp>
@@ -8843,10 +8782,9 @@
           <a:lstStyle/>
           <a:p>
             <a:r>
-              <a:rPr lang="en-US" dirty="0" smtClean="0"/>
+              <a:rPr lang="en-US" dirty="0"/>
               <a:t>p=0.1</a:t>
             </a:r>
-            <a:endParaRPr lang="en-US" dirty="0"/>
           </a:p>
         </p:txBody>
       </p:sp>
@@ -8872,10 +8810,9 @@
           <a:lstStyle/>
           <a:p>
             <a:r>
-              <a:rPr lang="en-US" dirty="0" smtClean="0"/>
+              <a:rPr lang="en-US" dirty="0"/>
               <a:t>p=30</a:t>
             </a:r>
-            <a:endParaRPr lang="en-US" dirty="0"/>
           </a:p>
         </p:txBody>
       </p:sp>
@@ -8901,10 +8838,9 @@
           <a:lstStyle/>
           <a:p>
             <a:r>
-              <a:rPr lang="en-US" dirty="0" smtClean="0"/>
+              <a:rPr lang="en-US" dirty="0"/>
               <a:t>p=20</a:t>
             </a:r>
-            <a:endParaRPr lang="en-US" dirty="0"/>
           </a:p>
         </p:txBody>
       </p:sp>
@@ -9008,10 +8944,9 @@
           <a:lstStyle/>
           <a:p>
             <a:r>
-              <a:rPr lang="en-US" dirty="0" smtClean="0"/>
+              <a:rPr lang="en-US" dirty="0"/>
               <a:t>P&gt;1</a:t>
             </a:r>
-            <a:endParaRPr lang="en-US" dirty="0"/>
           </a:p>
         </p:txBody>
       </p:sp>
@@ -9037,10 +8972,9 @@
           <a:lstStyle/>
           <a:p>
             <a:r>
-              <a:rPr lang="en-US" dirty="0" smtClean="0"/>
+              <a:rPr lang="en-US" dirty="0"/>
               <a:t>P&lt;1</a:t>
             </a:r>
-            <a:endParaRPr lang="en-US" dirty="0"/>
           </a:p>
         </p:txBody>
       </p:sp>
@@ -9174,7 +9108,7 @@
               <a:buNone/>
             </a:pPr>
             <a:r>
-              <a:rPr lang="en-US" dirty="0" smtClean="0">
+              <a:rPr lang="en-US" dirty="0">
                 <a:hlinkClick r:id="rId2" action="ppaction://hlinkfile"/>
               </a:rPr>
               <a:t>scene</a:t>
@@ -9365,7 +9299,7 @@
             <a:lstStyle/>
             <a:p>
               <a:r>
-                <a:rPr lang="en-US" sz="1600" dirty="0" smtClean="0">
+                <a:rPr lang="en-US" sz="1600" dirty="0">
                   <a:solidFill>
                     <a:schemeClr val="bg1"/>
                   </a:solidFill>
@@ -9544,7 +9478,7 @@
           <a:lstStyle/>
           <a:p>
             <a:r>
-              <a:rPr lang="en-US" sz="1600" dirty="0" smtClean="0">
+              <a:rPr lang="en-US" sz="1600" dirty="0">
                 <a:solidFill>
                   <a:schemeClr val="bg1"/>
                 </a:solidFill>
@@ -9600,10 +9534,9 @@
           <a:lstStyle/>
           <a:p>
             <a:r>
-              <a:rPr lang="en-US" dirty="0" smtClean="0"/>
+              <a:rPr lang="en-US" dirty="0"/>
               <a:t>Implement Penumbra Region</a:t>
             </a:r>
-            <a:endParaRPr lang="en-US" dirty="0"/>
           </a:p>
         </p:txBody>
       </p:sp>
@@ -9632,12 +9565,8 @@
               <a:lstStyle/>
               <a:p>
                 <a:r>
-                  <a:rPr lang="en-US" dirty="0" smtClean="0"/>
-                  <a:t>For a visible position: </a:t>
-                </a:r>
-                <a:r>
                   <a:rPr lang="en-US" dirty="0"/>
-                  <a:t> </a:t>
+                  <a:t>For a visible position:  </a:t>
                 </a:r>
                 <a14:m>
                   <m:oMath xmlns:m="http://schemas.openxmlformats.org/officeDocument/2006/math">
@@ -9671,7 +9600,7 @@
                     </m:sSub>
                   </m:oMath>
                 </a14:m>
-                <a:endParaRPr lang="en-US" dirty="0" smtClean="0"/>
+                <a:endParaRPr lang="en-US" dirty="0"/>
               </a:p>
               <a:p>
                 <a:pPr marL="342900" lvl="1" indent="-342900">
@@ -9814,7 +9743,7 @@
                     </m:r>
                   </m:oMath>
                 </a14:m>
-                <a:endParaRPr lang="en-US" b="0" dirty="0" smtClean="0">
+                <a:endParaRPr lang="en-US" b="0" dirty="0">
                   <a:ea typeface="Cambria Math"/>
                 </a:endParaRPr>
               </a:p>
@@ -9824,19 +9753,19 @@
                   <a:buChar char="•"/>
                 </a:pPr>
                 <a:r>
-                  <a:rPr lang="en-US" dirty="0" err="1" smtClean="0">
+                  <a:rPr lang="en-US" dirty="0" err="1">
                     <a:ea typeface="Cambria Math"/>
                   </a:rPr>
                   <a:t>c</a:t>
                 </a:r>
                 <a:r>
-                  <a:rPr lang="en-US" b="0" dirty="0" err="1" smtClean="0">
+                  <a:rPr lang="en-US" b="0" dirty="0" err="1">
                     <a:ea typeface="Cambria Math"/>
                   </a:rPr>
                   <a:t>os</a:t>
                 </a:r>
                 <a:r>
-                  <a:rPr lang="en-US" b="0" dirty="0" smtClean="0">
+                  <a:rPr lang="en-US" b="0" dirty="0">
                     <a:ea typeface="Cambria Math"/>
                   </a:rPr>
                   <a:t>(</a:t>
@@ -9937,7 +9866,7 @@
                     </m:acc>
                   </m:oMath>
                 </a14:m>
-                <a:endParaRPr lang="en-US" dirty="0" smtClean="0">
+                <a:endParaRPr lang="en-US" dirty="0">
                   <a:solidFill>
                     <a:schemeClr val="accent4">
                       <a:lumMod val="50000"/>
@@ -9950,7 +9879,7 @@
                 <a:pPr marL="0" lvl="1" indent="0">
                   <a:buNone/>
                 </a:pPr>
-                <a:endParaRPr lang="en-US" dirty="0" smtClean="0">
+                <a:endParaRPr lang="en-US" dirty="0">
                   <a:solidFill>
                     <a:schemeClr val="accent4">
                       <a:lumMod val="50000"/>
@@ -9964,7 +9893,7 @@
                   <a:buNone/>
                 </a:pPr>
                 <a:r>
-                  <a:rPr lang="en-US" dirty="0" smtClean="0">
+                  <a:rPr lang="en-US" dirty="0">
                     <a:ea typeface="Cambria Math"/>
                   </a:rPr>
                   <a:t>If (</a:t>
@@ -10000,19 +9929,19 @@
                   </m:oMath>
                 </a14:m>
                 <a:r>
-                  <a:rPr lang="en-US" dirty="0" smtClean="0">
+                  <a:rPr lang="en-US" dirty="0">
                     <a:ea typeface="Cambria Math"/>
                   </a:rPr>
                   <a:t> &gt; </a:t>
                 </a:r>
                 <a:r>
-                  <a:rPr lang="en-US" dirty="0" err="1" smtClean="0">
+                  <a:rPr lang="en-US" dirty="0" err="1">
                     <a:ea typeface="Cambria Math"/>
                   </a:rPr>
                   <a:t>cos</a:t>
                 </a:r>
                 <a:r>
-                  <a:rPr lang="en-US" dirty="0" smtClean="0">
+                  <a:rPr lang="en-US" dirty="0">
                     <a:ea typeface="Cambria Math"/>
                   </a:rPr>
                   <a:t>(</a:t>
@@ -10057,7 +9986,7 @@
                   </m:oMath>
                 </a14:m>
                 <a:r>
-                  <a:rPr lang="en-US" dirty="0" smtClean="0">
+                  <a:rPr lang="en-US" dirty="0">
                     <a:ea typeface="Cambria Math"/>
                   </a:rPr>
                   <a:t>          // </a:t>
@@ -10090,7 +10019,7 @@
                     </m:r>
                   </m:oMath>
                 </a14:m>
-                <a:endParaRPr lang="en-US" dirty="0" smtClean="0">
+                <a:endParaRPr lang="en-US" dirty="0">
                   <a:ea typeface="Cambria Math"/>
                 </a:endParaRPr>
               </a:p>
@@ -10099,7 +10028,7 @@
                   <a:buNone/>
                 </a:pPr>
                 <a:r>
-                  <a:rPr lang="en-US" dirty="0" smtClean="0">
+                  <a:rPr lang="en-US" dirty="0">
                     <a:ea typeface="Cambria Math"/>
                   </a:rPr>
                   <a:t>Full illumination</a:t>
@@ -10110,19 +10039,19 @@
                   <a:buNone/>
                 </a:pPr>
                 <a:r>
-                  <a:rPr lang="en-US" dirty="0" smtClean="0">
+                  <a:rPr lang="en-US" dirty="0">
                     <a:ea typeface="Cambria Math"/>
                   </a:rPr>
                   <a:t>else if (</a:t>
                 </a:r>
                 <a:r>
-                  <a:rPr lang="en-US" dirty="0" err="1" smtClean="0">
+                  <a:rPr lang="en-US" dirty="0" err="1">
                     <a:ea typeface="Cambria Math"/>
                   </a:rPr>
                   <a:t>cos</a:t>
                 </a:r>
                 <a:r>
-                  <a:rPr lang="en-US" dirty="0" smtClean="0">
+                  <a:rPr lang="en-US" dirty="0">
                     <a:ea typeface="Cambria Math"/>
                   </a:rPr>
                   <a:t>(</a:t>
@@ -10139,19 +10068,19 @@
                   </m:oMath>
                 </a14:m>
                 <a:r>
-                  <a:rPr lang="en-US" dirty="0" smtClean="0">
+                  <a:rPr lang="en-US" dirty="0">
                     <a:ea typeface="Cambria Math"/>
                   </a:rPr>
                   <a:t>) &lt; </a:t>
                 </a:r>
                 <a:r>
-                  <a:rPr lang="en-US" dirty="0" err="1" smtClean="0">
+                  <a:rPr lang="en-US" dirty="0" err="1">
                     <a:ea typeface="Cambria Math"/>
                   </a:rPr>
                   <a:t>cos</a:t>
                 </a:r>
                 <a:r>
-                  <a:rPr lang="en-US" dirty="0" smtClean="0">
+                  <a:rPr lang="en-US" dirty="0">
                     <a:ea typeface="Cambria Math"/>
                   </a:rPr>
                   <a:t>(</a:t>
@@ -10189,7 +10118,7 @@
                   </m:oMath>
                 </a14:m>
                 <a:r>
-                  <a:rPr lang="en-US" dirty="0" smtClean="0">
+                  <a:rPr lang="en-US" dirty="0">
                     <a:ea typeface="Cambria Math"/>
                   </a:rPr>
                   <a:t>))   // </a:t>
@@ -10209,13 +10138,7 @@
                   <a:rPr lang="en-US" dirty="0">
                     <a:ea typeface="Cambria Math"/>
                   </a:rPr>
-                  <a:t> </a:t>
-                </a:r>
-                <a:r>
-                  <a:rPr lang="en-US" dirty="0" smtClean="0">
-                    <a:ea typeface="Cambria Math"/>
-                  </a:rPr>
-                  <a:t>&gt; </a:t>
+                  <a:t> &gt; </a:t>
                 </a:r>
                 <a14:m>
                   <m:oMath xmlns:m="http://schemas.openxmlformats.org/officeDocument/2006/math">
@@ -10228,7 +10151,7 @@
                     </m:r>
                   </m:oMath>
                 </a14:m>
-                <a:endParaRPr lang="en-US" dirty="0" smtClean="0">
+                <a:endParaRPr lang="en-US" dirty="0">
                   <a:ea typeface="Cambria Math"/>
                 </a:endParaRPr>
               </a:p>
@@ -10240,13 +10163,7 @@
                   <a:rPr lang="en-US" dirty="0">
                     <a:ea typeface="Cambria Math"/>
                   </a:rPr>
-                  <a:t> </a:t>
-                </a:r>
-                <a:r>
-                  <a:rPr lang="en-US" dirty="0" smtClean="0">
-                    <a:ea typeface="Cambria Math"/>
-                  </a:rPr>
-                  <a:t>        no illumination</a:t>
+                  <a:t>         no illumination</a:t>
                 </a:r>
               </a:p>
               <a:p>
@@ -10257,13 +10174,7 @@
                   <a:rPr lang="en-US" dirty="0">
                     <a:ea typeface="Cambria Math"/>
                   </a:rPr>
-                  <a:t>e</a:t>
-                </a:r>
-                <a:r>
-                  <a:rPr lang="en-US" dirty="0" smtClean="0">
-                    <a:ea typeface="Cambria Math"/>
-                  </a:rPr>
-                  <a:t>lse</a:t>
+                  <a:t>else</a:t>
                 </a:r>
               </a:p>
               <a:p>
@@ -10271,7 +10182,7 @@
                   <a:buNone/>
                 </a:pPr>
                 <a:r>
-                  <a:rPr lang="en-US" dirty="0" smtClean="0">
+                  <a:rPr lang="en-US" dirty="0">
                     <a:ea typeface="Cambria Math"/>
                   </a:rPr>
                   <a:t>         Penumbra region</a:t>
@@ -10533,7 +10444,7 @@
             <a:lstStyle/>
             <a:p>
               <a:r>
-                <a:rPr lang="el-GR" b="1" dirty="0" smtClean="0">
+                <a:rPr lang="el-GR" b="1" dirty="0">
                   <a:solidFill>
                     <a:srgbClr val="00FF00"/>
                   </a:solidFill>
@@ -11631,7 +11542,7 @@
                 <a:lstStyle/>
                 <a:p>
                   <a:r>
-                    <a:rPr lang="en-US" sz="1600" dirty="0" smtClean="0">
+                    <a:rPr lang="en-US" sz="1600" dirty="0">
                       <a:solidFill>
                         <a:schemeClr val="tx1"/>
                       </a:solidFill>
@@ -11639,14 +11550,14 @@
                     <a:t>A visible</a:t>
                   </a:r>
                   <a:br>
-                    <a:rPr lang="en-US" sz="1600" dirty="0" smtClean="0">
+                    <a:rPr lang="en-US" sz="1600" dirty="0">
                       <a:solidFill>
                         <a:schemeClr val="tx1"/>
                       </a:solidFill>
                     </a:rPr>
                   </a:br>
                   <a:r>
-                    <a:rPr lang="en-US" sz="1600" dirty="0" smtClean="0">
+                    <a:rPr lang="en-US" sz="1600" dirty="0">
                       <a:solidFill>
                         <a:schemeClr val="tx1"/>
                       </a:solidFill>
@@ -11695,18 +11606,13 @@
                     </m:oMath>
                   </a14:m>
                   <a:r>
-                    <a:rPr lang="en-US" sz="1600" dirty="0" smtClean="0">
+                    <a:rPr lang="en-US" sz="1600" dirty="0">
                       <a:solidFill>
                         <a:schemeClr val="tx1"/>
                       </a:solidFill>
                     </a:rPr>
                     <a:t> </a:t>
                   </a:r>
-                  <a:endParaRPr lang="en-US" sz="1600" dirty="0">
-                    <a:solidFill>
-                      <a:schemeClr val="tx1"/>
-                    </a:solidFill>
-                  </a:endParaRPr>
                 </a:p>
               </p:txBody>
             </p:sp>
@@ -11924,15 +11830,14 @@
           <a:lstStyle/>
           <a:p>
             <a:r>
-              <a:rPr lang="en-US" dirty="0" smtClean="0"/>
+              <a:rPr lang="en-US" dirty="0"/>
               <a:t>Distance Attenuation</a:t>
             </a:r>
-            <a:endParaRPr lang="en-US" dirty="0"/>
           </a:p>
         </p:txBody>
       </p:sp>
-      <mc:AlternateContent xmlns:mc="http://schemas.openxmlformats.org/markup-compatibility/2006" xmlns:a14="http://schemas.microsoft.com/office/drawing/2010/main">
-        <mc:Choice Requires="a14">
+      <mc:AlternateContent xmlns:mc="http://schemas.openxmlformats.org/markup-compatibility/2006">
+        <mc:Choice xmlns:a14="http://schemas.microsoft.com/office/drawing/2010/main" Requires="a14">
           <p:sp>
             <p:nvSpPr>
               <p:cNvPr id="3" name="Content Placeholder 2"/>
@@ -11954,27 +11859,27 @@
               <a:lstStyle/>
               <a:p>
                 <a:r>
-                  <a:rPr lang="en-US" dirty="0" smtClean="0"/>
+                  <a:rPr lang="en-US" dirty="0"/>
                   <a:t>Illumination is a function of </a:t>
                 </a:r>
               </a:p>
               <a:p>
                 <a:pPr lvl="2"/>
                 <a:r>
-                  <a:rPr lang="en-US" dirty="0" smtClean="0"/>
+                  <a:rPr lang="en-US" dirty="0"/>
                   <a:t>d = distance between light </a:t>
                 </a:r>
                 <a:br>
-                  <a:rPr lang="en-US" dirty="0" smtClean="0"/>
+                  <a:rPr lang="en-US" dirty="0"/>
                 </a:br>
                 <a:r>
-                  <a:rPr lang="en-US" dirty="0" smtClean="0"/>
+                  <a:rPr lang="en-US" dirty="0"/>
                   <a:t>       and visible position!!</a:t>
                 </a:r>
               </a:p>
               <a:p>
                 <a:r>
-                  <a:rPr lang="en-US" dirty="0" smtClean="0"/>
+                  <a:rPr lang="en-US" dirty="0"/>
                   <a:t>Physics tells us </a:t>
                 </a:r>
                 <a14:m>
@@ -12043,32 +11948,31 @@
                     </m:f>
                   </m:oMath>
                 </a14:m>
-                <a:endParaRPr lang="en-US" dirty="0" smtClean="0"/>
+                <a:endParaRPr lang="en-US" dirty="0"/>
               </a:p>
               <a:p>
                 <a:r>
-                  <a:rPr lang="en-US" dirty="0" smtClean="0"/>
-                  <a:t>Did not follow physics in the rest of the model!</a:t>
+                  <a:rPr lang="en-US" dirty="0"/>
+                  <a:t>Rest of the model: Did not follow physics!</a:t>
                 </a:r>
               </a:p>
               <a:p>
                 <a:pPr lvl="1"/>
                 <a:r>
-                  <a:rPr lang="en-US" dirty="0" smtClean="0"/>
+                  <a:rPr lang="en-US" dirty="0"/>
                   <a:t>WAY too dark!!</a:t>
                 </a:r>
               </a:p>
               <a:p>
                 <a:r>
-                  <a:rPr lang="en-US" dirty="0" smtClean="0"/>
+                  <a:rPr lang="en-US" dirty="0"/>
                   <a:t>Generally: </a:t>
                 </a:r>
-                <a:endParaRPr lang="en-US" dirty="0"/>
               </a:p>
             </p:txBody>
           </p:sp>
         </mc:Choice>
-        <mc:Fallback xmlns="">
+        <mc:Fallback>
           <p:sp>
             <p:nvSpPr>
               <p:cNvPr id="3" name="Content Placeholder 2"/>
@@ -12084,10 +11988,10 @@
                 <a:off x="474816" y="1485900"/>
                 <a:ext cx="8229600" cy="4525963"/>
               </a:xfrm>
-              <a:blipFill rotWithShape="1">
+              <a:blipFill>
                 <a:blip r:embed="rId2"/>
                 <a:stretch>
-                  <a:fillRect l="-1704" t="-1752" b="-1348"/>
+                  <a:fillRect l="-1704" t="-1752"/>
                 </a:stretch>
               </a:blipFill>
             </p:spPr>
@@ -12511,14 +12415,11 @@
                 <a:buNone/>
               </a:pPr>
               <a:r>
-                <a:rPr lang="en-US" dirty="0" smtClean="0">
+                <a:rPr lang="en-US" dirty="0">
                   <a:ea typeface="Cambria Math"/>
                 </a:rPr>
                 <a:t>d</a:t>
               </a:r>
-              <a:endParaRPr lang="en-US" dirty="0">
-                <a:ea typeface="Cambria Math"/>
-              </a:endParaRPr>
             </a:p>
           </p:txBody>
         </p:sp>
@@ -12884,6 +12785,1558 @@
           <a:chExt cx="0" cy="0"/>
         </a:xfrm>
       </p:grpSpPr>
+      <p:sp>
+        <p:nvSpPr>
+          <p:cNvPr id="2" name="Title 1">
+            <a:extLst>
+              <a:ext uri="{FF2B5EF4-FFF2-40B4-BE49-F238E27FC236}">
+                <a16:creationId xmlns:a16="http://schemas.microsoft.com/office/drawing/2014/main" id="{2914393E-E96F-9AC3-E5A3-71A22545EDA9}"/>
+              </a:ext>
+            </a:extLst>
+          </p:cNvPr>
+          <p:cNvSpPr>
+            <a:spLocks noGrp="1"/>
+          </p:cNvSpPr>
+          <p:nvPr>
+            <p:ph type="title"/>
+          </p:nvPr>
+        </p:nvSpPr>
+        <p:spPr/>
+        <p:txBody>
+          <a:bodyPr>
+            <a:normAutofit fontScale="90000"/>
+          </a:bodyPr>
+          <a:lstStyle/>
+          <a:p>
+            <a:r>
+              <a:rPr lang="en-US" dirty="0"/>
+              <a:t>Distance Attenuation implementation</a:t>
+            </a:r>
+          </a:p>
+        </p:txBody>
+      </p:sp>
+      <p:sp>
+        <p:nvSpPr>
+          <p:cNvPr id="3" name="Content Placeholder 2">
+            <a:extLst>
+              <a:ext uri="{FF2B5EF4-FFF2-40B4-BE49-F238E27FC236}">
+                <a16:creationId xmlns:a16="http://schemas.microsoft.com/office/drawing/2014/main" id="{F68D43FC-078F-7E26-17AF-429975F2FD54}"/>
+              </a:ext>
+            </a:extLst>
+          </p:cNvPr>
+          <p:cNvSpPr>
+            <a:spLocks noGrp="1"/>
+          </p:cNvSpPr>
+          <p:nvPr>
+            <p:ph idx="1"/>
+          </p:nvPr>
+        </p:nvSpPr>
+        <p:spPr/>
+        <p:txBody>
+          <a:bodyPr>
+            <a:normAutofit/>
+          </a:bodyPr>
+          <a:lstStyle/>
+          <a:p>
+            <a:r>
+              <a:rPr lang="en-US" dirty="0"/>
+              <a:t>Define a Near/Far</a:t>
+            </a:r>
+          </a:p>
+          <a:p>
+            <a:pPr lvl="1"/>
+            <a:r>
+              <a:rPr lang="en-US" dirty="0"/>
+              <a:t>That light can illuminate</a:t>
+            </a:r>
+          </a:p>
+          <a:p>
+            <a:r>
+              <a:rPr lang="en-US" dirty="0"/>
+              <a:t>Distance to visible point (</a:t>
+            </a:r>
+            <a:r>
+              <a:rPr lang="en-US" dirty="0" err="1"/>
+              <a:t>dist</a:t>
+            </a:r>
+            <a:r>
+              <a:rPr lang="en-US" dirty="0"/>
+              <a:t>)</a:t>
+            </a:r>
+          </a:p>
+          <a:p>
+            <a:pPr marL="0" indent="0">
+              <a:buNone/>
+            </a:pPr>
+            <a:r>
+              <a:rPr lang="en-US" sz="2400" dirty="0"/>
+              <a:t>             If (</a:t>
+            </a:r>
+            <a:r>
+              <a:rPr lang="en-US" sz="2400" dirty="0" err="1"/>
+              <a:t>dist</a:t>
+            </a:r>
+            <a:r>
+              <a:rPr lang="en-US" sz="2400" dirty="0"/>
+              <a:t> &gt; far)   // too far</a:t>
+            </a:r>
+          </a:p>
+          <a:p>
+            <a:pPr marL="0" indent="0">
+              <a:buNone/>
+            </a:pPr>
+            <a:r>
+              <a:rPr lang="en-US" sz="2400" dirty="0"/>
+              <a:t>                No illumination </a:t>
+            </a:r>
+          </a:p>
+          <a:p>
+            <a:pPr marL="457200" lvl="1" indent="0">
+              <a:buNone/>
+            </a:pPr>
+            <a:r>
+              <a:rPr lang="en-US" sz="2400" dirty="0"/>
+              <a:t>      else If (</a:t>
+            </a:r>
+            <a:r>
+              <a:rPr lang="en-US" sz="2400" dirty="0" err="1"/>
+              <a:t>dist</a:t>
+            </a:r>
+            <a:r>
+              <a:rPr lang="en-US" sz="2400" dirty="0"/>
+              <a:t> &lt; near)  // very close</a:t>
+            </a:r>
+          </a:p>
+          <a:p>
+            <a:pPr marL="914400" lvl="2" indent="0">
+              <a:buNone/>
+            </a:pPr>
+            <a:r>
+              <a:rPr lang="en-US" dirty="0"/>
+              <a:t>   Full light strength</a:t>
+            </a:r>
+          </a:p>
+          <a:p>
+            <a:pPr marL="914400" lvl="2" indent="0">
+              <a:buNone/>
+            </a:pPr>
+            <a:r>
+              <a:rPr lang="en-US" dirty="0"/>
+              <a:t>else   // between near and far</a:t>
+            </a:r>
+          </a:p>
+          <a:p>
+            <a:pPr marL="914400" lvl="2" indent="0">
+              <a:buNone/>
+            </a:pPr>
+            <a:r>
+              <a:rPr lang="en-US" dirty="0"/>
+              <a:t>    Some form of gradual degradation …</a:t>
+            </a:r>
+          </a:p>
+        </p:txBody>
+      </p:sp>
+      <p:grpSp>
+        <p:nvGrpSpPr>
+          <p:cNvPr id="4" name="Group 3">
+            <a:extLst>
+              <a:ext uri="{FF2B5EF4-FFF2-40B4-BE49-F238E27FC236}">
+                <a16:creationId xmlns:a16="http://schemas.microsoft.com/office/drawing/2014/main" id="{14E2042D-00DA-15D2-7C66-A5119315B96C}"/>
+              </a:ext>
+            </a:extLst>
+          </p:cNvPr>
+          <p:cNvGrpSpPr/>
+          <p:nvPr/>
+        </p:nvGrpSpPr>
+        <p:grpSpPr>
+          <a:xfrm>
+            <a:off x="5733675" y="1477067"/>
+            <a:ext cx="3038422" cy="2216078"/>
+            <a:chOff x="5546287" y="3343683"/>
+            <a:chExt cx="3038422" cy="2216078"/>
+          </a:xfrm>
+        </p:grpSpPr>
+        <p:sp>
+          <p:nvSpPr>
+            <p:cNvPr id="5" name="Trapezoid 4">
+              <a:extLst>
+                <a:ext uri="{FF2B5EF4-FFF2-40B4-BE49-F238E27FC236}">
+                  <a16:creationId xmlns:a16="http://schemas.microsoft.com/office/drawing/2014/main" id="{E7034013-EE9D-7628-621A-F9D195F54E8C}"/>
+                </a:ext>
+              </a:extLst>
+            </p:cNvPr>
+            <p:cNvSpPr/>
+            <p:nvPr/>
+          </p:nvSpPr>
+          <p:spPr>
+            <a:xfrm>
+              <a:off x="5775086" y="4959511"/>
+              <a:ext cx="2087116" cy="600250"/>
+            </a:xfrm>
+            <a:prstGeom prst="trapezoid">
+              <a:avLst>
+                <a:gd name="adj" fmla="val 56308"/>
+              </a:avLst>
+            </a:prstGeom>
+          </p:spPr>
+          <p:style>
+            <a:lnRef idx="2">
+              <a:schemeClr val="accent1">
+                <a:shade val="50000"/>
+              </a:schemeClr>
+            </a:lnRef>
+            <a:fillRef idx="1">
+              <a:schemeClr val="accent1"/>
+            </a:fillRef>
+            <a:effectRef idx="0">
+              <a:schemeClr val="accent1"/>
+            </a:effectRef>
+            <a:fontRef idx="minor">
+              <a:schemeClr val="lt1"/>
+            </a:fontRef>
+          </p:style>
+          <p:txBody>
+            <a:bodyPr rtlCol="0" anchor="ctr"/>
+            <a:lstStyle/>
+            <a:p>
+              <a:pPr algn="ctr"/>
+              <a:endParaRPr lang="en-US"/>
+            </a:p>
+          </p:txBody>
+        </p:sp>
+        <p:sp>
+          <p:nvSpPr>
+            <p:cNvPr id="6" name="Sun 5">
+              <a:extLst>
+                <a:ext uri="{FF2B5EF4-FFF2-40B4-BE49-F238E27FC236}">
+                  <a16:creationId xmlns:a16="http://schemas.microsoft.com/office/drawing/2014/main" id="{8A378B75-A909-7719-4994-870EC6ADF524}"/>
+                </a:ext>
+              </a:extLst>
+            </p:cNvPr>
+            <p:cNvSpPr/>
+            <p:nvPr/>
+          </p:nvSpPr>
+          <p:spPr>
+            <a:xfrm rot="19891773">
+              <a:off x="7809660" y="3343683"/>
+              <a:ext cx="387078" cy="364638"/>
+            </a:xfrm>
+            <a:prstGeom prst="sun">
+              <a:avLst>
+                <a:gd name="adj" fmla="val 20252"/>
+              </a:avLst>
+            </a:prstGeom>
+            <a:solidFill>
+              <a:srgbClr val="FFFF00"/>
+            </a:solidFill>
+            <a:ln>
+              <a:solidFill>
+                <a:schemeClr val="accent6">
+                  <a:lumMod val="75000"/>
+                </a:schemeClr>
+              </a:solidFill>
+            </a:ln>
+            <a:scene3d>
+              <a:camera prst="isometricOffAxis1Left"/>
+              <a:lightRig rig="threePt" dir="t"/>
+            </a:scene3d>
+            <a:sp3d>
+              <a:bevelT w="133350" h="107950"/>
+            </a:sp3d>
+          </p:spPr>
+          <p:style>
+            <a:lnRef idx="2">
+              <a:schemeClr val="accent1">
+                <a:shade val="50000"/>
+              </a:schemeClr>
+            </a:lnRef>
+            <a:fillRef idx="1">
+              <a:schemeClr val="accent1"/>
+            </a:fillRef>
+            <a:effectRef idx="0">
+              <a:schemeClr val="accent1"/>
+            </a:effectRef>
+            <a:fontRef idx="minor">
+              <a:schemeClr val="lt1"/>
+            </a:fontRef>
+          </p:style>
+          <p:txBody>
+            <a:bodyPr rtlCol="0" anchor="ctr"/>
+            <a:lstStyle/>
+            <a:p>
+              <a:pPr algn="ctr"/>
+              <a:endParaRPr lang="en-US"/>
+            </a:p>
+          </p:txBody>
+        </p:sp>
+        <p:cxnSp>
+          <p:nvCxnSpPr>
+            <p:cNvPr id="7" name="Straight Arrow Connector 6">
+              <a:extLst>
+                <a:ext uri="{FF2B5EF4-FFF2-40B4-BE49-F238E27FC236}">
+                  <a16:creationId xmlns:a16="http://schemas.microsoft.com/office/drawing/2014/main" id="{F996C74B-8F90-3D47-7E67-DA5D0DAAF07A}"/>
+                </a:ext>
+              </a:extLst>
+            </p:cNvPr>
+            <p:cNvCxnSpPr/>
+            <p:nvPr/>
+          </p:nvCxnSpPr>
+          <p:spPr>
+            <a:xfrm flipH="1">
+              <a:off x="7121652" y="3580266"/>
+              <a:ext cx="881548" cy="1610018"/>
+            </a:xfrm>
+            <a:prstGeom prst="straightConnector1">
+              <a:avLst/>
+            </a:prstGeom>
+            <a:ln w="76200" cmpd="sng">
+              <a:solidFill>
+                <a:schemeClr val="accent4">
+                  <a:lumMod val="60000"/>
+                  <a:lumOff val="40000"/>
+                </a:schemeClr>
+              </a:solidFill>
+              <a:prstDash val="solid"/>
+              <a:headEnd type="triangle"/>
+              <a:tailEnd type="none"/>
+            </a:ln>
+            <a:effectLst>
+              <a:softEdge rad="12700"/>
+            </a:effectLst>
+            <a:scene3d>
+              <a:camera prst="orthographicFront"/>
+              <a:lightRig rig="threePt" dir="t">
+                <a:rot lat="0" lon="0" rev="600000"/>
+              </a:lightRig>
+            </a:scene3d>
+            <a:sp3d prstMaterial="dkEdge">
+              <a:bevelT w="158750" h="25400"/>
+            </a:sp3d>
+          </p:spPr>
+          <p:style>
+            <a:lnRef idx="1">
+              <a:schemeClr val="accent1"/>
+            </a:lnRef>
+            <a:fillRef idx="0">
+              <a:schemeClr val="accent1"/>
+            </a:fillRef>
+            <a:effectRef idx="0">
+              <a:schemeClr val="accent1"/>
+            </a:effectRef>
+            <a:fontRef idx="minor">
+              <a:schemeClr val="tx1"/>
+            </a:fontRef>
+          </p:style>
+        </p:cxnSp>
+        <p:sp>
+          <p:nvSpPr>
+            <p:cNvPr id="8" name="Smiley Face 7">
+              <a:extLst>
+                <a:ext uri="{FF2B5EF4-FFF2-40B4-BE49-F238E27FC236}">
+                  <a16:creationId xmlns:a16="http://schemas.microsoft.com/office/drawing/2014/main" id="{03E898FC-7B9A-3F39-A1B1-9C4154F58C2E}"/>
+                </a:ext>
+              </a:extLst>
+            </p:cNvPr>
+            <p:cNvSpPr/>
+            <p:nvPr/>
+          </p:nvSpPr>
+          <p:spPr>
+            <a:xfrm rot="1357203">
+              <a:off x="5546287" y="4102035"/>
+              <a:ext cx="572202" cy="579799"/>
+            </a:xfrm>
+            <a:prstGeom prst="smileyFace">
+              <a:avLst>
+                <a:gd name="adj" fmla="val 4653"/>
+              </a:avLst>
+            </a:prstGeom>
+            <a:scene3d>
+              <a:camera prst="isometricOffAxis2Right"/>
+              <a:lightRig rig="threePt" dir="t"/>
+            </a:scene3d>
+            <a:sp3d>
+              <a:bevelT w="139700" h="139700"/>
+            </a:sp3d>
+          </p:spPr>
+          <p:style>
+            <a:lnRef idx="2">
+              <a:schemeClr val="accent1">
+                <a:shade val="50000"/>
+              </a:schemeClr>
+            </a:lnRef>
+            <a:fillRef idx="1">
+              <a:schemeClr val="accent1"/>
+            </a:fillRef>
+            <a:effectRef idx="0">
+              <a:schemeClr val="accent1"/>
+            </a:effectRef>
+            <a:fontRef idx="minor">
+              <a:schemeClr val="lt1"/>
+            </a:fontRef>
+          </p:style>
+          <p:txBody>
+            <a:bodyPr rtlCol="0" anchor="ctr"/>
+            <a:lstStyle/>
+            <a:p>
+              <a:pPr algn="ctr"/>
+              <a:endParaRPr lang="en-US"/>
+            </a:p>
+          </p:txBody>
+        </p:sp>
+        <p:cxnSp>
+          <p:nvCxnSpPr>
+            <p:cNvPr id="9" name="Straight Arrow Connector 8">
+              <a:extLst>
+                <a:ext uri="{FF2B5EF4-FFF2-40B4-BE49-F238E27FC236}">
+                  <a16:creationId xmlns:a16="http://schemas.microsoft.com/office/drawing/2014/main" id="{F268EFF6-10FE-74BA-E4B8-A8BEEDF866B0}"/>
+                </a:ext>
+              </a:extLst>
+            </p:cNvPr>
+            <p:cNvCxnSpPr/>
+            <p:nvPr/>
+          </p:nvCxnSpPr>
+          <p:spPr>
+            <a:xfrm flipH="1" flipV="1">
+              <a:off x="5905500" y="4531130"/>
+              <a:ext cx="1227679" cy="659155"/>
+            </a:xfrm>
+            <a:prstGeom prst="straightConnector1">
+              <a:avLst/>
+            </a:prstGeom>
+            <a:ln w="76200" cmpd="sng">
+              <a:solidFill>
+                <a:schemeClr val="accent3">
+                  <a:lumMod val="60000"/>
+                  <a:lumOff val="40000"/>
+                </a:schemeClr>
+              </a:solidFill>
+              <a:prstDash val="solid"/>
+              <a:headEnd type="none"/>
+              <a:tailEnd type="triangle"/>
+            </a:ln>
+            <a:effectLst>
+              <a:softEdge rad="12700"/>
+            </a:effectLst>
+            <a:scene3d>
+              <a:camera prst="orthographicFront"/>
+              <a:lightRig rig="soft" dir="t"/>
+            </a:scene3d>
+            <a:sp3d prstMaterial="softEdge">
+              <a:bevelT w="158750" h="25400"/>
+            </a:sp3d>
+          </p:spPr>
+          <p:style>
+            <a:lnRef idx="1">
+              <a:schemeClr val="accent1"/>
+            </a:lnRef>
+            <a:fillRef idx="0">
+              <a:schemeClr val="accent1"/>
+            </a:fillRef>
+            <a:effectRef idx="0">
+              <a:schemeClr val="accent1"/>
+            </a:effectRef>
+            <a:fontRef idx="minor">
+              <a:schemeClr val="tx1"/>
+            </a:fontRef>
+          </p:style>
+        </p:cxnSp>
+        <p:cxnSp>
+          <p:nvCxnSpPr>
+            <p:cNvPr id="10" name="Straight Arrow Connector 9">
+              <a:extLst>
+                <a:ext uri="{FF2B5EF4-FFF2-40B4-BE49-F238E27FC236}">
+                  <a16:creationId xmlns:a16="http://schemas.microsoft.com/office/drawing/2014/main" id="{6BB2F31D-9493-22C7-96AB-F9F193E8A4CF}"/>
+                </a:ext>
+              </a:extLst>
+            </p:cNvPr>
+            <p:cNvCxnSpPr/>
+            <p:nvPr/>
+          </p:nvCxnSpPr>
+          <p:spPr>
+            <a:xfrm flipH="1" flipV="1">
+              <a:off x="7956522" y="3592558"/>
+              <a:ext cx="628187" cy="370182"/>
+            </a:xfrm>
+            <a:prstGeom prst="straightConnector1">
+              <a:avLst/>
+            </a:prstGeom>
+            <a:ln w="25400">
+              <a:solidFill>
+                <a:srgbClr val="FF0000"/>
+              </a:solidFill>
+              <a:prstDash val="dashDot"/>
+              <a:tailEnd type="none" w="med" len="lg"/>
+            </a:ln>
+          </p:spPr>
+          <p:style>
+            <a:lnRef idx="1">
+              <a:schemeClr val="accent1"/>
+            </a:lnRef>
+            <a:fillRef idx="0">
+              <a:schemeClr val="accent1"/>
+            </a:fillRef>
+            <a:effectRef idx="0">
+              <a:schemeClr val="accent1"/>
+            </a:effectRef>
+            <a:fontRef idx="minor">
+              <a:schemeClr val="tx1"/>
+            </a:fontRef>
+          </p:style>
+        </p:cxnSp>
+        <p:cxnSp>
+          <p:nvCxnSpPr>
+            <p:cNvPr id="11" name="Straight Arrow Connector 10">
+              <a:extLst>
+                <a:ext uri="{FF2B5EF4-FFF2-40B4-BE49-F238E27FC236}">
+                  <a16:creationId xmlns:a16="http://schemas.microsoft.com/office/drawing/2014/main" id="{10B90DCC-D2D7-8AE7-CE94-FB4C1B96BCC8}"/>
+                </a:ext>
+              </a:extLst>
+            </p:cNvPr>
+            <p:cNvCxnSpPr/>
+            <p:nvPr/>
+          </p:nvCxnSpPr>
+          <p:spPr>
+            <a:xfrm flipH="1">
+              <a:off x="7499350" y="3778533"/>
+              <a:ext cx="771265" cy="1596137"/>
+            </a:xfrm>
+            <a:prstGeom prst="straightConnector1">
+              <a:avLst/>
+            </a:prstGeom>
+            <a:ln w="28575">
+              <a:solidFill>
+                <a:srgbClr val="FF0000"/>
+              </a:solidFill>
+              <a:prstDash val="sysDot"/>
+              <a:headEnd type="arrow"/>
+              <a:tailEnd type="arrow" w="med" len="lg"/>
+            </a:ln>
+          </p:spPr>
+          <p:style>
+            <a:lnRef idx="1">
+              <a:schemeClr val="accent1"/>
+            </a:lnRef>
+            <a:fillRef idx="0">
+              <a:schemeClr val="accent1"/>
+            </a:fillRef>
+            <a:effectRef idx="0">
+              <a:schemeClr val="accent1"/>
+            </a:effectRef>
+            <a:fontRef idx="minor">
+              <a:schemeClr val="tx1"/>
+            </a:fontRef>
+          </p:style>
+        </p:cxnSp>
+        <p:cxnSp>
+          <p:nvCxnSpPr>
+            <p:cNvPr id="12" name="Straight Arrow Connector 11">
+              <a:extLst>
+                <a:ext uri="{FF2B5EF4-FFF2-40B4-BE49-F238E27FC236}">
+                  <a16:creationId xmlns:a16="http://schemas.microsoft.com/office/drawing/2014/main" id="{105E784F-CEC1-93A6-0F05-89936FB7BCD6}"/>
+                </a:ext>
+              </a:extLst>
+            </p:cNvPr>
+            <p:cNvCxnSpPr/>
+            <p:nvPr/>
+          </p:nvCxnSpPr>
+          <p:spPr>
+            <a:xfrm flipH="1" flipV="1">
+              <a:off x="7117966" y="5189579"/>
+              <a:ext cx="628187" cy="370182"/>
+            </a:xfrm>
+            <a:prstGeom prst="straightConnector1">
+              <a:avLst/>
+            </a:prstGeom>
+            <a:ln w="25400">
+              <a:solidFill>
+                <a:srgbClr val="FF0000"/>
+              </a:solidFill>
+              <a:prstDash val="dashDot"/>
+              <a:tailEnd type="none" w="med" len="lg"/>
+            </a:ln>
+          </p:spPr>
+          <p:style>
+            <a:lnRef idx="1">
+              <a:schemeClr val="accent1"/>
+            </a:lnRef>
+            <a:fillRef idx="0">
+              <a:schemeClr val="accent1"/>
+            </a:fillRef>
+            <a:effectRef idx="0">
+              <a:schemeClr val="accent1"/>
+            </a:effectRef>
+            <a:fontRef idx="minor">
+              <a:schemeClr val="tx1"/>
+            </a:fontRef>
+          </p:style>
+        </p:cxnSp>
+        <p:sp>
+          <p:nvSpPr>
+            <p:cNvPr id="13" name="Rectangle 12">
+              <a:extLst>
+                <a:ext uri="{FF2B5EF4-FFF2-40B4-BE49-F238E27FC236}">
+                  <a16:creationId xmlns:a16="http://schemas.microsoft.com/office/drawing/2014/main" id="{E1B0B1F7-DA51-B291-3D0B-026271F59CA8}"/>
+                </a:ext>
+              </a:extLst>
+            </p:cNvPr>
+            <p:cNvSpPr/>
+            <p:nvPr/>
+          </p:nvSpPr>
+          <p:spPr>
+            <a:xfrm>
+              <a:off x="7956522" y="4391935"/>
+              <a:ext cx="306494" cy="369332"/>
+            </a:xfrm>
+            <a:prstGeom prst="rect">
+              <a:avLst/>
+            </a:prstGeom>
+          </p:spPr>
+          <p:txBody>
+            <a:bodyPr wrap="none">
+              <a:spAutoFit/>
+            </a:bodyPr>
+            <a:lstStyle/>
+            <a:p>
+              <a:pPr marL="0" lvl="1" indent="0">
+                <a:buNone/>
+              </a:pPr>
+              <a:r>
+                <a:rPr lang="en-US" dirty="0">
+                  <a:ea typeface="Cambria Math"/>
+                </a:rPr>
+                <a:t>d</a:t>
+              </a:r>
+            </a:p>
+          </p:txBody>
+        </p:sp>
+      </p:grpSp>
+    </p:spTree>
+    <p:extLst>
+      <p:ext uri="{BB962C8B-B14F-4D97-AF65-F5344CB8AC3E}">
+        <p14:creationId xmlns:p14="http://schemas.microsoft.com/office/powerpoint/2010/main" val="1352581204"/>
+      </p:ext>
+    </p:extLst>
+  </p:cSld>
+  <p:clrMapOvr>
+    <a:masterClrMapping/>
+  </p:clrMapOvr>
+</p:sld>
+</file>
+
+<file path=ppt/slides/slide17.xml><?xml version="1.0" encoding="utf-8"?>
+<p:sld xmlns:a="http://schemas.openxmlformats.org/drawingml/2006/main" xmlns:r="http://schemas.openxmlformats.org/officeDocument/2006/relationships" xmlns:p="http://schemas.openxmlformats.org/presentationml/2006/main">
+  <p:cSld>
+    <p:spTree>
+      <p:nvGrpSpPr>
+        <p:cNvPr id="1" name=""/>
+        <p:cNvGrpSpPr/>
+        <p:nvPr/>
+      </p:nvGrpSpPr>
+      <p:grpSpPr>
+        <a:xfrm>
+          <a:off x="0" y="0"/>
+          <a:ext cx="0" cy="0"/>
+          <a:chOff x="0" y="0"/>
+          <a:chExt cx="0" cy="0"/>
+        </a:xfrm>
+      </p:grpSpPr>
+      <p:sp>
+        <p:nvSpPr>
+          <p:cNvPr id="2" name="Title 1">
+            <a:extLst>
+              <a:ext uri="{FF2B5EF4-FFF2-40B4-BE49-F238E27FC236}">
+                <a16:creationId xmlns:a16="http://schemas.microsoft.com/office/drawing/2014/main" id="{412D6838-B094-799A-A264-013B6BAC979F}"/>
+              </a:ext>
+            </a:extLst>
+          </p:cNvPr>
+          <p:cNvSpPr>
+            <a:spLocks noGrp="1"/>
+          </p:cNvSpPr>
+          <p:nvPr>
+            <p:ph type="title"/>
+          </p:nvPr>
+        </p:nvSpPr>
+        <p:spPr/>
+        <p:txBody>
+          <a:bodyPr/>
+          <a:lstStyle/>
+          <a:p>
+            <a:r>
+              <a:rPr lang="en-US" dirty="0"/>
+              <a:t>The </a:t>
+            </a:r>
+            <a:r>
+              <a:rPr lang="en-US" dirty="0" err="1"/>
+              <a:t>smoothstep</a:t>
+            </a:r>
+            <a:r>
+              <a:rPr lang="en-US" dirty="0"/>
+              <a:t>() function</a:t>
+            </a:r>
+          </a:p>
+        </p:txBody>
+      </p:sp>
+      <mc:AlternateContent xmlns:mc="http://schemas.openxmlformats.org/markup-compatibility/2006">
+        <mc:Choice xmlns:a14="http://schemas.microsoft.com/office/drawing/2010/main" Requires="a14">
+          <p:sp>
+            <p:nvSpPr>
+              <p:cNvPr id="3" name="Content Placeholder 2">
+                <a:extLst>
+                  <a:ext uri="{FF2B5EF4-FFF2-40B4-BE49-F238E27FC236}">
+                    <a16:creationId xmlns:a16="http://schemas.microsoft.com/office/drawing/2014/main" id="{E6582E1D-76DF-9435-6638-70F3EC4F6283}"/>
+                  </a:ext>
+                </a:extLst>
+              </p:cNvPr>
+              <p:cNvSpPr>
+                <a:spLocks noGrp="1"/>
+              </p:cNvSpPr>
+              <p:nvPr>
+                <p:ph idx="1"/>
+              </p:nvPr>
+            </p:nvSpPr>
+            <p:spPr/>
+            <p:txBody>
+              <a:bodyPr>
+                <a:normAutofit fontScale="92500" lnSpcReduction="10000"/>
+              </a:bodyPr>
+              <a:lstStyle/>
+              <a:p>
+                <a:r>
+                  <a:rPr lang="en-US" dirty="0"/>
+                  <a:t>s</a:t>
+                </a:r>
+                <a:r>
+                  <a:rPr lang="en-US" dirty="0" err="1"/>
+                  <a:t>moothstep</a:t>
+                </a:r>
+                <a:r>
+                  <a:rPr lang="en-US" dirty="0"/>
+                  <a:t>(a, b, t)</a:t>
+                </a:r>
+              </a:p>
+              <a:p>
+                <a:pPr lvl="1">
+                  <a:spcBef>
+                    <a:spcPts val="0"/>
+                  </a:spcBef>
+                </a:pPr>
+                <a:r>
+                  <a:rPr lang="en-US" dirty="0"/>
+                  <a:t>Goes from a to b: </a:t>
+                </a:r>
+                <a14:m>
+                  <m:oMath xmlns:m="http://schemas.openxmlformats.org/officeDocument/2006/math">
+                    <m:sSup>
+                      <m:sSupPr>
+                        <m:ctrlPr>
+                          <a:rPr lang="en-US" i="1">
+                            <a:latin typeface="Cambria Math" panose="02040503050406030204" pitchFamily="18" charset="0"/>
+                            <a:ea typeface="Cambria Math"/>
+                          </a:rPr>
+                        </m:ctrlPr>
+                      </m:sSupPr>
+                      <m:e>
+                        <m:r>
+                          <a:rPr lang="en-US" i="1">
+                            <a:latin typeface="Cambria Math" panose="02040503050406030204" pitchFamily="18" charset="0"/>
+                            <a:ea typeface="Cambria Math"/>
+                          </a:rPr>
+                          <m:t>3</m:t>
+                        </m:r>
+                        <m:r>
+                          <a:rPr lang="en-US" i="1">
+                            <a:latin typeface="Cambria Math" panose="02040503050406030204" pitchFamily="18" charset="0"/>
+                            <a:ea typeface="Cambria Math"/>
+                          </a:rPr>
+                          <m:t>𝑡</m:t>
+                        </m:r>
+                      </m:e>
+                      <m:sup>
+                        <m:r>
+                          <a:rPr lang="en-US" b="0" i="1" smtClean="0">
+                            <a:latin typeface="Cambria Math" panose="02040503050406030204" pitchFamily="18" charset="0"/>
+                            <a:ea typeface="Cambria Math"/>
+                          </a:rPr>
+                          <m:t>2</m:t>
+                        </m:r>
+                      </m:sup>
+                    </m:sSup>
+                    <m:r>
+                      <a:rPr lang="en-US" i="1">
+                        <a:latin typeface="Cambria Math" panose="02040503050406030204" pitchFamily="18" charset="0"/>
+                        <a:ea typeface="Cambria Math"/>
+                      </a:rPr>
+                      <m:t>−</m:t>
+                    </m:r>
+                    <m:sSup>
+                      <m:sSupPr>
+                        <m:ctrlPr>
+                          <a:rPr lang="en-US" i="1">
+                            <a:latin typeface="Cambria Math" panose="02040503050406030204" pitchFamily="18" charset="0"/>
+                            <a:ea typeface="Cambria Math"/>
+                          </a:rPr>
+                        </m:ctrlPr>
+                      </m:sSupPr>
+                      <m:e>
+                        <m:r>
+                          <a:rPr lang="en-US" i="1">
+                            <a:latin typeface="Cambria Math" panose="02040503050406030204" pitchFamily="18" charset="0"/>
+                            <a:ea typeface="Cambria Math"/>
+                          </a:rPr>
+                          <m:t>2</m:t>
+                        </m:r>
+                        <m:r>
+                          <a:rPr lang="en-US" i="1">
+                            <a:latin typeface="Cambria Math" panose="02040503050406030204" pitchFamily="18" charset="0"/>
+                            <a:ea typeface="Cambria Math"/>
+                          </a:rPr>
+                          <m:t>𝑡</m:t>
+                        </m:r>
+                      </m:e>
+                      <m:sup>
+                        <m:r>
+                          <a:rPr lang="en-US" b="0" i="1" smtClean="0">
+                            <a:latin typeface="Cambria Math" panose="02040503050406030204" pitchFamily="18" charset="0"/>
+                            <a:ea typeface="Cambria Math"/>
+                          </a:rPr>
+                          <m:t>3</m:t>
+                        </m:r>
+                      </m:sup>
+                    </m:sSup>
+                    <m:r>
+                      <a:rPr lang="en-US" i="1">
+                        <a:latin typeface="Cambria Math" panose="02040503050406030204" pitchFamily="18" charset="0"/>
+                        <a:ea typeface="Cambria Math"/>
+                      </a:rPr>
+                      <m:t> </m:t>
+                    </m:r>
+                  </m:oMath>
+                </a14:m>
+                <a:endParaRPr lang="en-US" dirty="0">
+                  <a:ea typeface="Cambria Math"/>
+                </a:endParaRPr>
+              </a:p>
+              <a:p>
+                <a:pPr marL="457200" lvl="1" indent="0">
+                  <a:spcBef>
+                    <a:spcPts val="0"/>
+                  </a:spcBef>
+                  <a:buNone/>
+                </a:pPr>
+                <a:r>
+                  <a:rPr lang="en-US" dirty="0"/>
+                  <a:t>	t = 0  return a</a:t>
+                </a:r>
+              </a:p>
+              <a:p>
+                <a:pPr marL="457200" lvl="1" indent="0">
+                  <a:spcBef>
+                    <a:spcPts val="0"/>
+                  </a:spcBef>
+                  <a:buNone/>
+                </a:pPr>
+                <a:r>
+                  <a:rPr lang="en-US" dirty="0"/>
+                  <a:t>	t = 1  return b</a:t>
+                </a:r>
+              </a:p>
+              <a:p>
+                <a:pPr>
+                  <a:spcBef>
+                    <a:spcPts val="0"/>
+                  </a:spcBef>
+                </a:pPr>
+                <a:r>
+                  <a:rPr lang="en-US" dirty="0"/>
+                  <a:t>Let </a:t>
+                </a:r>
+              </a:p>
+              <a:p>
+                <a:pPr lvl="1">
+                  <a:spcBef>
+                    <a:spcPts val="0"/>
+                  </a:spcBef>
+                </a:pPr>
+                <a:r>
+                  <a:rPr lang="en-US" dirty="0"/>
+                  <a:t>n = </a:t>
+                </a:r>
+                <a:r>
+                  <a:rPr lang="en-US" dirty="0" err="1"/>
+                  <a:t>dist</a:t>
+                </a:r>
+                <a:r>
+                  <a:rPr lang="en-US" dirty="0"/>
+                  <a:t> – near</a:t>
+                </a:r>
+              </a:p>
+              <a:p>
+                <a:pPr lvl="1">
+                  <a:spcBef>
+                    <a:spcPts val="0"/>
+                  </a:spcBef>
+                </a:pPr>
+                <a:r>
+                  <a:rPr lang="en-US" dirty="0"/>
+                  <a:t>d = far – near  (constant for each frame)</a:t>
+                </a:r>
+              </a:p>
+              <a:p>
+                <a:r>
+                  <a:rPr lang="en-US" dirty="0" err="1"/>
+                  <a:t>smoothstep</a:t>
+                </a:r>
+                <a:r>
+                  <a:rPr lang="en-US" dirty="0"/>
+                  <a:t>(0, 1, 1 - </a:t>
+                </a:r>
+                <a14:m>
+                  <m:oMath xmlns:m="http://schemas.openxmlformats.org/officeDocument/2006/math">
+                    <m:d>
+                      <m:dPr>
+                        <m:ctrlPr>
+                          <a:rPr lang="en-US" i="1" smtClean="0">
+                            <a:latin typeface="Cambria Math" panose="02040503050406030204" pitchFamily="18" charset="0"/>
+                          </a:rPr>
+                        </m:ctrlPr>
+                      </m:dPr>
+                      <m:e>
+                        <m:f>
+                          <m:fPr>
+                            <m:ctrlPr>
+                              <a:rPr lang="en-US" i="1">
+                                <a:latin typeface="Cambria Math" panose="02040503050406030204" pitchFamily="18" charset="0"/>
+                              </a:rPr>
+                            </m:ctrlPr>
+                          </m:fPr>
+                          <m:num>
+                            <m:r>
+                              <a:rPr lang="en-US" i="1">
+                                <a:latin typeface="Cambria Math" panose="02040503050406030204" pitchFamily="18" charset="0"/>
+                              </a:rPr>
+                              <m:t>𝑛</m:t>
+                            </m:r>
+                            <m:r>
+                              <a:rPr lang="en-US" i="1">
+                                <a:latin typeface="Cambria Math" panose="02040503050406030204" pitchFamily="18" charset="0"/>
+                              </a:rPr>
+                              <m:t> ∗</m:t>
+                            </m:r>
+                            <m:r>
+                              <a:rPr lang="en-US" i="1">
+                                <a:latin typeface="Cambria Math" panose="02040503050406030204" pitchFamily="18" charset="0"/>
+                              </a:rPr>
+                              <m:t>𝑛</m:t>
+                            </m:r>
+                          </m:num>
+                          <m:den>
+                            <m:r>
+                              <a:rPr lang="en-US" i="1">
+                                <a:latin typeface="Cambria Math" panose="02040503050406030204" pitchFamily="18" charset="0"/>
+                              </a:rPr>
+                              <m:t>𝑑</m:t>
+                            </m:r>
+                            <m:r>
+                              <a:rPr lang="en-US" i="1">
+                                <a:latin typeface="Cambria Math" panose="02040503050406030204" pitchFamily="18" charset="0"/>
+                              </a:rPr>
+                              <m:t> ∗</m:t>
+                            </m:r>
+                            <m:r>
+                              <a:rPr lang="en-US" i="1">
+                                <a:latin typeface="Cambria Math" panose="02040503050406030204" pitchFamily="18" charset="0"/>
+                              </a:rPr>
+                              <m:t>𝑑</m:t>
+                            </m:r>
+                          </m:den>
+                        </m:f>
+                      </m:e>
+                    </m:d>
+                  </m:oMath>
+                </a14:m>
+                <a:r>
+                  <a:rPr lang="en-US" dirty="0"/>
+                  <a:t> )   // 0 to 1</a:t>
+                </a:r>
+              </a:p>
+              <a:p>
+                <a:pPr lvl="1"/>
+                <a:r>
+                  <a:rPr lang="en-US" dirty="0" err="1"/>
+                  <a:t>dist</a:t>
+                </a:r>
+                <a:r>
+                  <a:rPr lang="en-US" dirty="0"/>
+                  <a:t> == near, n = 0, </a:t>
+                </a:r>
+                <a:r>
+                  <a:rPr lang="en-US" dirty="0" err="1"/>
+                  <a:t>smoothstep</a:t>
+                </a:r>
+                <a:r>
+                  <a:rPr lang="en-US" dirty="0"/>
+                  <a:t>(0, 1, 1): return  1</a:t>
+                </a:r>
+              </a:p>
+              <a:p>
+                <a:pPr lvl="1"/>
+                <a:r>
+                  <a:rPr lang="en-US" dirty="0" err="1"/>
+                  <a:t>dist</a:t>
+                </a:r>
+                <a:r>
+                  <a:rPr lang="en-US" dirty="0"/>
+                  <a:t> == far, n = d, </a:t>
+                </a:r>
+                <a:r>
+                  <a:rPr lang="en-US" dirty="0" err="1"/>
+                  <a:t>smoothstep</a:t>
+                </a:r>
+                <a:r>
+                  <a:rPr lang="en-US" dirty="0"/>
+                  <a:t>(0, 1, 0): return 0</a:t>
+                </a:r>
+              </a:p>
+              <a:p>
+                <a:endParaRPr lang="en-US" dirty="0"/>
+              </a:p>
+            </p:txBody>
+          </p:sp>
+        </mc:Choice>
+        <mc:Fallback>
+          <p:sp>
+            <p:nvSpPr>
+              <p:cNvPr id="3" name="Content Placeholder 2">
+                <a:extLst>
+                  <a:ext uri="{FF2B5EF4-FFF2-40B4-BE49-F238E27FC236}">
+                    <a16:creationId xmlns:a16="http://schemas.microsoft.com/office/drawing/2014/main" id="{E6582E1D-76DF-9435-6638-70F3EC4F6283}"/>
+                  </a:ext>
+                </a:extLst>
+              </p:cNvPr>
+              <p:cNvSpPr>
+                <a:spLocks noGrp="1" noRot="1" noChangeAspect="1" noMove="1" noResize="1" noEditPoints="1" noAdjustHandles="1" noChangeArrowheads="1" noChangeShapeType="1" noTextEdit="1"/>
+              </p:cNvSpPr>
+              <p:nvPr>
+                <p:ph idx="1"/>
+              </p:nvPr>
+            </p:nvSpPr>
+            <p:spPr>
+              <a:blipFill>
+                <a:blip r:embed="rId2"/>
+                <a:stretch>
+                  <a:fillRect l="-1481" t="-2695"/>
+                </a:stretch>
+              </a:blipFill>
+            </p:spPr>
+            <p:txBody>
+              <a:bodyPr/>
+              <a:lstStyle/>
+              <a:p>
+                <a:r>
+                  <a:rPr lang="en-US">
+                    <a:noFill/>
+                  </a:rPr>
+                  <a:t> </a:t>
+                </a:r>
+              </a:p>
+            </p:txBody>
+          </p:sp>
+        </mc:Fallback>
+      </mc:AlternateContent>
+      <p:pic>
+        <p:nvPicPr>
+          <p:cNvPr id="5" name="Picture 4">
+            <a:extLst>
+              <a:ext uri="{FF2B5EF4-FFF2-40B4-BE49-F238E27FC236}">
+                <a16:creationId xmlns:a16="http://schemas.microsoft.com/office/drawing/2014/main" id="{A59794BC-5993-44E7-AF20-02A631DDD51B}"/>
+              </a:ext>
+            </a:extLst>
+          </p:cNvPr>
+          <p:cNvPicPr>
+            <a:picLocks noChangeAspect="1"/>
+          </p:cNvPicPr>
+          <p:nvPr/>
+        </p:nvPicPr>
+        <p:blipFill>
+          <a:blip r:embed="rId3"/>
+          <a:stretch>
+            <a:fillRect/>
+          </a:stretch>
+        </p:blipFill>
+        <p:spPr>
+          <a:xfrm>
+            <a:off x="5476347" y="1400175"/>
+            <a:ext cx="3226758" cy="2505075"/>
+          </a:xfrm>
+          <a:prstGeom prst="rect">
+            <a:avLst/>
+          </a:prstGeom>
+        </p:spPr>
+      </p:pic>
+    </p:spTree>
+    <p:extLst>
+      <p:ext uri="{BB962C8B-B14F-4D97-AF65-F5344CB8AC3E}">
+        <p14:creationId xmlns:p14="http://schemas.microsoft.com/office/powerpoint/2010/main" val="1062993077"/>
+      </p:ext>
+    </p:extLst>
+  </p:cSld>
+  <p:clrMapOvr>
+    <a:masterClrMapping/>
+  </p:clrMapOvr>
+</p:sld>
+</file>
+
+<file path=ppt/slides/slide18.xml><?xml version="1.0" encoding="utf-8"?>
+<p:sld xmlns:a="http://schemas.openxmlformats.org/drawingml/2006/main" xmlns:r="http://schemas.openxmlformats.org/officeDocument/2006/relationships" xmlns:p="http://schemas.openxmlformats.org/presentationml/2006/main">
+  <p:cSld>
+    <p:spTree>
+      <p:nvGrpSpPr>
+        <p:cNvPr id="1" name=""/>
+        <p:cNvGrpSpPr/>
+        <p:nvPr/>
+      </p:nvGrpSpPr>
+      <p:grpSpPr>
+        <a:xfrm>
+          <a:off x="0" y="0"/>
+          <a:ext cx="0" cy="0"/>
+          <a:chOff x="0" y="0"/>
+          <a:chExt cx="0" cy="0"/>
+        </a:xfrm>
+      </p:grpSpPr>
+      <p:sp>
+        <p:nvSpPr>
+          <p:cNvPr id="2" name="Title 1">
+            <a:extLst>
+              <a:ext uri="{FF2B5EF4-FFF2-40B4-BE49-F238E27FC236}">
+                <a16:creationId xmlns:a16="http://schemas.microsoft.com/office/drawing/2014/main" id="{BBAE44D5-D70D-688C-0592-9043882FBB27}"/>
+              </a:ext>
+            </a:extLst>
+          </p:cNvPr>
+          <p:cNvSpPr>
+            <a:spLocks noGrp="1"/>
+          </p:cNvSpPr>
+          <p:nvPr>
+            <p:ph type="title"/>
+          </p:nvPr>
+        </p:nvSpPr>
+        <p:spPr/>
+        <p:txBody>
+          <a:bodyPr/>
+          <a:lstStyle/>
+          <a:p>
+            <a:r>
+              <a:rPr lang="en-US" dirty="0"/>
+              <a:t>Smoothstep with squared</a:t>
+            </a:r>
+          </a:p>
+        </p:txBody>
+      </p:sp>
+      <p:pic>
+        <p:nvPicPr>
+          <p:cNvPr id="7" name="Content Placeholder 6">
+            <a:extLst>
+              <a:ext uri="{FF2B5EF4-FFF2-40B4-BE49-F238E27FC236}">
+                <a16:creationId xmlns:a16="http://schemas.microsoft.com/office/drawing/2014/main" id="{E959D850-57F5-9062-EF76-F6FD78D3E0F9}"/>
+              </a:ext>
+            </a:extLst>
+          </p:cNvPr>
+          <p:cNvPicPr>
+            <a:picLocks noGrp="1" noChangeAspect="1"/>
+          </p:cNvPicPr>
+          <p:nvPr>
+            <p:ph idx="1"/>
+          </p:nvPr>
+        </p:nvPicPr>
+        <p:blipFill>
+          <a:blip r:embed="rId2"/>
+          <a:stretch>
+            <a:fillRect/>
+          </a:stretch>
+        </p:blipFill>
+        <p:spPr>
+          <a:xfrm>
+            <a:off x="4888139" y="2000250"/>
+            <a:ext cx="3941536" cy="2040421"/>
+          </a:xfrm>
+          <a:prstGeom prst="rect">
+            <a:avLst/>
+          </a:prstGeom>
+        </p:spPr>
+      </p:pic>
+      <p:pic>
+        <p:nvPicPr>
+          <p:cNvPr id="9" name="Picture 8">
+            <a:extLst>
+              <a:ext uri="{FF2B5EF4-FFF2-40B4-BE49-F238E27FC236}">
+                <a16:creationId xmlns:a16="http://schemas.microsoft.com/office/drawing/2014/main" id="{B8753766-70B3-EE77-03F8-8EAF77D7029F}"/>
+              </a:ext>
+            </a:extLst>
+          </p:cNvPr>
+          <p:cNvPicPr>
+            <a:picLocks noChangeAspect="1"/>
+          </p:cNvPicPr>
+          <p:nvPr/>
+        </p:nvPicPr>
+        <p:blipFill>
+          <a:blip r:embed="rId3"/>
+          <a:stretch>
+            <a:fillRect/>
+          </a:stretch>
+        </p:blipFill>
+        <p:spPr>
+          <a:xfrm>
+            <a:off x="4912952" y="4257674"/>
+            <a:ext cx="3974485" cy="2181225"/>
+          </a:xfrm>
+          <a:prstGeom prst="rect">
+            <a:avLst/>
+          </a:prstGeom>
+        </p:spPr>
+      </p:pic>
+      <mc:AlternateContent xmlns:mc="http://schemas.openxmlformats.org/markup-compatibility/2006">
+        <mc:Choice xmlns:a14="http://schemas.microsoft.com/office/drawing/2010/main" Requires="a14">
+          <p:sp>
+            <p:nvSpPr>
+              <p:cNvPr id="11" name="TextBox 10">
+                <a:extLst>
+                  <a:ext uri="{FF2B5EF4-FFF2-40B4-BE49-F238E27FC236}">
+                    <a16:creationId xmlns:a16="http://schemas.microsoft.com/office/drawing/2014/main" id="{F75697E6-F049-601D-7B8A-7736EFDC73DD}"/>
+                  </a:ext>
+                </a:extLst>
+              </p:cNvPr>
+              <p:cNvSpPr txBox="1"/>
+              <p:nvPr/>
+            </p:nvSpPr>
+            <p:spPr>
+              <a:xfrm>
+                <a:off x="1143000" y="2565965"/>
+                <a:ext cx="4572000" cy="1337867"/>
+              </a:xfrm>
+              <a:prstGeom prst="rect">
+                <a:avLst/>
+              </a:prstGeom>
+              <a:noFill/>
+            </p:spPr>
+            <p:txBody>
+              <a:bodyPr wrap="square">
+                <a:spAutoFit/>
+              </a:bodyPr>
+              <a:lstStyle/>
+              <a:p>
+                <a:r>
+                  <a:rPr lang="en-US" dirty="0"/>
+                  <a:t>smoothstep(0, 1, 1 - </a:t>
+                </a:r>
+                <a14:m>
+                  <m:oMath xmlns:m="http://schemas.openxmlformats.org/officeDocument/2006/math">
+                    <m:d>
+                      <m:dPr>
+                        <m:ctrlPr>
+                          <a:rPr lang="en-US" i="1" smtClean="0">
+                            <a:latin typeface="Cambria Math" panose="02040503050406030204" pitchFamily="18" charset="0"/>
+                          </a:rPr>
+                        </m:ctrlPr>
+                      </m:dPr>
+                      <m:e>
+                        <m:f>
+                          <m:fPr>
+                            <m:ctrlPr>
+                              <a:rPr lang="en-US" i="1">
+                                <a:latin typeface="Cambria Math" panose="02040503050406030204" pitchFamily="18" charset="0"/>
+                              </a:rPr>
+                            </m:ctrlPr>
+                          </m:fPr>
+                          <m:num>
+                            <m:r>
+                              <a:rPr lang="en-US" i="1">
+                                <a:latin typeface="Cambria Math" panose="02040503050406030204" pitchFamily="18" charset="0"/>
+                              </a:rPr>
+                              <m:t>𝑛</m:t>
+                            </m:r>
+                            <m:r>
+                              <a:rPr lang="en-US" i="1">
+                                <a:latin typeface="Cambria Math" panose="02040503050406030204" pitchFamily="18" charset="0"/>
+                              </a:rPr>
+                              <m:t> ∗</m:t>
+                            </m:r>
+                            <m:r>
+                              <a:rPr lang="en-US" i="1">
+                                <a:latin typeface="Cambria Math" panose="02040503050406030204" pitchFamily="18" charset="0"/>
+                              </a:rPr>
+                              <m:t>𝑛</m:t>
+                            </m:r>
+                          </m:num>
+                          <m:den>
+                            <m:r>
+                              <a:rPr lang="en-US" i="1">
+                                <a:latin typeface="Cambria Math" panose="02040503050406030204" pitchFamily="18" charset="0"/>
+                              </a:rPr>
+                              <m:t>𝑑</m:t>
+                            </m:r>
+                            <m:r>
+                              <a:rPr lang="en-US" i="1">
+                                <a:latin typeface="Cambria Math" panose="02040503050406030204" pitchFamily="18" charset="0"/>
+                              </a:rPr>
+                              <m:t> ∗</m:t>
+                            </m:r>
+                            <m:r>
+                              <a:rPr lang="en-US" i="1">
+                                <a:latin typeface="Cambria Math" panose="02040503050406030204" pitchFamily="18" charset="0"/>
+                              </a:rPr>
+                              <m:t>𝑑</m:t>
+                            </m:r>
+                          </m:den>
+                        </m:f>
+                      </m:e>
+                    </m:d>
+                  </m:oMath>
+                </a14:m>
+                <a:r>
+                  <a:rPr lang="en-US" dirty="0"/>
+                  <a:t> )</a:t>
+                </a:r>
+              </a:p>
+              <a:p>
+                <a:endParaRPr lang="en-US" dirty="0"/>
+              </a:p>
+              <a:p>
+                <a:r>
+                  <a:rPr lang="en-US" dirty="0"/>
+                  <a:t>     Bright for longer before</a:t>
+                </a:r>
+              </a:p>
+              <a:p>
+                <a:r>
+                  <a:rPr lang="en-US" dirty="0"/>
+                  <a:t>     dropping to dark</a:t>
+                </a:r>
+              </a:p>
+            </p:txBody>
+          </p:sp>
+        </mc:Choice>
+        <mc:Fallback>
+          <p:sp>
+            <p:nvSpPr>
+              <p:cNvPr id="11" name="TextBox 10">
+                <a:extLst>
+                  <a:ext uri="{FF2B5EF4-FFF2-40B4-BE49-F238E27FC236}">
+                    <a16:creationId xmlns:a16="http://schemas.microsoft.com/office/drawing/2014/main" id="{F75697E6-F049-601D-7B8A-7736EFDC73DD}"/>
+                  </a:ext>
+                </a:extLst>
+              </p:cNvPr>
+              <p:cNvSpPr txBox="1">
+                <a:spLocks noRot="1" noChangeAspect="1" noMove="1" noResize="1" noEditPoints="1" noAdjustHandles="1" noChangeArrowheads="1" noChangeShapeType="1" noTextEdit="1"/>
+              </p:cNvSpPr>
+              <p:nvPr/>
+            </p:nvSpPr>
+            <p:spPr>
+              <a:xfrm>
+                <a:off x="1143000" y="2565965"/>
+                <a:ext cx="4572000" cy="1337867"/>
+              </a:xfrm>
+              <a:prstGeom prst="rect">
+                <a:avLst/>
+              </a:prstGeom>
+              <a:blipFill>
+                <a:blip r:embed="rId4"/>
+                <a:stretch>
+                  <a:fillRect l="-1200" b="-6393"/>
+                </a:stretch>
+              </a:blipFill>
+            </p:spPr>
+            <p:txBody>
+              <a:bodyPr/>
+              <a:lstStyle/>
+              <a:p>
+                <a:r>
+                  <a:rPr lang="en-US">
+                    <a:noFill/>
+                  </a:rPr>
+                  <a:t> </a:t>
+                </a:r>
+              </a:p>
+            </p:txBody>
+          </p:sp>
+        </mc:Fallback>
+      </mc:AlternateContent>
+      <mc:AlternateContent xmlns:mc="http://schemas.openxmlformats.org/markup-compatibility/2006">
+        <mc:Choice xmlns:a14="http://schemas.microsoft.com/office/drawing/2010/main" Requires="a14">
+          <p:sp>
+            <p:nvSpPr>
+              <p:cNvPr id="12" name="TextBox 11">
+                <a:extLst>
+                  <a:ext uri="{FF2B5EF4-FFF2-40B4-BE49-F238E27FC236}">
+                    <a16:creationId xmlns:a16="http://schemas.microsoft.com/office/drawing/2014/main" id="{32498AE0-1EC6-ED71-A21A-5E5826E74161}"/>
+                  </a:ext>
+                </a:extLst>
+              </p:cNvPr>
+              <p:cNvSpPr txBox="1"/>
+              <p:nvPr/>
+            </p:nvSpPr>
+            <p:spPr>
+              <a:xfrm>
+                <a:off x="1238250" y="4871015"/>
+                <a:ext cx="4572000" cy="1337867"/>
+              </a:xfrm>
+              <a:prstGeom prst="rect">
+                <a:avLst/>
+              </a:prstGeom>
+              <a:noFill/>
+            </p:spPr>
+            <p:txBody>
+              <a:bodyPr wrap="square">
+                <a:spAutoFit/>
+              </a:bodyPr>
+              <a:lstStyle/>
+              <a:p>
+                <a:r>
+                  <a:rPr lang="en-US" dirty="0"/>
+                  <a:t>smoothstep(0, 1, 1 - </a:t>
+                </a:r>
+                <a14:m>
+                  <m:oMath xmlns:m="http://schemas.openxmlformats.org/officeDocument/2006/math">
+                    <m:d>
+                      <m:dPr>
+                        <m:ctrlPr>
+                          <a:rPr lang="en-US" i="1" smtClean="0">
+                            <a:latin typeface="Cambria Math" panose="02040503050406030204" pitchFamily="18" charset="0"/>
+                          </a:rPr>
+                        </m:ctrlPr>
+                      </m:dPr>
+                      <m:e>
+                        <m:f>
+                          <m:fPr>
+                            <m:ctrlPr>
+                              <a:rPr lang="en-US" i="1">
+                                <a:latin typeface="Cambria Math" panose="02040503050406030204" pitchFamily="18" charset="0"/>
+                              </a:rPr>
+                            </m:ctrlPr>
+                          </m:fPr>
+                          <m:num>
+                            <m:r>
+                              <a:rPr lang="en-US" i="1">
+                                <a:latin typeface="Cambria Math" panose="02040503050406030204" pitchFamily="18" charset="0"/>
+                              </a:rPr>
+                              <m:t>𝑛</m:t>
+                            </m:r>
+                          </m:num>
+                          <m:den>
+                            <m:r>
+                              <a:rPr lang="en-US" i="1">
+                                <a:latin typeface="Cambria Math" panose="02040503050406030204" pitchFamily="18" charset="0"/>
+                              </a:rPr>
+                              <m:t>𝑑</m:t>
+                            </m:r>
+                            <m:r>
+                              <a:rPr lang="en-US" i="1">
+                                <a:latin typeface="Cambria Math" panose="02040503050406030204" pitchFamily="18" charset="0"/>
+                              </a:rPr>
+                              <m:t> </m:t>
+                            </m:r>
+                          </m:den>
+                        </m:f>
+                      </m:e>
+                    </m:d>
+                  </m:oMath>
+                </a14:m>
+                <a:r>
+                  <a:rPr lang="en-US" dirty="0"/>
+                  <a:t> )</a:t>
+                </a:r>
+              </a:p>
+              <a:p>
+                <a:endParaRPr lang="en-US" dirty="0"/>
+              </a:p>
+              <a:p>
+                <a:r>
+                  <a:rPr lang="en-US" dirty="0"/>
+                  <a:t>     Bring to dark in typical </a:t>
+                </a:r>
+              </a:p>
+              <a:p>
+                <a:r>
+                  <a:rPr lang="en-US" dirty="0"/>
+                  <a:t>        cubic progression </a:t>
+                </a:r>
+              </a:p>
+            </p:txBody>
+          </p:sp>
+        </mc:Choice>
+        <mc:Fallback>
+          <p:sp>
+            <p:nvSpPr>
+              <p:cNvPr id="12" name="TextBox 11">
+                <a:extLst>
+                  <a:ext uri="{FF2B5EF4-FFF2-40B4-BE49-F238E27FC236}">
+                    <a16:creationId xmlns:a16="http://schemas.microsoft.com/office/drawing/2014/main" id="{32498AE0-1EC6-ED71-A21A-5E5826E74161}"/>
+                  </a:ext>
+                </a:extLst>
+              </p:cNvPr>
+              <p:cNvSpPr txBox="1">
+                <a:spLocks noRot="1" noChangeAspect="1" noMove="1" noResize="1" noEditPoints="1" noAdjustHandles="1" noChangeArrowheads="1" noChangeShapeType="1" noTextEdit="1"/>
+              </p:cNvSpPr>
+              <p:nvPr/>
+            </p:nvSpPr>
+            <p:spPr>
+              <a:xfrm>
+                <a:off x="1238250" y="4871015"/>
+                <a:ext cx="4572000" cy="1337867"/>
+              </a:xfrm>
+              <a:prstGeom prst="rect">
+                <a:avLst/>
+              </a:prstGeom>
+              <a:blipFill>
+                <a:blip r:embed="rId5"/>
+                <a:stretch>
+                  <a:fillRect l="-1067" b="-5909"/>
+                </a:stretch>
+              </a:blipFill>
+            </p:spPr>
+            <p:txBody>
+              <a:bodyPr/>
+              <a:lstStyle/>
+              <a:p>
+                <a:r>
+                  <a:rPr lang="en-US">
+                    <a:noFill/>
+                  </a:rPr>
+                  <a:t> </a:t>
+                </a:r>
+              </a:p>
+            </p:txBody>
+          </p:sp>
+        </mc:Fallback>
+      </mc:AlternateContent>
+    </p:spTree>
+    <p:extLst>
+      <p:ext uri="{BB962C8B-B14F-4D97-AF65-F5344CB8AC3E}">
+        <p14:creationId xmlns:p14="http://schemas.microsoft.com/office/powerpoint/2010/main" val="3652157815"/>
+      </p:ext>
+    </p:extLst>
+  </p:cSld>
+  <p:clrMapOvr>
+    <a:masterClrMapping/>
+  </p:clrMapOvr>
+</p:sld>
+</file>
+
+<file path=ppt/slides/slide19.xml><?xml version="1.0" encoding="utf-8"?>
+<p:sld xmlns:a="http://schemas.openxmlformats.org/drawingml/2006/main" xmlns:r="http://schemas.openxmlformats.org/officeDocument/2006/relationships" xmlns:p="http://schemas.openxmlformats.org/presentationml/2006/main">
+  <p:cSld>
+    <p:spTree>
+      <p:nvGrpSpPr>
+        <p:cNvPr id="1" name=""/>
+        <p:cNvGrpSpPr/>
+        <p:nvPr/>
+      </p:nvGrpSpPr>
+      <p:grpSpPr>
+        <a:xfrm>
+          <a:off x="0" y="0"/>
+          <a:ext cx="0" cy="0"/>
+          <a:chOff x="0" y="0"/>
+          <a:chExt cx="0" cy="0"/>
+        </a:xfrm>
+      </p:grpSpPr>
       <mc:AlternateContent xmlns:mc="http://schemas.openxmlformats.org/markup-compatibility/2006" xmlns:a14="http://schemas.microsoft.com/office/drawing/2010/main">
         <mc:Choice Requires="a14">
           <p:sp>
@@ -12902,7 +14355,7 @@
               <a:lstStyle/>
               <a:p>
                 <a:r>
-                  <a:rPr lang="en-US" dirty="0" smtClean="0"/>
+                  <a:rPr lang="en-US" dirty="0"/>
                   <a:t>How about </a:t>
                 </a:r>
                 <a14:m>
@@ -12935,10 +14388,9 @@
                   </m:oMath>
                 </a14:m>
                 <a:r>
-                  <a:rPr lang="en-US" dirty="0" smtClean="0"/>
+                  <a:rPr lang="en-US" dirty="0"/>
                   <a:t>?</a:t>
                 </a:r>
-                <a:endParaRPr lang="en-US" dirty="0"/>
               </a:p>
             </p:txBody>
           </p:sp>
@@ -12993,14 +14445,14 @@
           <a:lstStyle/>
           <a:p>
             <a:r>
-              <a:rPr lang="en-US" dirty="0" smtClean="0"/>
+              <a:rPr lang="en-US" dirty="0"/>
               <a:t>Let user specify each of the</a:t>
             </a:r>
             <a:br>
-              <a:rPr lang="en-US" dirty="0" smtClean="0"/>
+              <a:rPr lang="en-US" dirty="0"/>
             </a:br>
             <a:r>
-              <a:rPr lang="en-US" dirty="0" smtClean="0"/>
+              <a:rPr lang="en-US" dirty="0"/>
               <a:t>components!</a:t>
             </a:r>
           </a:p>
@@ -13193,10 +14645,9 @@
           <a:lstStyle/>
           <a:p>
             <a:r>
-              <a:rPr lang="en-US" dirty="0" smtClean="0"/>
+              <a:rPr lang="en-US" dirty="0"/>
               <a:t>OpenGL:</a:t>
             </a:r>
-            <a:endParaRPr lang="en-US" dirty="0"/>
           </a:p>
         </p:txBody>
       </p:sp>
@@ -13222,18 +14673,17 @@
           <a:lstStyle/>
           <a:p>
             <a:r>
-              <a:rPr lang="en-US" dirty="0" smtClean="0"/>
+              <a:rPr lang="en-US" dirty="0"/>
               <a:t>Our </a:t>
             </a:r>
             <a:r>
-              <a:rPr lang="en-US" dirty="0" err="1" smtClean="0"/>
+              <a:rPr lang="en-US" dirty="0" err="1"/>
               <a:t>ToyRayTracer</a:t>
             </a:r>
             <a:r>
-              <a:rPr lang="en-US" dirty="0" smtClean="0"/>
+              <a:rPr lang="en-US" dirty="0"/>
               <a:t>:</a:t>
             </a:r>
-            <a:endParaRPr lang="en-US" dirty="0"/>
           </a:p>
         </p:txBody>
       </p:sp>
@@ -13247,17 +14697,886 @@
   <p:clrMapOvr>
     <a:masterClrMapping/>
   </p:clrMapOvr>
-  <p:timing>
-    <p:tnLst>
-      <p:par>
-        <p:cTn id="1" dur="indefinite" restart="never" nodeType="tmRoot"/>
-      </p:par>
-    </p:tnLst>
-  </p:timing>
 </p:sld>
 </file>
 
-<file path=ppt/slides/slide17.xml><?xml version="1.0" encoding="utf-8"?>
+<file path=ppt/slides/slide2.xml><?xml version="1.0" encoding="utf-8"?>
+<p:sld xmlns:a="http://schemas.openxmlformats.org/drawingml/2006/main" xmlns:r="http://schemas.openxmlformats.org/officeDocument/2006/relationships" xmlns:p="http://schemas.openxmlformats.org/presentationml/2006/main">
+  <p:cSld>
+    <p:spTree>
+      <p:nvGrpSpPr>
+        <p:cNvPr id="1" name=""/>
+        <p:cNvGrpSpPr/>
+        <p:nvPr/>
+      </p:nvGrpSpPr>
+      <p:grpSpPr>
+        <a:xfrm>
+          <a:off x="0" y="0"/>
+          <a:ext cx="0" cy="0"/>
+          <a:chOff x="0" y="0"/>
+          <a:chExt cx="0" cy="0"/>
+        </a:xfrm>
+      </p:grpSpPr>
+      <mc:AlternateContent xmlns:mc="http://schemas.openxmlformats.org/markup-compatibility/2006" xmlns:a14="http://schemas.microsoft.com/office/drawing/2010/main">
+        <mc:Choice Requires="a14">
+          <p:sp>
+            <p:nvSpPr>
+              <p:cNvPr id="2" name="Title 1"/>
+              <p:cNvSpPr>
+                <a:spLocks noGrp="1"/>
+              </p:cNvSpPr>
+              <p:nvPr>
+                <p:ph type="title"/>
+              </p:nvPr>
+            </p:nvSpPr>
+            <p:spPr/>
+            <p:txBody>
+              <a:bodyPr/>
+              <a:lstStyle/>
+              <a:p>
+                <a:r>
+                  <a:rPr lang="en-US" dirty="0"/>
+                  <a:t>Light source direction: </a:t>
+                </a:r>
+                <a14:m>
+                  <m:oMath xmlns:m="http://schemas.openxmlformats.org/officeDocument/2006/math">
+                    <m:acc>
+                      <m:accPr>
+                        <m:chr m:val="̂"/>
+                        <m:ctrlPr>
+                          <a:rPr lang="en-US" i="1">
+                            <a:latin typeface="Cambria Math" panose="02040503050406030204" pitchFamily="18" charset="0"/>
+                            <a:ea typeface="Cambria Math"/>
+                          </a:rPr>
+                        </m:ctrlPr>
+                      </m:accPr>
+                      <m:e>
+                        <m:r>
+                          <a:rPr lang="en-US" i="1">
+                            <a:latin typeface="Cambria Math"/>
+                            <a:ea typeface="Cambria Math"/>
+                          </a:rPr>
+                          <m:t>𝐿</m:t>
+                        </m:r>
+                      </m:e>
+                    </m:acc>
+                  </m:oMath>
+                </a14:m>
+                <a:endParaRPr lang="en-US" dirty="0"/>
+              </a:p>
+            </p:txBody>
+          </p:sp>
+        </mc:Choice>
+        <mc:Fallback xmlns="">
+          <p:sp>
+            <p:nvSpPr>
+              <p:cNvPr id="2" name="Title 1"/>
+              <p:cNvSpPr>
+                <a:spLocks noGrp="1" noRot="1" noChangeAspect="1" noMove="1" noResize="1" noEditPoints="1" noAdjustHandles="1" noChangeArrowheads="1" noChangeShapeType="1" noTextEdit="1"/>
+              </p:cNvSpPr>
+              <p:nvPr>
+                <p:ph type="title"/>
+              </p:nvPr>
+            </p:nvSpPr>
+            <p:spPr>
+              <a:blipFill rotWithShape="1">
+                <a:blip r:embed="rId2"/>
+                <a:stretch>
+                  <a:fillRect b="-10106"/>
+                </a:stretch>
+              </a:blipFill>
+            </p:spPr>
+            <p:txBody>
+              <a:bodyPr/>
+              <a:lstStyle/>
+              <a:p>
+                <a:r>
+                  <a:rPr lang="en-US">
+                    <a:noFill/>
+                  </a:rPr>
+                  <a:t> </a:t>
+                </a:r>
+              </a:p>
+            </p:txBody>
+          </p:sp>
+        </mc:Fallback>
+      </mc:AlternateContent>
+      <p:sp>
+        <p:nvSpPr>
+          <p:cNvPr id="3" name="Content Placeholder 2"/>
+          <p:cNvSpPr>
+            <a:spLocks noGrp="1"/>
+          </p:cNvSpPr>
+          <p:nvPr>
+            <p:ph idx="1"/>
+          </p:nvPr>
+        </p:nvSpPr>
+        <p:spPr>
+          <a:xfrm>
+            <a:off x="221588" y="1475421"/>
+            <a:ext cx="8229600" cy="4673221"/>
+          </a:xfrm>
+        </p:spPr>
+        <p:txBody>
+          <a:bodyPr>
+            <a:normAutofit fontScale="92500" lnSpcReduction="10000"/>
+          </a:bodyPr>
+          <a:lstStyle/>
+          <a:p>
+            <a:r>
+              <a:rPr lang="en-US" dirty="0"/>
+              <a:t>Look around you … </a:t>
+            </a:r>
+          </a:p>
+          <a:p>
+            <a:r>
+              <a:rPr lang="en-US" dirty="0"/>
+              <a:t>The light in Seattle: Indirect</a:t>
+            </a:r>
+          </a:p>
+          <a:p>
+            <a:pPr lvl="1"/>
+            <a:r>
+              <a:rPr lang="en-US" dirty="0"/>
+              <a:t>background, … ambient</a:t>
+            </a:r>
+          </a:p>
+          <a:p>
+            <a:r>
+              <a:rPr lang="en-US" dirty="0"/>
+              <a:t>Sun light: Direct, very far away</a:t>
+            </a:r>
+          </a:p>
+          <a:p>
+            <a:pPr lvl="1"/>
+            <a:r>
+              <a:rPr lang="en-US" dirty="0"/>
+              <a:t>coming from a constant direction</a:t>
+            </a:r>
+            <a:br>
+              <a:rPr lang="en-US" dirty="0"/>
+            </a:br>
+            <a:r>
+              <a:rPr lang="en-US" dirty="0"/>
+              <a:t>(independent of where you are)</a:t>
+            </a:r>
+          </a:p>
+          <a:p>
+            <a:r>
+              <a:rPr lang="en-US" dirty="0"/>
+              <a:t>Light bulb at home: Direct</a:t>
+            </a:r>
+          </a:p>
+          <a:p>
+            <a:pPr lvl="1"/>
+            <a:r>
+              <a:rPr lang="en-US" dirty="0"/>
+              <a:t>closer, shines from a fixed point</a:t>
+            </a:r>
+          </a:p>
+          <a:p>
+            <a:r>
+              <a:rPr lang="en-US" dirty="0"/>
+              <a:t>Light from the projector/desk lamp</a:t>
+            </a:r>
+          </a:p>
+          <a:p>
+            <a:pPr lvl="1"/>
+            <a:r>
+              <a:rPr lang="en-US" dirty="0"/>
+              <a:t>How would you describe this?</a:t>
+            </a:r>
+          </a:p>
+          <a:p>
+            <a:endParaRPr lang="en-US" dirty="0"/>
+          </a:p>
+          <a:p>
+            <a:endParaRPr lang="en-US" dirty="0"/>
+          </a:p>
+        </p:txBody>
+      </p:sp>
+      <p:grpSp>
+        <p:nvGrpSpPr>
+          <p:cNvPr id="4" name="Group 3"/>
+          <p:cNvGrpSpPr/>
+          <p:nvPr/>
+        </p:nvGrpSpPr>
+        <p:grpSpPr>
+          <a:xfrm>
+            <a:off x="5165502" y="1166881"/>
+            <a:ext cx="2021687" cy="1750224"/>
+            <a:chOff x="6653576" y="1621277"/>
+            <a:chExt cx="2021687" cy="1750224"/>
+          </a:xfrm>
+        </p:grpSpPr>
+        <p:pic>
+          <p:nvPicPr>
+            <p:cNvPr id="2050" name="Picture 2" descr="C:\Users\ksung\Desktop\ScreenHunter_04 Sep. 01 17.13.jpg"/>
+            <p:cNvPicPr>
+              <a:picLocks noChangeAspect="1" noChangeArrowheads="1"/>
+            </p:cNvPicPr>
+            <p:nvPr/>
+          </p:nvPicPr>
+          <p:blipFill>
+            <a:blip r:embed="rId3">
+              <a:extLst>
+                <a:ext uri="{28A0092B-C50C-407E-A947-70E740481C1C}">
+                  <a14:useLocalDpi xmlns:a14="http://schemas.microsoft.com/office/drawing/2010/main" val="0"/>
+                </a:ext>
+              </a:extLst>
+            </a:blip>
+            <a:srcRect/>
+            <a:stretch>
+              <a:fillRect/>
+            </a:stretch>
+          </p:blipFill>
+          <p:spPr bwMode="auto">
+            <a:xfrm>
+              <a:off x="6653576" y="1621277"/>
+              <a:ext cx="2021687" cy="1750224"/>
+            </a:xfrm>
+            <a:prstGeom prst="rect">
+              <a:avLst/>
+            </a:prstGeom>
+            <a:noFill/>
+            <a:extLst>
+              <a:ext uri="{909E8E84-426E-40DD-AFC4-6F175D3DCCD1}">
+                <a14:hiddenFill xmlns:a14="http://schemas.microsoft.com/office/drawing/2010/main">
+                  <a:solidFill>
+                    <a:srgbClr val="FFFFFF"/>
+                  </a:solidFill>
+                </a14:hiddenFill>
+              </a:ext>
+            </a:extLst>
+          </p:spPr>
+        </p:pic>
+        <p:sp>
+          <p:nvSpPr>
+            <p:cNvPr id="5" name="Content Placeholder 2"/>
+            <p:cNvSpPr txBox="1">
+              <a:spLocks/>
+            </p:cNvSpPr>
+            <p:nvPr/>
+          </p:nvSpPr>
+          <p:spPr>
+            <a:xfrm>
+              <a:off x="7445240" y="1637794"/>
+              <a:ext cx="1213198" cy="466439"/>
+            </a:xfrm>
+            <a:prstGeom prst="rect">
+              <a:avLst/>
+            </a:prstGeom>
+            <a:solidFill>
+              <a:schemeClr val="bg1"/>
+            </a:solidFill>
+          </p:spPr>
+          <p:txBody>
+            <a:bodyPr vert="horz" lIns="91440" tIns="45720" rIns="91440" bIns="45720" rtlCol="0">
+              <a:normAutofit fontScale="25000" lnSpcReduction="20000"/>
+            </a:bodyPr>
+            <a:lstStyle>
+              <a:lvl1pPr marL="342900" indent="-342900" algn="l" defTabSz="914400" rtl="0" eaLnBrk="1" latinLnBrk="0" hangingPunct="1">
+                <a:spcBef>
+                  <a:spcPct val="20000"/>
+                </a:spcBef>
+                <a:buFont typeface="Arial" pitchFamily="34" charset="0"/>
+                <a:buChar char="•"/>
+                <a:defRPr sz="3200" kern="1200">
+                  <a:solidFill>
+                    <a:schemeClr val="tx1"/>
+                  </a:solidFill>
+                  <a:latin typeface="+mn-lt"/>
+                  <a:ea typeface="+mn-ea"/>
+                  <a:cs typeface="+mn-cs"/>
+                </a:defRPr>
+              </a:lvl1pPr>
+              <a:lvl2pPr marL="742950" indent="-285750" algn="l" defTabSz="914400" rtl="0" eaLnBrk="1" latinLnBrk="0" hangingPunct="1">
+                <a:spcBef>
+                  <a:spcPct val="20000"/>
+                </a:spcBef>
+                <a:buFont typeface="Arial" pitchFamily="34" charset="0"/>
+                <a:buChar char="–"/>
+                <a:defRPr sz="2800" kern="1200">
+                  <a:solidFill>
+                    <a:schemeClr val="tx1"/>
+                  </a:solidFill>
+                  <a:latin typeface="+mn-lt"/>
+                  <a:ea typeface="+mn-ea"/>
+                  <a:cs typeface="+mn-cs"/>
+                </a:defRPr>
+              </a:lvl2pPr>
+              <a:lvl3pPr marL="1143000" indent="-228600" algn="l" defTabSz="914400" rtl="0" eaLnBrk="1" latinLnBrk="0" hangingPunct="1">
+                <a:spcBef>
+                  <a:spcPct val="20000"/>
+                </a:spcBef>
+                <a:buFont typeface="Arial" pitchFamily="34" charset="0"/>
+                <a:buChar char="•"/>
+                <a:defRPr sz="2400" kern="1200">
+                  <a:solidFill>
+                    <a:schemeClr val="tx1"/>
+                  </a:solidFill>
+                  <a:latin typeface="+mn-lt"/>
+                  <a:ea typeface="+mn-ea"/>
+                  <a:cs typeface="+mn-cs"/>
+                </a:defRPr>
+              </a:lvl3pPr>
+              <a:lvl4pPr marL="1600200" indent="-228600" algn="l" defTabSz="914400" rtl="0" eaLnBrk="1" latinLnBrk="0" hangingPunct="1">
+                <a:spcBef>
+                  <a:spcPct val="20000"/>
+                </a:spcBef>
+                <a:buFont typeface="Arial" pitchFamily="34" charset="0"/>
+                <a:buChar char="–"/>
+                <a:defRPr sz="2000" kern="1200">
+                  <a:solidFill>
+                    <a:schemeClr val="tx1"/>
+                  </a:solidFill>
+                  <a:latin typeface="+mn-lt"/>
+                  <a:ea typeface="+mn-ea"/>
+                  <a:cs typeface="+mn-cs"/>
+                </a:defRPr>
+              </a:lvl4pPr>
+              <a:lvl5pPr marL="2057400" indent="-228600" algn="l" defTabSz="914400" rtl="0" eaLnBrk="1" latinLnBrk="0" hangingPunct="1">
+                <a:spcBef>
+                  <a:spcPct val="20000"/>
+                </a:spcBef>
+                <a:buFont typeface="Arial" pitchFamily="34" charset="0"/>
+                <a:buChar char="»"/>
+                <a:defRPr sz="2000" kern="1200">
+                  <a:solidFill>
+                    <a:schemeClr val="tx1"/>
+                  </a:solidFill>
+                  <a:latin typeface="+mn-lt"/>
+                  <a:ea typeface="+mn-ea"/>
+                  <a:cs typeface="+mn-cs"/>
+                </a:defRPr>
+              </a:lvl5pPr>
+              <a:lvl6pPr marL="2514600" indent="-228600" algn="l" defTabSz="914400" rtl="0" eaLnBrk="1" latinLnBrk="0" hangingPunct="1">
+                <a:spcBef>
+                  <a:spcPct val="20000"/>
+                </a:spcBef>
+                <a:buFont typeface="Arial" pitchFamily="34" charset="0"/>
+                <a:buChar char="•"/>
+                <a:defRPr sz="2000" kern="1200">
+                  <a:solidFill>
+                    <a:schemeClr val="tx1"/>
+                  </a:solidFill>
+                  <a:latin typeface="+mn-lt"/>
+                  <a:ea typeface="+mn-ea"/>
+                  <a:cs typeface="+mn-cs"/>
+                </a:defRPr>
+              </a:lvl6pPr>
+              <a:lvl7pPr marL="2971800" indent="-228600" algn="l" defTabSz="914400" rtl="0" eaLnBrk="1" latinLnBrk="0" hangingPunct="1">
+                <a:spcBef>
+                  <a:spcPct val="20000"/>
+                </a:spcBef>
+                <a:buFont typeface="Arial" pitchFamily="34" charset="0"/>
+                <a:buChar char="•"/>
+                <a:defRPr sz="2000" kern="1200">
+                  <a:solidFill>
+                    <a:schemeClr val="tx1"/>
+                  </a:solidFill>
+                  <a:latin typeface="+mn-lt"/>
+                  <a:ea typeface="+mn-ea"/>
+                  <a:cs typeface="+mn-cs"/>
+                </a:defRPr>
+              </a:lvl7pPr>
+              <a:lvl8pPr marL="3429000" indent="-228600" algn="l" defTabSz="914400" rtl="0" eaLnBrk="1" latinLnBrk="0" hangingPunct="1">
+                <a:spcBef>
+                  <a:spcPct val="20000"/>
+                </a:spcBef>
+                <a:buFont typeface="Arial" pitchFamily="34" charset="0"/>
+                <a:buChar char="•"/>
+                <a:defRPr sz="2000" kern="1200">
+                  <a:solidFill>
+                    <a:schemeClr val="tx1"/>
+                  </a:solidFill>
+                  <a:latin typeface="+mn-lt"/>
+                  <a:ea typeface="+mn-ea"/>
+                  <a:cs typeface="+mn-cs"/>
+                </a:defRPr>
+              </a:lvl8pPr>
+              <a:lvl9pPr marL="3886200" indent="-228600" algn="l" defTabSz="914400" rtl="0" eaLnBrk="1" latinLnBrk="0" hangingPunct="1">
+                <a:spcBef>
+                  <a:spcPct val="20000"/>
+                </a:spcBef>
+                <a:buFont typeface="Arial" pitchFamily="34" charset="0"/>
+                <a:buChar char="•"/>
+                <a:defRPr sz="2000" kern="1200">
+                  <a:solidFill>
+                    <a:schemeClr val="tx1"/>
+                  </a:solidFill>
+                  <a:latin typeface="+mn-lt"/>
+                  <a:ea typeface="+mn-ea"/>
+                  <a:cs typeface="+mn-cs"/>
+                </a:defRPr>
+              </a:lvl9pPr>
+            </a:lstStyle>
+            <a:p>
+              <a:pPr marL="0" indent="0">
+                <a:buNone/>
+              </a:pPr>
+              <a:r>
+                <a:rPr lang="en-US" dirty="0"/>
+                <a:t>credit: </a:t>
+              </a:r>
+              <a:br>
+                <a:rPr lang="en-US" dirty="0"/>
+              </a:br>
+              <a:r>
+                <a:rPr lang="en-US" dirty="0"/>
+                <a:t>http://mynasadata.larc.nasa.gov/Radiation_Explanation.html</a:t>
+              </a:r>
+            </a:p>
+          </p:txBody>
+        </p:sp>
+      </p:grpSp>
+      <p:pic>
+        <p:nvPicPr>
+          <p:cNvPr id="2051" name="Picture 3" descr="C:\Users\ksung\Desktop\ScreenHunter_05 Sep. 01 17.30.jpg"/>
+          <p:cNvPicPr>
+            <a:picLocks noChangeAspect="1" noChangeArrowheads="1"/>
+          </p:cNvPicPr>
+          <p:nvPr/>
+        </p:nvPicPr>
+        <p:blipFill>
+          <a:blip r:embed="rId4" cstate="print">
+            <a:extLst>
+              <a:ext uri="{28A0092B-C50C-407E-A947-70E740481C1C}">
+                <a14:useLocalDpi xmlns:a14="http://schemas.microsoft.com/office/drawing/2010/main" val="0"/>
+              </a:ext>
+            </a:extLst>
+          </a:blip>
+          <a:srcRect/>
+          <a:stretch>
+            <a:fillRect/>
+          </a:stretch>
+        </p:blipFill>
+        <p:spPr bwMode="auto">
+          <a:xfrm>
+            <a:off x="5733316" y="2917105"/>
+            <a:ext cx="3410622" cy="2085741"/>
+          </a:xfrm>
+          <a:prstGeom prst="rect">
+            <a:avLst/>
+          </a:prstGeom>
+          <a:noFill/>
+          <a:extLst>
+            <a:ext uri="{909E8E84-426E-40DD-AFC4-6F175D3DCCD1}">
+              <a14:hiddenFill xmlns:a14="http://schemas.microsoft.com/office/drawing/2010/main">
+                <a:solidFill>
+                  <a:srgbClr val="FFFFFF"/>
+                </a:solidFill>
+              </a14:hiddenFill>
+            </a:ext>
+          </a:extLst>
+        </p:spPr>
+      </p:pic>
+      <p:sp>
+        <p:nvSpPr>
+          <p:cNvPr id="8" name="Content Placeholder 2"/>
+          <p:cNvSpPr txBox="1">
+            <a:spLocks/>
+          </p:cNvSpPr>
+          <p:nvPr/>
+        </p:nvSpPr>
+        <p:spPr>
+          <a:xfrm>
+            <a:off x="7930802" y="2919039"/>
+            <a:ext cx="1213198" cy="466439"/>
+          </a:xfrm>
+          <a:prstGeom prst="rect">
+            <a:avLst/>
+          </a:prstGeom>
+          <a:noFill/>
+        </p:spPr>
+        <p:txBody>
+          <a:bodyPr vert="horz" lIns="91440" tIns="45720" rIns="91440" bIns="45720" rtlCol="0">
+            <a:normAutofit fontScale="25000" lnSpcReduction="20000"/>
+          </a:bodyPr>
+          <a:lstStyle>
+            <a:lvl1pPr marL="342900" indent="-342900" algn="l" defTabSz="914400" rtl="0" eaLnBrk="1" latinLnBrk="0" hangingPunct="1">
+              <a:spcBef>
+                <a:spcPct val="20000"/>
+              </a:spcBef>
+              <a:buFont typeface="Arial" pitchFamily="34" charset="0"/>
+              <a:buChar char="•"/>
+              <a:defRPr sz="3200" kern="1200">
+                <a:solidFill>
+                  <a:schemeClr val="tx1"/>
+                </a:solidFill>
+                <a:latin typeface="+mn-lt"/>
+                <a:ea typeface="+mn-ea"/>
+                <a:cs typeface="+mn-cs"/>
+              </a:defRPr>
+            </a:lvl1pPr>
+            <a:lvl2pPr marL="742950" indent="-285750" algn="l" defTabSz="914400" rtl="0" eaLnBrk="1" latinLnBrk="0" hangingPunct="1">
+              <a:spcBef>
+                <a:spcPct val="20000"/>
+              </a:spcBef>
+              <a:buFont typeface="Arial" pitchFamily="34" charset="0"/>
+              <a:buChar char="–"/>
+              <a:defRPr sz="2800" kern="1200">
+                <a:solidFill>
+                  <a:schemeClr val="tx1"/>
+                </a:solidFill>
+                <a:latin typeface="+mn-lt"/>
+                <a:ea typeface="+mn-ea"/>
+                <a:cs typeface="+mn-cs"/>
+              </a:defRPr>
+            </a:lvl2pPr>
+            <a:lvl3pPr marL="1143000" indent="-228600" algn="l" defTabSz="914400" rtl="0" eaLnBrk="1" latinLnBrk="0" hangingPunct="1">
+              <a:spcBef>
+                <a:spcPct val="20000"/>
+              </a:spcBef>
+              <a:buFont typeface="Arial" pitchFamily="34" charset="0"/>
+              <a:buChar char="•"/>
+              <a:defRPr sz="2400" kern="1200">
+                <a:solidFill>
+                  <a:schemeClr val="tx1"/>
+                </a:solidFill>
+                <a:latin typeface="+mn-lt"/>
+                <a:ea typeface="+mn-ea"/>
+                <a:cs typeface="+mn-cs"/>
+              </a:defRPr>
+            </a:lvl3pPr>
+            <a:lvl4pPr marL="1600200" indent="-228600" algn="l" defTabSz="914400" rtl="0" eaLnBrk="1" latinLnBrk="0" hangingPunct="1">
+              <a:spcBef>
+                <a:spcPct val="20000"/>
+              </a:spcBef>
+              <a:buFont typeface="Arial" pitchFamily="34" charset="0"/>
+              <a:buChar char="–"/>
+              <a:defRPr sz="2000" kern="1200">
+                <a:solidFill>
+                  <a:schemeClr val="tx1"/>
+                </a:solidFill>
+                <a:latin typeface="+mn-lt"/>
+                <a:ea typeface="+mn-ea"/>
+                <a:cs typeface="+mn-cs"/>
+              </a:defRPr>
+            </a:lvl4pPr>
+            <a:lvl5pPr marL="2057400" indent="-228600" algn="l" defTabSz="914400" rtl="0" eaLnBrk="1" latinLnBrk="0" hangingPunct="1">
+              <a:spcBef>
+                <a:spcPct val="20000"/>
+              </a:spcBef>
+              <a:buFont typeface="Arial" pitchFamily="34" charset="0"/>
+              <a:buChar char="»"/>
+              <a:defRPr sz="2000" kern="1200">
+                <a:solidFill>
+                  <a:schemeClr val="tx1"/>
+                </a:solidFill>
+                <a:latin typeface="+mn-lt"/>
+                <a:ea typeface="+mn-ea"/>
+                <a:cs typeface="+mn-cs"/>
+              </a:defRPr>
+            </a:lvl5pPr>
+            <a:lvl6pPr marL="2514600" indent="-228600" algn="l" defTabSz="914400" rtl="0" eaLnBrk="1" latinLnBrk="0" hangingPunct="1">
+              <a:spcBef>
+                <a:spcPct val="20000"/>
+              </a:spcBef>
+              <a:buFont typeface="Arial" pitchFamily="34" charset="0"/>
+              <a:buChar char="•"/>
+              <a:defRPr sz="2000" kern="1200">
+                <a:solidFill>
+                  <a:schemeClr val="tx1"/>
+                </a:solidFill>
+                <a:latin typeface="+mn-lt"/>
+                <a:ea typeface="+mn-ea"/>
+                <a:cs typeface="+mn-cs"/>
+              </a:defRPr>
+            </a:lvl6pPr>
+            <a:lvl7pPr marL="2971800" indent="-228600" algn="l" defTabSz="914400" rtl="0" eaLnBrk="1" latinLnBrk="0" hangingPunct="1">
+              <a:spcBef>
+                <a:spcPct val="20000"/>
+              </a:spcBef>
+              <a:buFont typeface="Arial" pitchFamily="34" charset="0"/>
+              <a:buChar char="•"/>
+              <a:defRPr sz="2000" kern="1200">
+                <a:solidFill>
+                  <a:schemeClr val="tx1"/>
+                </a:solidFill>
+                <a:latin typeface="+mn-lt"/>
+                <a:ea typeface="+mn-ea"/>
+                <a:cs typeface="+mn-cs"/>
+              </a:defRPr>
+            </a:lvl7pPr>
+            <a:lvl8pPr marL="3429000" indent="-228600" algn="l" defTabSz="914400" rtl="0" eaLnBrk="1" latinLnBrk="0" hangingPunct="1">
+              <a:spcBef>
+                <a:spcPct val="20000"/>
+              </a:spcBef>
+              <a:buFont typeface="Arial" pitchFamily="34" charset="0"/>
+              <a:buChar char="•"/>
+              <a:defRPr sz="2000" kern="1200">
+                <a:solidFill>
+                  <a:schemeClr val="tx1"/>
+                </a:solidFill>
+                <a:latin typeface="+mn-lt"/>
+                <a:ea typeface="+mn-ea"/>
+                <a:cs typeface="+mn-cs"/>
+              </a:defRPr>
+            </a:lvl8pPr>
+            <a:lvl9pPr marL="3886200" indent="-228600" algn="l" defTabSz="914400" rtl="0" eaLnBrk="1" latinLnBrk="0" hangingPunct="1">
+              <a:spcBef>
+                <a:spcPct val="20000"/>
+              </a:spcBef>
+              <a:buFont typeface="Arial" pitchFamily="34" charset="0"/>
+              <a:buChar char="•"/>
+              <a:defRPr sz="2000" kern="1200">
+                <a:solidFill>
+                  <a:schemeClr val="tx1"/>
+                </a:solidFill>
+                <a:latin typeface="+mn-lt"/>
+                <a:ea typeface="+mn-ea"/>
+                <a:cs typeface="+mn-cs"/>
+              </a:defRPr>
+            </a:lvl9pPr>
+          </a:lstStyle>
+          <a:p>
+            <a:pPr marL="0" indent="0">
+              <a:buNone/>
+            </a:pPr>
+            <a:r>
+              <a:rPr lang="en-US" dirty="0">
+                <a:solidFill>
+                  <a:schemeClr val="bg1"/>
+                </a:solidFill>
+              </a:rPr>
+              <a:t>credit: http://www.truebeyonddesign.com/products-page/ </a:t>
+            </a:r>
+            <a:br>
+              <a:rPr lang="en-US" dirty="0"/>
+            </a:br>
+            <a:endParaRPr lang="en-US" dirty="0"/>
+          </a:p>
+        </p:txBody>
+      </p:sp>
+      <p:pic>
+        <p:nvPicPr>
+          <p:cNvPr id="10" name="Picture 9" descr="C:\Users\ksung\Desktop\ScreenHunter_10 Sep. 01 18.05.jpg"/>
+          <p:cNvPicPr>
+            <a:picLocks noChangeAspect="1" noChangeArrowheads="1"/>
+          </p:cNvPicPr>
+          <p:nvPr/>
+        </p:nvPicPr>
+        <p:blipFill>
+          <a:blip r:embed="rId5">
+            <a:extLst>
+              <a:ext uri="{28A0092B-C50C-407E-A947-70E740481C1C}">
+                <a14:useLocalDpi xmlns:a14="http://schemas.microsoft.com/office/drawing/2010/main" val="0"/>
+              </a:ext>
+            </a:extLst>
+          </a:blip>
+          <a:srcRect/>
+          <a:stretch>
+            <a:fillRect/>
+          </a:stretch>
+        </p:blipFill>
+        <p:spPr bwMode="auto">
+          <a:xfrm>
+            <a:off x="6503180" y="5071273"/>
+            <a:ext cx="2351000" cy="1752817"/>
+          </a:xfrm>
+          <a:prstGeom prst="rect">
+            <a:avLst/>
+          </a:prstGeom>
+          <a:noFill/>
+          <a:extLst>
+            <a:ext uri="{909E8E84-426E-40DD-AFC4-6F175D3DCCD1}">
+              <a14:hiddenFill xmlns:a14="http://schemas.microsoft.com/office/drawing/2010/main">
+                <a:solidFill>
+                  <a:srgbClr val="FFFFFF"/>
+                </a:solidFill>
+              </a14:hiddenFill>
+            </a:ext>
+          </a:extLst>
+        </p:spPr>
+      </p:pic>
+      <p:sp>
+        <p:nvSpPr>
+          <p:cNvPr id="11" name="Content Placeholder 2"/>
+          <p:cNvSpPr>
+            <a:spLocks noGrp="1"/>
+          </p:cNvSpPr>
+          <p:nvPr/>
+        </p:nvSpPr>
+        <p:spPr>
+          <a:xfrm>
+            <a:off x="6435862" y="5071274"/>
+            <a:ext cx="2645028" cy="286345"/>
+          </a:xfrm>
+          <a:prstGeom prst="rect">
+            <a:avLst/>
+          </a:prstGeom>
+        </p:spPr>
+        <p:txBody>
+          <a:bodyPr vert="horz" lIns="91440" tIns="45720" rIns="91440" bIns="45720" rtlCol="0">
+            <a:normAutofit fontScale="25000" lnSpcReduction="20000"/>
+          </a:bodyPr>
+          <a:lstStyle>
+            <a:lvl1pPr marL="342900" indent="-342900" algn="l" defTabSz="914400" rtl="0" eaLnBrk="1" latinLnBrk="0" hangingPunct="1">
+              <a:spcBef>
+                <a:spcPct val="20000"/>
+              </a:spcBef>
+              <a:buFont typeface="Arial" pitchFamily="34" charset="0"/>
+              <a:buChar char="•"/>
+              <a:defRPr sz="3200" kern="1200">
+                <a:solidFill>
+                  <a:schemeClr val="tx1"/>
+                </a:solidFill>
+                <a:latin typeface="+mn-lt"/>
+                <a:ea typeface="+mn-ea"/>
+                <a:cs typeface="+mn-cs"/>
+              </a:defRPr>
+            </a:lvl1pPr>
+            <a:lvl2pPr marL="742950" indent="-285750" algn="l" defTabSz="914400" rtl="0" eaLnBrk="1" latinLnBrk="0" hangingPunct="1">
+              <a:spcBef>
+                <a:spcPct val="20000"/>
+              </a:spcBef>
+              <a:buFont typeface="Arial" pitchFamily="34" charset="0"/>
+              <a:buChar char="–"/>
+              <a:defRPr sz="2800" kern="1200">
+                <a:solidFill>
+                  <a:schemeClr val="tx1"/>
+                </a:solidFill>
+                <a:latin typeface="+mn-lt"/>
+                <a:ea typeface="+mn-ea"/>
+                <a:cs typeface="+mn-cs"/>
+              </a:defRPr>
+            </a:lvl2pPr>
+            <a:lvl3pPr marL="1143000" indent="-228600" algn="l" defTabSz="914400" rtl="0" eaLnBrk="1" latinLnBrk="0" hangingPunct="1">
+              <a:spcBef>
+                <a:spcPct val="20000"/>
+              </a:spcBef>
+              <a:buFont typeface="Arial" pitchFamily="34" charset="0"/>
+              <a:buChar char="•"/>
+              <a:defRPr sz="2400" kern="1200">
+                <a:solidFill>
+                  <a:schemeClr val="tx1"/>
+                </a:solidFill>
+                <a:latin typeface="+mn-lt"/>
+                <a:ea typeface="+mn-ea"/>
+                <a:cs typeface="+mn-cs"/>
+              </a:defRPr>
+            </a:lvl3pPr>
+            <a:lvl4pPr marL="1600200" indent="-228600" algn="l" defTabSz="914400" rtl="0" eaLnBrk="1" latinLnBrk="0" hangingPunct="1">
+              <a:spcBef>
+                <a:spcPct val="20000"/>
+              </a:spcBef>
+              <a:buFont typeface="Arial" pitchFamily="34" charset="0"/>
+              <a:buChar char="–"/>
+              <a:defRPr sz="2000" kern="1200">
+                <a:solidFill>
+                  <a:schemeClr val="tx1"/>
+                </a:solidFill>
+                <a:latin typeface="+mn-lt"/>
+                <a:ea typeface="+mn-ea"/>
+                <a:cs typeface="+mn-cs"/>
+              </a:defRPr>
+            </a:lvl4pPr>
+            <a:lvl5pPr marL="2057400" indent="-228600" algn="l" defTabSz="914400" rtl="0" eaLnBrk="1" latinLnBrk="0" hangingPunct="1">
+              <a:spcBef>
+                <a:spcPct val="20000"/>
+              </a:spcBef>
+              <a:buFont typeface="Arial" pitchFamily="34" charset="0"/>
+              <a:buChar char="»"/>
+              <a:defRPr sz="2000" kern="1200">
+                <a:solidFill>
+                  <a:schemeClr val="tx1"/>
+                </a:solidFill>
+                <a:latin typeface="+mn-lt"/>
+                <a:ea typeface="+mn-ea"/>
+                <a:cs typeface="+mn-cs"/>
+              </a:defRPr>
+            </a:lvl5pPr>
+            <a:lvl6pPr marL="2514600" indent="-228600" algn="l" defTabSz="914400" rtl="0" eaLnBrk="1" latinLnBrk="0" hangingPunct="1">
+              <a:spcBef>
+                <a:spcPct val="20000"/>
+              </a:spcBef>
+              <a:buFont typeface="Arial" pitchFamily="34" charset="0"/>
+              <a:buChar char="•"/>
+              <a:defRPr sz="2000" kern="1200">
+                <a:solidFill>
+                  <a:schemeClr val="tx1"/>
+                </a:solidFill>
+                <a:latin typeface="+mn-lt"/>
+                <a:ea typeface="+mn-ea"/>
+                <a:cs typeface="+mn-cs"/>
+              </a:defRPr>
+            </a:lvl6pPr>
+            <a:lvl7pPr marL="2971800" indent="-228600" algn="l" defTabSz="914400" rtl="0" eaLnBrk="1" latinLnBrk="0" hangingPunct="1">
+              <a:spcBef>
+                <a:spcPct val="20000"/>
+              </a:spcBef>
+              <a:buFont typeface="Arial" pitchFamily="34" charset="0"/>
+              <a:buChar char="•"/>
+              <a:defRPr sz="2000" kern="1200">
+                <a:solidFill>
+                  <a:schemeClr val="tx1"/>
+                </a:solidFill>
+                <a:latin typeface="+mn-lt"/>
+                <a:ea typeface="+mn-ea"/>
+                <a:cs typeface="+mn-cs"/>
+              </a:defRPr>
+            </a:lvl7pPr>
+            <a:lvl8pPr marL="3429000" indent="-228600" algn="l" defTabSz="914400" rtl="0" eaLnBrk="1" latinLnBrk="0" hangingPunct="1">
+              <a:spcBef>
+                <a:spcPct val="20000"/>
+              </a:spcBef>
+              <a:buFont typeface="Arial" pitchFamily="34" charset="0"/>
+              <a:buChar char="•"/>
+              <a:defRPr sz="2000" kern="1200">
+                <a:solidFill>
+                  <a:schemeClr val="tx1"/>
+                </a:solidFill>
+                <a:latin typeface="+mn-lt"/>
+                <a:ea typeface="+mn-ea"/>
+                <a:cs typeface="+mn-cs"/>
+              </a:defRPr>
+            </a:lvl8pPr>
+            <a:lvl9pPr marL="3886200" indent="-228600" algn="l" defTabSz="914400" rtl="0" eaLnBrk="1" latinLnBrk="0" hangingPunct="1">
+              <a:spcBef>
+                <a:spcPct val="20000"/>
+              </a:spcBef>
+              <a:buFont typeface="Arial" pitchFamily="34" charset="0"/>
+              <a:buChar char="•"/>
+              <a:defRPr sz="2000" kern="1200">
+                <a:solidFill>
+                  <a:schemeClr val="tx1"/>
+                </a:solidFill>
+                <a:latin typeface="+mn-lt"/>
+                <a:ea typeface="+mn-ea"/>
+                <a:cs typeface="+mn-cs"/>
+              </a:defRPr>
+            </a:lvl9pPr>
+          </a:lstStyle>
+          <a:p>
+            <a:pPr marL="0" indent="0">
+              <a:buNone/>
+            </a:pPr>
+            <a:r>
+              <a:rPr lang="en-US" b="1" dirty="0">
+                <a:solidFill>
+                  <a:schemeClr val="bg1"/>
+                </a:solidFill>
+              </a:rPr>
+              <a:t>http://www.apartmenttherapy.com/ny/lighting/best-product-tolomeo-desk-lamp-001066</a:t>
+            </a:r>
+          </a:p>
+        </p:txBody>
+      </p:sp>
+    </p:spTree>
+    <p:extLst>
+      <p:ext uri="{BB962C8B-B14F-4D97-AF65-F5344CB8AC3E}">
+        <p14:creationId xmlns:p14="http://schemas.microsoft.com/office/powerpoint/2010/main" val="2365070640"/>
+      </p:ext>
+    </p:extLst>
+  </p:cSld>
+  <p:clrMapOvr>
+    <a:masterClrMapping/>
+  </p:clrMapOvr>
+</p:sld>
+</file>
+
+<file path=ppt/slides/slide20.xml><?xml version="1.0" encoding="utf-8"?>
 <p:sld xmlns:a="http://schemas.openxmlformats.org/drawingml/2006/main" xmlns:r="http://schemas.openxmlformats.org/officeDocument/2006/relationships" xmlns:p="http://schemas.openxmlformats.org/presentationml/2006/main">
   <p:cSld>
     <p:spTree>
@@ -13290,19 +15609,19 @@
           <a:lstStyle/>
           <a:p>
             <a:r>
-              <a:rPr lang="en-US" dirty="0" smtClean="0"/>
+              <a:rPr lang="en-US" dirty="0"/>
               <a:t>General form of </a:t>
             </a:r>
             <a:r>
-              <a:rPr lang="en-US" dirty="0" err="1" smtClean="0"/>
+              <a:rPr lang="en-US" dirty="0" err="1"/>
               <a:t>Phong</a:t>
             </a:r>
             <a:endParaRPr lang="en-US" dirty="0"/>
           </a:p>
         </p:txBody>
       </p:sp>
-      <mc:AlternateContent xmlns:mc="http://schemas.openxmlformats.org/markup-compatibility/2006">
-        <mc:Choice xmlns:a14="http://schemas.microsoft.com/office/drawing/2010/main" Requires="a14">
+      <mc:AlternateContent xmlns:mc="http://schemas.openxmlformats.org/markup-compatibility/2006" xmlns:a14="http://schemas.microsoft.com/office/drawing/2010/main">
+        <mc:Choice Requires="a14">
           <p:sp>
             <p:nvSpPr>
               <p:cNvPr id="3" name="Content Placeholder 2"/>
@@ -14297,7 +16616,7 @@
             </p:txBody>
           </p:sp>
         </mc:Choice>
-        <mc:Fallback>
+        <mc:Fallback xmlns="">
           <p:sp>
             <p:nvSpPr>
               <p:cNvPr id="3" name="Content Placeholder 2"/>
@@ -14357,10 +16676,9 @@
           <a:lstStyle/>
           <a:p>
             <a:r>
-              <a:rPr lang="en-US" dirty="0" smtClean="0"/>
+              <a:rPr lang="en-US" dirty="0"/>
               <a:t>Our Ray Tracer implements:</a:t>
             </a:r>
-            <a:endParaRPr lang="en-US" dirty="0"/>
           </a:p>
         </p:txBody>
       </p:sp>
@@ -14945,925 +17263,6 @@
   <p:clrMapOvr>
     <a:masterClrMapping/>
   </p:clrMapOvr>
-  <p:timing>
-    <p:tnLst>
-      <p:par>
-        <p:cTn id="1" dur="indefinite" restart="never" nodeType="tmRoot"/>
-      </p:par>
-    </p:tnLst>
-  </p:timing>
-</p:sld>
-</file>
-
-<file path=ppt/slides/slide2.xml><?xml version="1.0" encoding="utf-8"?>
-<p:sld xmlns:a="http://schemas.openxmlformats.org/drawingml/2006/main" xmlns:r="http://schemas.openxmlformats.org/officeDocument/2006/relationships" xmlns:p="http://schemas.openxmlformats.org/presentationml/2006/main">
-  <p:cSld>
-    <p:spTree>
-      <p:nvGrpSpPr>
-        <p:cNvPr id="1" name=""/>
-        <p:cNvGrpSpPr/>
-        <p:nvPr/>
-      </p:nvGrpSpPr>
-      <p:grpSpPr>
-        <a:xfrm>
-          <a:off x="0" y="0"/>
-          <a:ext cx="0" cy="0"/>
-          <a:chOff x="0" y="0"/>
-          <a:chExt cx="0" cy="0"/>
-        </a:xfrm>
-      </p:grpSpPr>
-      <mc:AlternateContent xmlns:mc="http://schemas.openxmlformats.org/markup-compatibility/2006" xmlns:a14="http://schemas.microsoft.com/office/drawing/2010/main">
-        <mc:Choice Requires="a14">
-          <p:sp>
-            <p:nvSpPr>
-              <p:cNvPr id="2" name="Title 1"/>
-              <p:cNvSpPr>
-                <a:spLocks noGrp="1"/>
-              </p:cNvSpPr>
-              <p:nvPr>
-                <p:ph type="title"/>
-              </p:nvPr>
-            </p:nvSpPr>
-            <p:spPr/>
-            <p:txBody>
-              <a:bodyPr/>
-              <a:lstStyle/>
-              <a:p>
-                <a:r>
-                  <a:rPr lang="en-US" dirty="0"/>
-                  <a:t>Light source </a:t>
-                </a:r>
-                <a:r>
-                  <a:rPr lang="en-US" dirty="0" smtClean="0"/>
-                  <a:t>direction: </a:t>
-                </a:r>
-                <a14:m>
-                  <m:oMath xmlns:m="http://schemas.openxmlformats.org/officeDocument/2006/math">
-                    <m:acc>
-                      <m:accPr>
-                        <m:chr m:val="̂"/>
-                        <m:ctrlPr>
-                          <a:rPr lang="en-US" i="1">
-                            <a:latin typeface="Cambria Math" panose="02040503050406030204" pitchFamily="18" charset="0"/>
-                            <a:ea typeface="Cambria Math"/>
-                          </a:rPr>
-                        </m:ctrlPr>
-                      </m:accPr>
-                      <m:e>
-                        <m:r>
-                          <a:rPr lang="en-US" i="1">
-                            <a:latin typeface="Cambria Math"/>
-                            <a:ea typeface="Cambria Math"/>
-                          </a:rPr>
-                          <m:t>𝐿</m:t>
-                        </m:r>
-                      </m:e>
-                    </m:acc>
-                  </m:oMath>
-                </a14:m>
-                <a:endParaRPr lang="en-US" dirty="0"/>
-              </a:p>
-            </p:txBody>
-          </p:sp>
-        </mc:Choice>
-        <mc:Fallback xmlns="">
-          <p:sp>
-            <p:nvSpPr>
-              <p:cNvPr id="2" name="Title 1"/>
-              <p:cNvSpPr>
-                <a:spLocks noGrp="1" noRot="1" noChangeAspect="1" noMove="1" noResize="1" noEditPoints="1" noAdjustHandles="1" noChangeArrowheads="1" noChangeShapeType="1" noTextEdit="1"/>
-              </p:cNvSpPr>
-              <p:nvPr>
-                <p:ph type="title"/>
-              </p:nvPr>
-            </p:nvSpPr>
-            <p:spPr>
-              <a:blipFill rotWithShape="1">
-                <a:blip r:embed="rId2"/>
-                <a:stretch>
-                  <a:fillRect b="-10106"/>
-                </a:stretch>
-              </a:blipFill>
-            </p:spPr>
-            <p:txBody>
-              <a:bodyPr/>
-              <a:lstStyle/>
-              <a:p>
-                <a:r>
-                  <a:rPr lang="en-US">
-                    <a:noFill/>
-                  </a:rPr>
-                  <a:t> </a:t>
-                </a:r>
-              </a:p>
-            </p:txBody>
-          </p:sp>
-        </mc:Fallback>
-      </mc:AlternateContent>
-      <p:sp>
-        <p:nvSpPr>
-          <p:cNvPr id="3" name="Content Placeholder 2"/>
-          <p:cNvSpPr>
-            <a:spLocks noGrp="1"/>
-          </p:cNvSpPr>
-          <p:nvPr>
-            <p:ph idx="1"/>
-          </p:nvPr>
-        </p:nvSpPr>
-        <p:spPr>
-          <a:xfrm>
-            <a:off x="221588" y="1475421"/>
-            <a:ext cx="8229600" cy="4673221"/>
-          </a:xfrm>
-        </p:spPr>
-        <p:txBody>
-          <a:bodyPr>
-            <a:normAutofit fontScale="92500" lnSpcReduction="10000"/>
-          </a:bodyPr>
-          <a:lstStyle/>
-          <a:p>
-            <a:r>
-              <a:rPr lang="en-US" dirty="0" smtClean="0"/>
-              <a:t>Look around you … </a:t>
-            </a:r>
-          </a:p>
-          <a:p>
-            <a:r>
-              <a:rPr lang="en-US" dirty="0" smtClean="0"/>
-              <a:t>The light in Seattle: Indirect</a:t>
-            </a:r>
-          </a:p>
-          <a:p>
-            <a:pPr lvl="1"/>
-            <a:r>
-              <a:rPr lang="en-US" dirty="0" smtClean="0"/>
-              <a:t>background, … ambient</a:t>
-            </a:r>
-          </a:p>
-          <a:p>
-            <a:r>
-              <a:rPr lang="en-US" dirty="0" smtClean="0"/>
-              <a:t>Sun light: Direct, very far away</a:t>
-            </a:r>
-          </a:p>
-          <a:p>
-            <a:pPr lvl="1"/>
-            <a:r>
-              <a:rPr lang="en-US" dirty="0" smtClean="0"/>
-              <a:t>coming from a constant direction</a:t>
-            </a:r>
-            <a:br>
-              <a:rPr lang="en-US" dirty="0" smtClean="0"/>
-            </a:br>
-            <a:r>
-              <a:rPr lang="en-US" dirty="0" smtClean="0"/>
-              <a:t>(independent of where you are)</a:t>
-            </a:r>
-          </a:p>
-          <a:p>
-            <a:r>
-              <a:rPr lang="en-US" dirty="0"/>
-              <a:t>L</a:t>
-            </a:r>
-            <a:r>
-              <a:rPr lang="en-US" dirty="0" smtClean="0"/>
-              <a:t>ight bulb at home: Direct</a:t>
-            </a:r>
-          </a:p>
-          <a:p>
-            <a:pPr lvl="1"/>
-            <a:r>
-              <a:rPr lang="en-US" dirty="0" smtClean="0"/>
-              <a:t>closer, shines from a fixed point</a:t>
-            </a:r>
-          </a:p>
-          <a:p>
-            <a:r>
-              <a:rPr lang="en-US" dirty="0" smtClean="0"/>
-              <a:t>Light from the projector/desk lamp</a:t>
-            </a:r>
-          </a:p>
-          <a:p>
-            <a:pPr lvl="1"/>
-            <a:r>
-              <a:rPr lang="en-US" dirty="0" smtClean="0"/>
-              <a:t>How would you describe this?</a:t>
-            </a:r>
-          </a:p>
-          <a:p>
-            <a:endParaRPr lang="en-US" dirty="0" smtClean="0"/>
-          </a:p>
-          <a:p>
-            <a:endParaRPr lang="en-US" dirty="0"/>
-          </a:p>
-        </p:txBody>
-      </p:sp>
-      <p:grpSp>
-        <p:nvGrpSpPr>
-          <p:cNvPr id="4" name="Group 3"/>
-          <p:cNvGrpSpPr/>
-          <p:nvPr/>
-        </p:nvGrpSpPr>
-        <p:grpSpPr>
-          <a:xfrm>
-            <a:off x="5165502" y="1166881"/>
-            <a:ext cx="2021687" cy="1750224"/>
-            <a:chOff x="6653576" y="1621277"/>
-            <a:chExt cx="2021687" cy="1750224"/>
-          </a:xfrm>
-        </p:grpSpPr>
-        <p:pic>
-          <p:nvPicPr>
-            <p:cNvPr id="2050" name="Picture 2" descr="C:\Users\ksung\Desktop\ScreenHunter_04 Sep. 01 17.13.jpg"/>
-            <p:cNvPicPr>
-              <a:picLocks noChangeAspect="1" noChangeArrowheads="1"/>
-            </p:cNvPicPr>
-            <p:nvPr/>
-          </p:nvPicPr>
-          <p:blipFill>
-            <a:blip r:embed="rId3">
-              <a:extLst>
-                <a:ext uri="{28A0092B-C50C-407E-A947-70E740481C1C}">
-                  <a14:useLocalDpi xmlns:a14="http://schemas.microsoft.com/office/drawing/2010/main" val="0"/>
-                </a:ext>
-              </a:extLst>
-            </a:blip>
-            <a:srcRect/>
-            <a:stretch>
-              <a:fillRect/>
-            </a:stretch>
-          </p:blipFill>
-          <p:spPr bwMode="auto">
-            <a:xfrm>
-              <a:off x="6653576" y="1621277"/>
-              <a:ext cx="2021687" cy="1750224"/>
-            </a:xfrm>
-            <a:prstGeom prst="rect">
-              <a:avLst/>
-            </a:prstGeom>
-            <a:noFill/>
-            <a:extLst>
-              <a:ext uri="{909E8E84-426E-40DD-AFC4-6F175D3DCCD1}">
-                <a14:hiddenFill xmlns:a14="http://schemas.microsoft.com/office/drawing/2010/main">
-                  <a:solidFill>
-                    <a:srgbClr val="FFFFFF"/>
-                  </a:solidFill>
-                </a14:hiddenFill>
-              </a:ext>
-            </a:extLst>
-          </p:spPr>
-        </p:pic>
-        <p:sp>
-          <p:nvSpPr>
-            <p:cNvPr id="5" name="Content Placeholder 2"/>
-            <p:cNvSpPr txBox="1">
-              <a:spLocks/>
-            </p:cNvSpPr>
-            <p:nvPr/>
-          </p:nvSpPr>
-          <p:spPr>
-            <a:xfrm>
-              <a:off x="7445240" y="1637794"/>
-              <a:ext cx="1213198" cy="466439"/>
-            </a:xfrm>
-            <a:prstGeom prst="rect">
-              <a:avLst/>
-            </a:prstGeom>
-            <a:solidFill>
-              <a:schemeClr val="bg1"/>
-            </a:solidFill>
-          </p:spPr>
-          <p:txBody>
-            <a:bodyPr vert="horz" lIns="91440" tIns="45720" rIns="91440" bIns="45720" rtlCol="0">
-              <a:normAutofit fontScale="25000" lnSpcReduction="20000"/>
-            </a:bodyPr>
-            <a:lstStyle>
-              <a:lvl1pPr marL="342900" indent="-342900" algn="l" defTabSz="914400" rtl="0" eaLnBrk="1" latinLnBrk="0" hangingPunct="1">
-                <a:spcBef>
-                  <a:spcPct val="20000"/>
-                </a:spcBef>
-                <a:buFont typeface="Arial" pitchFamily="34" charset="0"/>
-                <a:buChar char="•"/>
-                <a:defRPr sz="3200" kern="1200">
-                  <a:solidFill>
-                    <a:schemeClr val="tx1"/>
-                  </a:solidFill>
-                  <a:latin typeface="+mn-lt"/>
-                  <a:ea typeface="+mn-ea"/>
-                  <a:cs typeface="+mn-cs"/>
-                </a:defRPr>
-              </a:lvl1pPr>
-              <a:lvl2pPr marL="742950" indent="-285750" algn="l" defTabSz="914400" rtl="0" eaLnBrk="1" latinLnBrk="0" hangingPunct="1">
-                <a:spcBef>
-                  <a:spcPct val="20000"/>
-                </a:spcBef>
-                <a:buFont typeface="Arial" pitchFamily="34" charset="0"/>
-                <a:buChar char="–"/>
-                <a:defRPr sz="2800" kern="1200">
-                  <a:solidFill>
-                    <a:schemeClr val="tx1"/>
-                  </a:solidFill>
-                  <a:latin typeface="+mn-lt"/>
-                  <a:ea typeface="+mn-ea"/>
-                  <a:cs typeface="+mn-cs"/>
-                </a:defRPr>
-              </a:lvl2pPr>
-              <a:lvl3pPr marL="1143000" indent="-228600" algn="l" defTabSz="914400" rtl="0" eaLnBrk="1" latinLnBrk="0" hangingPunct="1">
-                <a:spcBef>
-                  <a:spcPct val="20000"/>
-                </a:spcBef>
-                <a:buFont typeface="Arial" pitchFamily="34" charset="0"/>
-                <a:buChar char="•"/>
-                <a:defRPr sz="2400" kern="1200">
-                  <a:solidFill>
-                    <a:schemeClr val="tx1"/>
-                  </a:solidFill>
-                  <a:latin typeface="+mn-lt"/>
-                  <a:ea typeface="+mn-ea"/>
-                  <a:cs typeface="+mn-cs"/>
-                </a:defRPr>
-              </a:lvl3pPr>
-              <a:lvl4pPr marL="1600200" indent="-228600" algn="l" defTabSz="914400" rtl="0" eaLnBrk="1" latinLnBrk="0" hangingPunct="1">
-                <a:spcBef>
-                  <a:spcPct val="20000"/>
-                </a:spcBef>
-                <a:buFont typeface="Arial" pitchFamily="34" charset="0"/>
-                <a:buChar char="–"/>
-                <a:defRPr sz="2000" kern="1200">
-                  <a:solidFill>
-                    <a:schemeClr val="tx1"/>
-                  </a:solidFill>
-                  <a:latin typeface="+mn-lt"/>
-                  <a:ea typeface="+mn-ea"/>
-                  <a:cs typeface="+mn-cs"/>
-                </a:defRPr>
-              </a:lvl4pPr>
-              <a:lvl5pPr marL="2057400" indent="-228600" algn="l" defTabSz="914400" rtl="0" eaLnBrk="1" latinLnBrk="0" hangingPunct="1">
-                <a:spcBef>
-                  <a:spcPct val="20000"/>
-                </a:spcBef>
-                <a:buFont typeface="Arial" pitchFamily="34" charset="0"/>
-                <a:buChar char="»"/>
-                <a:defRPr sz="2000" kern="1200">
-                  <a:solidFill>
-                    <a:schemeClr val="tx1"/>
-                  </a:solidFill>
-                  <a:latin typeface="+mn-lt"/>
-                  <a:ea typeface="+mn-ea"/>
-                  <a:cs typeface="+mn-cs"/>
-                </a:defRPr>
-              </a:lvl5pPr>
-              <a:lvl6pPr marL="2514600" indent="-228600" algn="l" defTabSz="914400" rtl="0" eaLnBrk="1" latinLnBrk="0" hangingPunct="1">
-                <a:spcBef>
-                  <a:spcPct val="20000"/>
-                </a:spcBef>
-                <a:buFont typeface="Arial" pitchFamily="34" charset="0"/>
-                <a:buChar char="•"/>
-                <a:defRPr sz="2000" kern="1200">
-                  <a:solidFill>
-                    <a:schemeClr val="tx1"/>
-                  </a:solidFill>
-                  <a:latin typeface="+mn-lt"/>
-                  <a:ea typeface="+mn-ea"/>
-                  <a:cs typeface="+mn-cs"/>
-                </a:defRPr>
-              </a:lvl6pPr>
-              <a:lvl7pPr marL="2971800" indent="-228600" algn="l" defTabSz="914400" rtl="0" eaLnBrk="1" latinLnBrk="0" hangingPunct="1">
-                <a:spcBef>
-                  <a:spcPct val="20000"/>
-                </a:spcBef>
-                <a:buFont typeface="Arial" pitchFamily="34" charset="0"/>
-                <a:buChar char="•"/>
-                <a:defRPr sz="2000" kern="1200">
-                  <a:solidFill>
-                    <a:schemeClr val="tx1"/>
-                  </a:solidFill>
-                  <a:latin typeface="+mn-lt"/>
-                  <a:ea typeface="+mn-ea"/>
-                  <a:cs typeface="+mn-cs"/>
-                </a:defRPr>
-              </a:lvl7pPr>
-              <a:lvl8pPr marL="3429000" indent="-228600" algn="l" defTabSz="914400" rtl="0" eaLnBrk="1" latinLnBrk="0" hangingPunct="1">
-                <a:spcBef>
-                  <a:spcPct val="20000"/>
-                </a:spcBef>
-                <a:buFont typeface="Arial" pitchFamily="34" charset="0"/>
-                <a:buChar char="•"/>
-                <a:defRPr sz="2000" kern="1200">
-                  <a:solidFill>
-                    <a:schemeClr val="tx1"/>
-                  </a:solidFill>
-                  <a:latin typeface="+mn-lt"/>
-                  <a:ea typeface="+mn-ea"/>
-                  <a:cs typeface="+mn-cs"/>
-                </a:defRPr>
-              </a:lvl8pPr>
-              <a:lvl9pPr marL="3886200" indent="-228600" algn="l" defTabSz="914400" rtl="0" eaLnBrk="1" latinLnBrk="0" hangingPunct="1">
-                <a:spcBef>
-                  <a:spcPct val="20000"/>
-                </a:spcBef>
-                <a:buFont typeface="Arial" pitchFamily="34" charset="0"/>
-                <a:buChar char="•"/>
-                <a:defRPr sz="2000" kern="1200">
-                  <a:solidFill>
-                    <a:schemeClr val="tx1"/>
-                  </a:solidFill>
-                  <a:latin typeface="+mn-lt"/>
-                  <a:ea typeface="+mn-ea"/>
-                  <a:cs typeface="+mn-cs"/>
-                </a:defRPr>
-              </a:lvl9pPr>
-            </a:lstStyle>
-            <a:p>
-              <a:pPr marL="0" indent="0">
-                <a:buNone/>
-              </a:pPr>
-              <a:r>
-                <a:rPr lang="en-US" dirty="0" smtClean="0"/>
-                <a:t>credit: </a:t>
-              </a:r>
-              <a:br>
-                <a:rPr lang="en-US" dirty="0" smtClean="0"/>
-              </a:br>
-              <a:r>
-                <a:rPr lang="en-US" dirty="0"/>
-                <a:t>http://mynasadata.larc.nasa.gov/Radiation_Explanation.html</a:t>
-              </a:r>
-              <a:endParaRPr lang="en-US" dirty="0" smtClean="0"/>
-            </a:p>
-          </p:txBody>
-        </p:sp>
-      </p:grpSp>
-      <p:pic>
-        <p:nvPicPr>
-          <p:cNvPr id="2051" name="Picture 3" descr="C:\Users\ksung\Desktop\ScreenHunter_05 Sep. 01 17.30.jpg"/>
-          <p:cNvPicPr>
-            <a:picLocks noChangeAspect="1" noChangeArrowheads="1"/>
-          </p:cNvPicPr>
-          <p:nvPr/>
-        </p:nvPicPr>
-        <p:blipFill>
-          <a:blip r:embed="rId4" cstate="print">
-            <a:extLst>
-              <a:ext uri="{28A0092B-C50C-407E-A947-70E740481C1C}">
-                <a14:useLocalDpi xmlns:a14="http://schemas.microsoft.com/office/drawing/2010/main" val="0"/>
-              </a:ext>
-            </a:extLst>
-          </a:blip>
-          <a:srcRect/>
-          <a:stretch>
-            <a:fillRect/>
-          </a:stretch>
-        </p:blipFill>
-        <p:spPr bwMode="auto">
-          <a:xfrm>
-            <a:off x="5733316" y="2917105"/>
-            <a:ext cx="3410622" cy="2085741"/>
-          </a:xfrm>
-          <a:prstGeom prst="rect">
-            <a:avLst/>
-          </a:prstGeom>
-          <a:noFill/>
-          <a:extLst>
-            <a:ext uri="{909E8E84-426E-40DD-AFC4-6F175D3DCCD1}">
-              <a14:hiddenFill xmlns:a14="http://schemas.microsoft.com/office/drawing/2010/main">
-                <a:solidFill>
-                  <a:srgbClr val="FFFFFF"/>
-                </a:solidFill>
-              </a14:hiddenFill>
-            </a:ext>
-          </a:extLst>
-        </p:spPr>
-      </p:pic>
-      <p:sp>
-        <p:nvSpPr>
-          <p:cNvPr id="8" name="Content Placeholder 2"/>
-          <p:cNvSpPr txBox="1">
-            <a:spLocks/>
-          </p:cNvSpPr>
-          <p:nvPr/>
-        </p:nvSpPr>
-        <p:spPr>
-          <a:xfrm>
-            <a:off x="7930802" y="2919039"/>
-            <a:ext cx="1213198" cy="466439"/>
-          </a:xfrm>
-          <a:prstGeom prst="rect">
-            <a:avLst/>
-          </a:prstGeom>
-          <a:noFill/>
-        </p:spPr>
-        <p:txBody>
-          <a:bodyPr vert="horz" lIns="91440" tIns="45720" rIns="91440" bIns="45720" rtlCol="0">
-            <a:normAutofit fontScale="25000" lnSpcReduction="20000"/>
-          </a:bodyPr>
-          <a:lstStyle>
-            <a:lvl1pPr marL="342900" indent="-342900" algn="l" defTabSz="914400" rtl="0" eaLnBrk="1" latinLnBrk="0" hangingPunct="1">
-              <a:spcBef>
-                <a:spcPct val="20000"/>
-              </a:spcBef>
-              <a:buFont typeface="Arial" pitchFamily="34" charset="0"/>
-              <a:buChar char="•"/>
-              <a:defRPr sz="3200" kern="1200">
-                <a:solidFill>
-                  <a:schemeClr val="tx1"/>
-                </a:solidFill>
-                <a:latin typeface="+mn-lt"/>
-                <a:ea typeface="+mn-ea"/>
-                <a:cs typeface="+mn-cs"/>
-              </a:defRPr>
-            </a:lvl1pPr>
-            <a:lvl2pPr marL="742950" indent="-285750" algn="l" defTabSz="914400" rtl="0" eaLnBrk="1" latinLnBrk="0" hangingPunct="1">
-              <a:spcBef>
-                <a:spcPct val="20000"/>
-              </a:spcBef>
-              <a:buFont typeface="Arial" pitchFamily="34" charset="0"/>
-              <a:buChar char="–"/>
-              <a:defRPr sz="2800" kern="1200">
-                <a:solidFill>
-                  <a:schemeClr val="tx1"/>
-                </a:solidFill>
-                <a:latin typeface="+mn-lt"/>
-                <a:ea typeface="+mn-ea"/>
-                <a:cs typeface="+mn-cs"/>
-              </a:defRPr>
-            </a:lvl2pPr>
-            <a:lvl3pPr marL="1143000" indent="-228600" algn="l" defTabSz="914400" rtl="0" eaLnBrk="1" latinLnBrk="0" hangingPunct="1">
-              <a:spcBef>
-                <a:spcPct val="20000"/>
-              </a:spcBef>
-              <a:buFont typeface="Arial" pitchFamily="34" charset="0"/>
-              <a:buChar char="•"/>
-              <a:defRPr sz="2400" kern="1200">
-                <a:solidFill>
-                  <a:schemeClr val="tx1"/>
-                </a:solidFill>
-                <a:latin typeface="+mn-lt"/>
-                <a:ea typeface="+mn-ea"/>
-                <a:cs typeface="+mn-cs"/>
-              </a:defRPr>
-            </a:lvl3pPr>
-            <a:lvl4pPr marL="1600200" indent="-228600" algn="l" defTabSz="914400" rtl="0" eaLnBrk="1" latinLnBrk="0" hangingPunct="1">
-              <a:spcBef>
-                <a:spcPct val="20000"/>
-              </a:spcBef>
-              <a:buFont typeface="Arial" pitchFamily="34" charset="0"/>
-              <a:buChar char="–"/>
-              <a:defRPr sz="2000" kern="1200">
-                <a:solidFill>
-                  <a:schemeClr val="tx1"/>
-                </a:solidFill>
-                <a:latin typeface="+mn-lt"/>
-                <a:ea typeface="+mn-ea"/>
-                <a:cs typeface="+mn-cs"/>
-              </a:defRPr>
-            </a:lvl4pPr>
-            <a:lvl5pPr marL="2057400" indent="-228600" algn="l" defTabSz="914400" rtl="0" eaLnBrk="1" latinLnBrk="0" hangingPunct="1">
-              <a:spcBef>
-                <a:spcPct val="20000"/>
-              </a:spcBef>
-              <a:buFont typeface="Arial" pitchFamily="34" charset="0"/>
-              <a:buChar char="»"/>
-              <a:defRPr sz="2000" kern="1200">
-                <a:solidFill>
-                  <a:schemeClr val="tx1"/>
-                </a:solidFill>
-                <a:latin typeface="+mn-lt"/>
-                <a:ea typeface="+mn-ea"/>
-                <a:cs typeface="+mn-cs"/>
-              </a:defRPr>
-            </a:lvl5pPr>
-            <a:lvl6pPr marL="2514600" indent="-228600" algn="l" defTabSz="914400" rtl="0" eaLnBrk="1" latinLnBrk="0" hangingPunct="1">
-              <a:spcBef>
-                <a:spcPct val="20000"/>
-              </a:spcBef>
-              <a:buFont typeface="Arial" pitchFamily="34" charset="0"/>
-              <a:buChar char="•"/>
-              <a:defRPr sz="2000" kern="1200">
-                <a:solidFill>
-                  <a:schemeClr val="tx1"/>
-                </a:solidFill>
-                <a:latin typeface="+mn-lt"/>
-                <a:ea typeface="+mn-ea"/>
-                <a:cs typeface="+mn-cs"/>
-              </a:defRPr>
-            </a:lvl6pPr>
-            <a:lvl7pPr marL="2971800" indent="-228600" algn="l" defTabSz="914400" rtl="0" eaLnBrk="1" latinLnBrk="0" hangingPunct="1">
-              <a:spcBef>
-                <a:spcPct val="20000"/>
-              </a:spcBef>
-              <a:buFont typeface="Arial" pitchFamily="34" charset="0"/>
-              <a:buChar char="•"/>
-              <a:defRPr sz="2000" kern="1200">
-                <a:solidFill>
-                  <a:schemeClr val="tx1"/>
-                </a:solidFill>
-                <a:latin typeface="+mn-lt"/>
-                <a:ea typeface="+mn-ea"/>
-                <a:cs typeface="+mn-cs"/>
-              </a:defRPr>
-            </a:lvl7pPr>
-            <a:lvl8pPr marL="3429000" indent="-228600" algn="l" defTabSz="914400" rtl="0" eaLnBrk="1" latinLnBrk="0" hangingPunct="1">
-              <a:spcBef>
-                <a:spcPct val="20000"/>
-              </a:spcBef>
-              <a:buFont typeface="Arial" pitchFamily="34" charset="0"/>
-              <a:buChar char="•"/>
-              <a:defRPr sz="2000" kern="1200">
-                <a:solidFill>
-                  <a:schemeClr val="tx1"/>
-                </a:solidFill>
-                <a:latin typeface="+mn-lt"/>
-                <a:ea typeface="+mn-ea"/>
-                <a:cs typeface="+mn-cs"/>
-              </a:defRPr>
-            </a:lvl8pPr>
-            <a:lvl9pPr marL="3886200" indent="-228600" algn="l" defTabSz="914400" rtl="0" eaLnBrk="1" latinLnBrk="0" hangingPunct="1">
-              <a:spcBef>
-                <a:spcPct val="20000"/>
-              </a:spcBef>
-              <a:buFont typeface="Arial" pitchFamily="34" charset="0"/>
-              <a:buChar char="•"/>
-              <a:defRPr sz="2000" kern="1200">
-                <a:solidFill>
-                  <a:schemeClr val="tx1"/>
-                </a:solidFill>
-                <a:latin typeface="+mn-lt"/>
-                <a:ea typeface="+mn-ea"/>
-                <a:cs typeface="+mn-cs"/>
-              </a:defRPr>
-            </a:lvl9pPr>
-          </a:lstStyle>
-          <a:p>
-            <a:pPr marL="0" indent="0">
-              <a:buNone/>
-            </a:pPr>
-            <a:r>
-              <a:rPr lang="en-US" dirty="0">
-                <a:solidFill>
-                  <a:schemeClr val="bg1"/>
-                </a:solidFill>
-              </a:rPr>
-              <a:t>credit</a:t>
-            </a:r>
-            <a:r>
-              <a:rPr lang="en-US" dirty="0" smtClean="0">
-                <a:solidFill>
-                  <a:schemeClr val="bg1"/>
-                </a:solidFill>
-              </a:rPr>
-              <a:t>: http</a:t>
-            </a:r>
-            <a:r>
-              <a:rPr lang="en-US" dirty="0">
-                <a:solidFill>
-                  <a:schemeClr val="bg1"/>
-                </a:solidFill>
-              </a:rPr>
-              <a:t>://www.truebeyonddesign.com/products-page/ </a:t>
-            </a:r>
-            <a:r>
-              <a:rPr lang="en-US" dirty="0" smtClean="0"/>
-              <a:t/>
-            </a:r>
-            <a:br>
-              <a:rPr lang="en-US" dirty="0" smtClean="0"/>
-            </a:br>
-            <a:endParaRPr lang="en-US" dirty="0" smtClean="0"/>
-          </a:p>
-        </p:txBody>
-      </p:sp>
-      <p:pic>
-        <p:nvPicPr>
-          <p:cNvPr id="10" name="Picture 9" descr="C:\Users\ksung\Desktop\ScreenHunter_10 Sep. 01 18.05.jpg"/>
-          <p:cNvPicPr>
-            <a:picLocks noChangeAspect="1" noChangeArrowheads="1"/>
-          </p:cNvPicPr>
-          <p:nvPr/>
-        </p:nvPicPr>
-        <p:blipFill>
-          <a:blip r:embed="rId5">
-            <a:extLst>
-              <a:ext uri="{28A0092B-C50C-407E-A947-70E740481C1C}">
-                <a14:useLocalDpi xmlns:a14="http://schemas.microsoft.com/office/drawing/2010/main" val="0"/>
-              </a:ext>
-            </a:extLst>
-          </a:blip>
-          <a:srcRect/>
-          <a:stretch>
-            <a:fillRect/>
-          </a:stretch>
-        </p:blipFill>
-        <p:spPr bwMode="auto">
-          <a:xfrm>
-            <a:off x="6503180" y="5071273"/>
-            <a:ext cx="2351000" cy="1752817"/>
-          </a:xfrm>
-          <a:prstGeom prst="rect">
-            <a:avLst/>
-          </a:prstGeom>
-          <a:noFill/>
-          <a:extLst>
-            <a:ext uri="{909E8E84-426E-40DD-AFC4-6F175D3DCCD1}">
-              <a14:hiddenFill xmlns:a14="http://schemas.microsoft.com/office/drawing/2010/main">
-                <a:solidFill>
-                  <a:srgbClr val="FFFFFF"/>
-                </a:solidFill>
-              </a14:hiddenFill>
-            </a:ext>
-          </a:extLst>
-        </p:spPr>
-      </p:pic>
-      <p:sp>
-        <p:nvSpPr>
-          <p:cNvPr id="11" name="Content Placeholder 2"/>
-          <p:cNvSpPr>
-            <a:spLocks noGrp="1"/>
-          </p:cNvSpPr>
-          <p:nvPr/>
-        </p:nvSpPr>
-        <p:spPr>
-          <a:xfrm>
-            <a:off x="6435862" y="5071274"/>
-            <a:ext cx="2645028" cy="286345"/>
-          </a:xfrm>
-          <a:prstGeom prst="rect">
-            <a:avLst/>
-          </a:prstGeom>
-        </p:spPr>
-        <p:txBody>
-          <a:bodyPr vert="horz" lIns="91440" tIns="45720" rIns="91440" bIns="45720" rtlCol="0">
-            <a:normAutofit fontScale="25000" lnSpcReduction="20000"/>
-          </a:bodyPr>
-          <a:lstStyle>
-            <a:lvl1pPr marL="342900" indent="-342900" algn="l" defTabSz="914400" rtl="0" eaLnBrk="1" latinLnBrk="0" hangingPunct="1">
-              <a:spcBef>
-                <a:spcPct val="20000"/>
-              </a:spcBef>
-              <a:buFont typeface="Arial" pitchFamily="34" charset="0"/>
-              <a:buChar char="•"/>
-              <a:defRPr sz="3200" kern="1200">
-                <a:solidFill>
-                  <a:schemeClr val="tx1"/>
-                </a:solidFill>
-                <a:latin typeface="+mn-lt"/>
-                <a:ea typeface="+mn-ea"/>
-                <a:cs typeface="+mn-cs"/>
-              </a:defRPr>
-            </a:lvl1pPr>
-            <a:lvl2pPr marL="742950" indent="-285750" algn="l" defTabSz="914400" rtl="0" eaLnBrk="1" latinLnBrk="0" hangingPunct="1">
-              <a:spcBef>
-                <a:spcPct val="20000"/>
-              </a:spcBef>
-              <a:buFont typeface="Arial" pitchFamily="34" charset="0"/>
-              <a:buChar char="–"/>
-              <a:defRPr sz="2800" kern="1200">
-                <a:solidFill>
-                  <a:schemeClr val="tx1"/>
-                </a:solidFill>
-                <a:latin typeface="+mn-lt"/>
-                <a:ea typeface="+mn-ea"/>
-                <a:cs typeface="+mn-cs"/>
-              </a:defRPr>
-            </a:lvl2pPr>
-            <a:lvl3pPr marL="1143000" indent="-228600" algn="l" defTabSz="914400" rtl="0" eaLnBrk="1" latinLnBrk="0" hangingPunct="1">
-              <a:spcBef>
-                <a:spcPct val="20000"/>
-              </a:spcBef>
-              <a:buFont typeface="Arial" pitchFamily="34" charset="0"/>
-              <a:buChar char="•"/>
-              <a:defRPr sz="2400" kern="1200">
-                <a:solidFill>
-                  <a:schemeClr val="tx1"/>
-                </a:solidFill>
-                <a:latin typeface="+mn-lt"/>
-                <a:ea typeface="+mn-ea"/>
-                <a:cs typeface="+mn-cs"/>
-              </a:defRPr>
-            </a:lvl3pPr>
-            <a:lvl4pPr marL="1600200" indent="-228600" algn="l" defTabSz="914400" rtl="0" eaLnBrk="1" latinLnBrk="0" hangingPunct="1">
-              <a:spcBef>
-                <a:spcPct val="20000"/>
-              </a:spcBef>
-              <a:buFont typeface="Arial" pitchFamily="34" charset="0"/>
-              <a:buChar char="–"/>
-              <a:defRPr sz="2000" kern="1200">
-                <a:solidFill>
-                  <a:schemeClr val="tx1"/>
-                </a:solidFill>
-                <a:latin typeface="+mn-lt"/>
-                <a:ea typeface="+mn-ea"/>
-                <a:cs typeface="+mn-cs"/>
-              </a:defRPr>
-            </a:lvl4pPr>
-            <a:lvl5pPr marL="2057400" indent="-228600" algn="l" defTabSz="914400" rtl="0" eaLnBrk="1" latinLnBrk="0" hangingPunct="1">
-              <a:spcBef>
-                <a:spcPct val="20000"/>
-              </a:spcBef>
-              <a:buFont typeface="Arial" pitchFamily="34" charset="0"/>
-              <a:buChar char="»"/>
-              <a:defRPr sz="2000" kern="1200">
-                <a:solidFill>
-                  <a:schemeClr val="tx1"/>
-                </a:solidFill>
-                <a:latin typeface="+mn-lt"/>
-                <a:ea typeface="+mn-ea"/>
-                <a:cs typeface="+mn-cs"/>
-              </a:defRPr>
-            </a:lvl5pPr>
-            <a:lvl6pPr marL="2514600" indent="-228600" algn="l" defTabSz="914400" rtl="0" eaLnBrk="1" latinLnBrk="0" hangingPunct="1">
-              <a:spcBef>
-                <a:spcPct val="20000"/>
-              </a:spcBef>
-              <a:buFont typeface="Arial" pitchFamily="34" charset="0"/>
-              <a:buChar char="•"/>
-              <a:defRPr sz="2000" kern="1200">
-                <a:solidFill>
-                  <a:schemeClr val="tx1"/>
-                </a:solidFill>
-                <a:latin typeface="+mn-lt"/>
-                <a:ea typeface="+mn-ea"/>
-                <a:cs typeface="+mn-cs"/>
-              </a:defRPr>
-            </a:lvl6pPr>
-            <a:lvl7pPr marL="2971800" indent="-228600" algn="l" defTabSz="914400" rtl="0" eaLnBrk="1" latinLnBrk="0" hangingPunct="1">
-              <a:spcBef>
-                <a:spcPct val="20000"/>
-              </a:spcBef>
-              <a:buFont typeface="Arial" pitchFamily="34" charset="0"/>
-              <a:buChar char="•"/>
-              <a:defRPr sz="2000" kern="1200">
-                <a:solidFill>
-                  <a:schemeClr val="tx1"/>
-                </a:solidFill>
-                <a:latin typeface="+mn-lt"/>
-                <a:ea typeface="+mn-ea"/>
-                <a:cs typeface="+mn-cs"/>
-              </a:defRPr>
-            </a:lvl7pPr>
-            <a:lvl8pPr marL="3429000" indent="-228600" algn="l" defTabSz="914400" rtl="0" eaLnBrk="1" latinLnBrk="0" hangingPunct="1">
-              <a:spcBef>
-                <a:spcPct val="20000"/>
-              </a:spcBef>
-              <a:buFont typeface="Arial" pitchFamily="34" charset="0"/>
-              <a:buChar char="•"/>
-              <a:defRPr sz="2000" kern="1200">
-                <a:solidFill>
-                  <a:schemeClr val="tx1"/>
-                </a:solidFill>
-                <a:latin typeface="+mn-lt"/>
-                <a:ea typeface="+mn-ea"/>
-                <a:cs typeface="+mn-cs"/>
-              </a:defRPr>
-            </a:lvl8pPr>
-            <a:lvl9pPr marL="3886200" indent="-228600" algn="l" defTabSz="914400" rtl="0" eaLnBrk="1" latinLnBrk="0" hangingPunct="1">
-              <a:spcBef>
-                <a:spcPct val="20000"/>
-              </a:spcBef>
-              <a:buFont typeface="Arial" pitchFamily="34" charset="0"/>
-              <a:buChar char="•"/>
-              <a:defRPr sz="2000" kern="1200">
-                <a:solidFill>
-                  <a:schemeClr val="tx1"/>
-                </a:solidFill>
-                <a:latin typeface="+mn-lt"/>
-                <a:ea typeface="+mn-ea"/>
-                <a:cs typeface="+mn-cs"/>
-              </a:defRPr>
-            </a:lvl9pPr>
-          </a:lstStyle>
-          <a:p>
-            <a:pPr marL="0" indent="0">
-              <a:buNone/>
-            </a:pPr>
-            <a:r>
-              <a:rPr lang="en-US" b="1" dirty="0">
-                <a:solidFill>
-                  <a:schemeClr val="bg1"/>
-                </a:solidFill>
-              </a:rPr>
-              <a:t>http://www.apartmenttherapy.com/ny/lighting/best-product-tolomeo-desk-lamp-001066</a:t>
-            </a:r>
-          </a:p>
-        </p:txBody>
-      </p:sp>
-    </p:spTree>
-    <p:extLst>
-      <p:ext uri="{BB962C8B-B14F-4D97-AF65-F5344CB8AC3E}">
-        <p14:creationId xmlns:p14="http://schemas.microsoft.com/office/powerpoint/2010/main" val="2365070640"/>
-      </p:ext>
-    </p:extLst>
-  </p:cSld>
-  <p:clrMapOvr>
-    <a:masterClrMapping/>
-  </p:clrMapOvr>
-  <p:timing>
-    <p:tnLst>
-      <p:par>
-        <p:cTn id="1" dur="indefinite" restart="never" nodeType="tmRoot"/>
-      </p:par>
-    </p:tnLst>
-  </p:timing>
 </p:sld>
 </file>
 
@@ -15900,10 +17299,9 @@
           <a:lstStyle/>
           <a:p>
             <a:r>
-              <a:rPr lang="en-US" dirty="0" smtClean="0"/>
+              <a:rPr lang="en-US" dirty="0"/>
               <a:t>What is Ambient Light?</a:t>
             </a:r>
-            <a:endParaRPr lang="en-US" dirty="0"/>
           </a:p>
         </p:txBody>
       </p:sp>
@@ -15923,36 +17321,36 @@
           <a:lstStyle/>
           <a:p>
             <a:r>
-              <a:rPr lang="en-US" dirty="0" smtClean="0"/>
+              <a:rPr lang="en-US" dirty="0"/>
               <a:t>Not in the real world!</a:t>
             </a:r>
           </a:p>
           <a:p>
             <a:r>
-              <a:rPr lang="en-US" dirty="0" smtClean="0"/>
+              <a:rPr lang="en-US" dirty="0"/>
               <a:t>Implementation dependent!</a:t>
             </a:r>
           </a:p>
           <a:p>
             <a:pPr lvl="1"/>
             <a:r>
-              <a:rPr lang="en-US" dirty="0" smtClean="0"/>
+              <a:rPr lang="en-US" dirty="0"/>
               <a:t>constant color added to illumination results</a:t>
             </a:r>
           </a:p>
           <a:p>
             <a:pPr lvl="1"/>
             <a:r>
-              <a:rPr lang="en-US" dirty="0" smtClean="0"/>
+              <a:rPr lang="en-US" dirty="0"/>
               <a:t>Maya </a:t>
             </a:r>
             <a:r>
-              <a:rPr lang="en-US" dirty="0" smtClean="0">
+              <a:rPr lang="en-US" dirty="0">
                 <a:hlinkClick r:id="rId2" action="ppaction://hlinkfile"/>
               </a:rPr>
               <a:t>scene file</a:t>
             </a:r>
-            <a:endParaRPr lang="en-US" dirty="0" smtClean="0"/>
+            <a:endParaRPr lang="en-US" dirty="0"/>
           </a:p>
           <a:p>
             <a:pPr lvl="1"/>
@@ -16186,7 +17584,7 @@
             <a:lstStyle/>
             <a:p>
               <a:r>
-                <a:rPr lang="en-US" sz="1600" dirty="0" smtClean="0">
+                <a:rPr lang="en-US" sz="1600" dirty="0">
                   <a:solidFill>
                     <a:schemeClr val="tx1"/>
                   </a:solidFill>
@@ -16310,7 +17708,7 @@
             <a:lstStyle/>
             <a:p>
               <a:r>
-                <a:rPr lang="en-US" sz="1600" dirty="0" smtClean="0">
+                <a:rPr lang="en-US" sz="1600" dirty="0">
                   <a:solidFill>
                     <a:schemeClr val="tx1"/>
                   </a:solidFill>
@@ -16434,7 +17832,7 @@
             <a:lstStyle/>
             <a:p>
               <a:r>
-                <a:rPr lang="en-US" sz="1600" dirty="0" smtClean="0">
+                <a:rPr lang="en-US" sz="1600" dirty="0">
                   <a:solidFill>
                     <a:schemeClr val="bg1"/>
                   </a:solidFill>
@@ -16455,13 +17853,6 @@
   <p:clrMapOvr>
     <a:masterClrMapping/>
   </p:clrMapOvr>
-  <p:timing>
-    <p:tnLst>
-      <p:par>
-        <p:cTn id="1" dur="indefinite" restart="never" nodeType="tmRoot"/>
-      </p:par>
-    </p:tnLst>
-  </p:timing>
 </p:sld>
 </file>
 
@@ -16498,10 +17889,9 @@
           <a:lstStyle/>
           <a:p>
             <a:r>
-              <a:rPr lang="en-US" dirty="0" smtClean="0"/>
+              <a:rPr lang="en-US" dirty="0"/>
               <a:t>What about the Sun?</a:t>
             </a:r>
-            <a:endParaRPr lang="en-US" dirty="0"/>
           </a:p>
         </p:txBody>
       </p:sp>
@@ -16521,10 +17911,9 @@
           <a:lstStyle/>
           <a:p>
             <a:r>
-              <a:rPr lang="en-US" dirty="0" smtClean="0"/>
+              <a:rPr lang="en-US" dirty="0"/>
               <a:t>How would you describe the incoming light source for this scene?</a:t>
             </a:r>
-            <a:endParaRPr lang="en-US" dirty="0"/>
           </a:p>
         </p:txBody>
       </p:sp>
@@ -16747,10 +18136,9 @@
                 <a:buNone/>
               </a:pPr>
               <a:r>
-                <a:rPr lang="en-US" dirty="0" smtClean="0"/>
+                <a:rPr lang="en-US" dirty="0"/>
                 <a:t>http://www.planetware.com/picture/kansas-cottonwood-falls-tallgrass-prairie-national-preserve-flint-hills-national-prairie-us-ks108.htm</a:t>
               </a:r>
-              <a:endParaRPr lang="en-US" dirty="0"/>
             </a:p>
           </p:txBody>
         </p:sp>
@@ -16765,13 +18153,6 @@
   <p:clrMapOvr>
     <a:masterClrMapping/>
   </p:clrMapOvr>
-  <p:timing>
-    <p:tnLst>
-      <p:par>
-        <p:cTn id="1" dur="indefinite" restart="never" nodeType="tmRoot"/>
-      </p:par>
-    </p:tnLst>
-  </p:timing>
 </p:sld>
 </file>
 
@@ -16808,10 +18189,9 @@
           <a:lstStyle/>
           <a:p>
             <a:r>
-              <a:rPr lang="en-US" dirty="0" smtClean="0"/>
+              <a:rPr lang="en-US" dirty="0"/>
               <a:t>Directional Light</a:t>
             </a:r>
-            <a:endParaRPr lang="en-US" dirty="0"/>
           </a:p>
         </p:txBody>
       </p:sp>
@@ -16838,7 +18218,7 @@
               <a:lstStyle/>
               <a:p>
                 <a:r>
-                  <a:rPr lang="en-US" dirty="0" smtClean="0"/>
+                  <a:rPr lang="en-US" dirty="0"/>
                   <a:t>Direction is: </a:t>
                 </a:r>
                 <a14:m>
@@ -16873,31 +18253,31 @@
               </a:p>
               <a:p>
                 <a:r>
-                  <a:rPr lang="en-US" dirty="0" smtClean="0"/>
+                  <a:rPr lang="en-US" dirty="0"/>
                   <a:t>No position!! (where is the Sun?)</a:t>
                 </a:r>
               </a:p>
               <a:p>
                 <a:r>
-                  <a:rPr lang="en-US" dirty="0" smtClean="0"/>
+                  <a:rPr lang="en-US" dirty="0"/>
                   <a:t>Light has no geometry and does </a:t>
                 </a:r>
                 <a:r>
-                  <a:rPr lang="en-US" b="1" i="1" dirty="0" smtClean="0"/>
+                  <a:rPr lang="en-US" b="1" i="1" dirty="0"/>
                   <a:t>not </a:t>
                 </a:r>
                 <a:r>
-                  <a:rPr lang="en-US" dirty="0" smtClean="0"/>
+                  <a:rPr lang="en-US" dirty="0"/>
                   <a:t>show up in final rendered image</a:t>
                 </a:r>
               </a:p>
               <a:p>
                 <a:r>
-                  <a:rPr lang="en-US" dirty="0" smtClean="0"/>
+                  <a:rPr lang="en-US" dirty="0"/>
                   <a:t>Planes looks … flat </a:t>
                 </a:r>
                 <a:r>
-                  <a:rPr lang="en-US" dirty="0" smtClean="0">
+                  <a:rPr lang="en-US" dirty="0">
                     <a:sym typeface="Wingdings" pitchFamily="2" charset="2"/>
                   </a:rPr>
                   <a:t></a:t>
@@ -16905,7 +18285,7 @@
               </a:p>
               <a:p>
                 <a:r>
-                  <a:rPr lang="en-US" dirty="0" smtClean="0">
+                  <a:rPr lang="en-US" dirty="0">
                     <a:sym typeface="Wingdings" pitchFamily="2" charset="2"/>
                     <a:hlinkClick r:id="rId2" action="ppaction://hlinkfile"/>
                   </a:rPr>
@@ -17308,7 +18688,7 @@
           <a:lstStyle/>
           <a:p>
             <a:r>
-              <a:rPr lang="en-US" sz="1600" dirty="0" smtClean="0">
+              <a:rPr lang="en-US" sz="1600" dirty="0">
                 <a:solidFill>
                   <a:schemeClr val="tx1"/>
                 </a:solidFill>
@@ -17316,14 +18696,14 @@
               <a:t>Directional </a:t>
             </a:r>
             <a:br>
-              <a:rPr lang="en-US" sz="1600" dirty="0" smtClean="0">
+              <a:rPr lang="en-US" sz="1600" dirty="0">
                 <a:solidFill>
                   <a:schemeClr val="tx1"/>
                 </a:solidFill>
               </a:rPr>
             </a:br>
             <a:r>
-              <a:rPr lang="en-US" sz="1600" dirty="0" smtClean="0">
+              <a:rPr lang="en-US" sz="1600" dirty="0">
                 <a:solidFill>
                   <a:schemeClr val="tx1"/>
                 </a:solidFill>
@@ -17447,7 +18827,7 @@
           <a:lstStyle/>
           <a:p>
             <a:r>
-              <a:rPr lang="en-US" sz="1600" dirty="0" smtClean="0">
+              <a:rPr lang="en-US" sz="1600" dirty="0">
                 <a:solidFill>
                   <a:schemeClr val="bg1"/>
                 </a:solidFill>
@@ -18054,13 +19434,6 @@
   <p:clrMapOvr>
     <a:masterClrMapping/>
   </p:clrMapOvr>
-  <p:timing>
-    <p:tnLst>
-      <p:par>
-        <p:cTn id="1" dur="indefinite" restart="never" nodeType="tmRoot"/>
-      </p:par>
-    </p:tnLst>
-  </p:timing>
 </p:sld>
 </file>
 
@@ -18097,10 +19470,9 @@
           <a:lstStyle/>
           <a:p>
             <a:r>
-              <a:rPr lang="en-US" dirty="0" smtClean="0"/>
+              <a:rPr lang="en-US" dirty="0"/>
               <a:t>What about the Light Bulb?</a:t>
             </a:r>
-            <a:endParaRPr lang="en-US" dirty="0"/>
           </a:p>
         </p:txBody>
       </p:sp>
@@ -18120,10 +19492,9 @@
           <a:lstStyle/>
           <a:p>
             <a:r>
-              <a:rPr lang="en-US" dirty="0" smtClean="0"/>
+              <a:rPr lang="en-US" dirty="0"/>
               <a:t>How would you describe the light source of these scenes?</a:t>
             </a:r>
-            <a:endParaRPr lang="en-US" dirty="0"/>
           </a:p>
         </p:txBody>
       </p:sp>
@@ -18355,18 +19726,13 @@
               <a:buNone/>
             </a:pPr>
             <a:r>
-              <a:rPr lang="en-US" dirty="0" smtClean="0">
+              <a:rPr lang="en-US" dirty="0">
                 <a:solidFill>
                   <a:schemeClr val="bg1"/>
                 </a:solidFill>
               </a:rPr>
               <a:t>http://home.cogeco.ca/~richardastro2/</a:t>
             </a:r>
-            <a:endParaRPr lang="en-US" dirty="0">
-              <a:solidFill>
-                <a:schemeClr val="bg1"/>
-              </a:solidFill>
-            </a:endParaRPr>
           </a:p>
         </p:txBody>
       </p:sp>
@@ -18598,18 +19964,13 @@
               <a:buNone/>
             </a:pPr>
             <a:r>
-              <a:rPr lang="en-US" dirty="0" smtClean="0">
+              <a:rPr lang="en-US" dirty="0">
                 <a:solidFill>
                   <a:schemeClr val="bg1"/>
                 </a:solidFill>
               </a:rPr>
               <a:t>http://companyofburninghearts.wordpress.com/2010/03/18/mystic-clusters/</a:t>
             </a:r>
-            <a:endParaRPr lang="en-US" dirty="0">
-              <a:solidFill>
-                <a:schemeClr val="bg1"/>
-              </a:solidFill>
-            </a:endParaRPr>
           </a:p>
         </p:txBody>
       </p:sp>
@@ -18623,13 +19984,6 @@
   <p:clrMapOvr>
     <a:masterClrMapping/>
   </p:clrMapOvr>
-  <p:timing>
-    <p:tnLst>
-      <p:par>
-        <p:cTn id="1" dur="indefinite" restart="never" nodeType="tmRoot"/>
-      </p:par>
-    </p:tnLst>
-  </p:timing>
 </p:sld>
 </file>
 
@@ -18666,10 +20020,9 @@
           <a:lstStyle/>
           <a:p>
             <a:r>
-              <a:rPr lang="en-US" dirty="0" smtClean="0"/>
+              <a:rPr lang="en-US" dirty="0"/>
               <a:t>Point Light</a:t>
             </a:r>
-            <a:endParaRPr lang="en-US" dirty="0"/>
           </a:p>
         </p:txBody>
       </p:sp>
@@ -18696,7 +20049,7 @@
               <a:lstStyle/>
               <a:p>
                 <a:r>
-                  <a:rPr lang="en-US" dirty="0" smtClean="0"/>
+                  <a:rPr lang="en-US" dirty="0"/>
                   <a:t>Position (</a:t>
                 </a:r>
                 <a14:m>
@@ -18732,13 +20085,13 @@
                   </m:oMath>
                 </a14:m>
                 <a:r>
-                  <a:rPr lang="en-US" dirty="0" smtClean="0"/>
+                  <a:rPr lang="en-US" dirty="0"/>
                   <a:t>)</a:t>
                 </a:r>
               </a:p>
               <a:p>
                 <a:r>
-                  <a:rPr lang="en-US" dirty="0" smtClean="0"/>
+                  <a:rPr lang="en-US" dirty="0"/>
                   <a:t>For every visible position (</a:t>
                 </a:r>
                 <a14:m>
@@ -18774,7 +20127,7 @@
                   </m:oMath>
                 </a14:m>
                 <a:r>
-                  <a:rPr lang="en-US" dirty="0" smtClean="0"/>
+                  <a:rPr lang="en-US" dirty="0"/>
                   <a:t>)</a:t>
                 </a:r>
               </a:p>
@@ -18896,29 +20249,29 @@
                   </m:oMath>
                 </a14:m>
                 <a:r>
-                  <a:rPr lang="en-US" dirty="0" smtClean="0"/>
+                  <a:rPr lang="en-US" dirty="0"/>
                   <a:t>  is unique!</a:t>
                 </a:r>
               </a:p>
               <a:p>
                 <a:r>
-                  <a:rPr lang="en-US" dirty="0" smtClean="0"/>
+                  <a:rPr lang="en-US" dirty="0"/>
                   <a:t>Illumination is a function of </a:t>
                 </a:r>
                 <a:br>
-                  <a:rPr lang="en-US" dirty="0" smtClean="0"/>
+                  <a:rPr lang="en-US" dirty="0"/>
                 </a:br>
                 <a:r>
-                  <a:rPr lang="en-US" dirty="0" smtClean="0"/>
+                  <a:rPr lang="en-US" dirty="0"/>
                   <a:t>relative position to lights!</a:t>
                 </a:r>
-                <a:endParaRPr lang="en-US" dirty="0" smtClean="0">
+                <a:endParaRPr lang="en-US" dirty="0">
                   <a:hlinkClick r:id="rId2" action="ppaction://hlinkfile"/>
                 </a:endParaRPr>
               </a:p>
               <a:p>
                 <a:r>
-                  <a:rPr lang="en-US" dirty="0" smtClean="0">
+                  <a:rPr lang="en-US" dirty="0">
                     <a:hlinkClick r:id="rId2" action="ppaction://hlinkfile"/>
                   </a:rPr>
                   <a:t>Maya Scene</a:t>
@@ -19380,7 +20733,7 @@
                 <a:lstStyle/>
                 <a:p>
                   <a:r>
-                    <a:rPr lang="en-US" sz="1600" dirty="0" smtClean="0">
+                    <a:rPr lang="en-US" sz="1600" dirty="0">
                       <a:solidFill>
                         <a:schemeClr val="tx1"/>
                       </a:solidFill>
@@ -19441,18 +20794,13 @@
                     </m:oMath>
                   </a14:m>
                   <a:r>
-                    <a:rPr lang="en-US" sz="1600" dirty="0" smtClean="0">
+                    <a:rPr lang="en-US" sz="1600" dirty="0">
                       <a:solidFill>
                         <a:schemeClr val="tx1"/>
                       </a:solidFill>
                     </a:rPr>
                     <a:t> vector for each visible point</a:t>
                   </a:r>
-                  <a:endParaRPr lang="en-US" sz="1600" dirty="0">
-                    <a:solidFill>
-                      <a:schemeClr val="tx1"/>
-                    </a:solidFill>
-                  </a:endParaRPr>
                 </a:p>
               </p:txBody>
             </p:sp>
@@ -19692,7 +21040,7 @@
             <a:lstStyle/>
             <a:p>
               <a:r>
-                <a:rPr lang="en-US" sz="1600" dirty="0" smtClean="0">
+                <a:rPr lang="en-US" sz="1600" dirty="0">
                   <a:solidFill>
                     <a:schemeClr val="bg1"/>
                   </a:solidFill>
@@ -20013,7 +21361,7 @@
             <a:lstStyle/>
             <a:p>
               <a:r>
-                <a:rPr lang="en-US" sz="1600" dirty="0" smtClean="0">
+                <a:rPr lang="en-US" sz="1600" dirty="0">
                   <a:solidFill>
                     <a:schemeClr val="tx1"/>
                   </a:solidFill>
@@ -20108,13 +21456,6 @@
   <p:clrMapOvr>
     <a:masterClrMapping/>
   </p:clrMapOvr>
-  <p:timing>
-    <p:tnLst>
-      <p:par>
-        <p:cTn id="1" dur="indefinite" restart="never" nodeType="tmRoot"/>
-      </p:par>
-    </p:tnLst>
-  </p:timing>
 </p:sld>
 </file>
 
@@ -20151,10 +21492,9 @@
           <a:lstStyle/>
           <a:p>
             <a:r>
-              <a:rPr lang="en-US" dirty="0" smtClean="0"/>
+              <a:rPr lang="en-US" dirty="0"/>
               <a:t>Now, my desk lamp</a:t>
             </a:r>
-            <a:endParaRPr lang="en-US" dirty="0"/>
           </a:p>
         </p:txBody>
       </p:sp>
@@ -20386,18 +21726,13 @@
               <a:buNone/>
             </a:pPr>
             <a:r>
-              <a:rPr lang="en-US" dirty="0" smtClean="0">
+              <a:rPr lang="en-US" dirty="0">
                 <a:solidFill>
                   <a:schemeClr val="bg1"/>
                 </a:solidFill>
               </a:rPr>
               <a:t>http://0.tqn.com/d/drawsketch/1/0/N/J/eggsetup.jpg</a:t>
             </a:r>
-            <a:endParaRPr lang="en-US" dirty="0">
-              <a:solidFill>
-                <a:schemeClr val="bg1"/>
-              </a:solidFill>
-            </a:endParaRPr>
           </a:p>
         </p:txBody>
       </p:sp>
@@ -20638,18 +21973,13 @@
               <a:buNone/>
             </a:pPr>
             <a:r>
-              <a:rPr lang="en-US" dirty="0" smtClean="0">
+              <a:rPr lang="en-US" dirty="0">
                 <a:solidFill>
                   <a:schemeClr val="bg1"/>
                 </a:solidFill>
               </a:rPr>
               <a:t>http://www.mackayphotography.co.uk/light_pollution.htm</a:t>
             </a:r>
-            <a:endParaRPr lang="en-US" dirty="0">
-              <a:solidFill>
-                <a:schemeClr val="bg1"/>
-              </a:solidFill>
-            </a:endParaRPr>
           </a:p>
         </p:txBody>
       </p:sp>
@@ -20813,10 +22143,9 @@
           </a:lstStyle>
           <a:p>
             <a:r>
-              <a:rPr lang="en-US" dirty="0" smtClean="0"/>
+              <a:rPr lang="en-US" dirty="0"/>
               <a:t>How would you describe the light source of these scenes?</a:t>
             </a:r>
-            <a:endParaRPr lang="en-US" dirty="0"/>
           </a:p>
         </p:txBody>
       </p:sp>
@@ -21048,7 +22377,7 @@
               <a:buNone/>
             </a:pPr>
             <a:r>
-              <a:rPr lang="en-US" smtClean="0">
+              <a:rPr lang="en-US">
                 <a:solidFill>
                   <a:schemeClr val="bg1"/>
                 </a:solidFill>
@@ -21154,13 +22483,6 @@
   <p:clrMapOvr>
     <a:masterClrMapping/>
   </p:clrMapOvr>
-  <p:timing>
-    <p:tnLst>
-      <p:par>
-        <p:cTn id="1" dur="indefinite" restart="never" nodeType="tmRoot"/>
-      </p:par>
-    </p:tnLst>
-  </p:timing>
 </p:sld>
 </file>
 
@@ -21197,10 +22519,9 @@
           <a:lstStyle/>
           <a:p>
             <a:r>
-              <a:rPr lang="en-US" dirty="0" smtClean="0"/>
+              <a:rPr lang="en-US" dirty="0"/>
               <a:t>Spot Light</a:t>
             </a:r>
-            <a:endParaRPr lang="en-US" dirty="0"/>
           </a:p>
         </p:txBody>
       </p:sp>
@@ -21227,14 +22548,14 @@
               <a:lstStyle/>
               <a:p>
                 <a:r>
-                  <a:rPr lang="en-US" dirty="0" smtClean="0"/>
+                  <a:rPr lang="en-US" dirty="0"/>
                   <a:t>Direction + Position:</a:t>
                 </a:r>
               </a:p>
               <a:p>
                 <a:pPr lvl="1"/>
                 <a:r>
-                  <a:rPr lang="en-US" dirty="0" smtClean="0"/>
+                  <a:rPr lang="en-US" dirty="0"/>
                   <a:t>Pointing direction</a:t>
                 </a:r>
                 <a14:m>
@@ -21280,24 +22601,24 @@
                     </m:d>
                   </m:oMath>
                 </a14:m>
-                <a:endParaRPr lang="en-US" b="0" dirty="0" smtClean="0">
+                <a:endParaRPr lang="en-US" b="0" dirty="0">
                   <a:ea typeface="Cambria Math"/>
                 </a:endParaRPr>
               </a:p>
               <a:p>
                 <a:pPr lvl="8"/>
-                <a:endParaRPr lang="en-US" dirty="0" smtClean="0">
+                <a:endParaRPr lang="en-US" dirty="0">
                   <a:ea typeface="Cambria Math"/>
                 </a:endParaRPr>
               </a:p>
               <a:p>
                 <a:pPr lvl="1"/>
                 <a:r>
-                  <a:rPr lang="en-US" dirty="0" smtClean="0"/>
+                  <a:rPr lang="en-US" dirty="0"/>
                   <a:t>As in point light, for each visible point</a:t>
                 </a:r>
                 <a:br>
-                  <a:rPr lang="en-US" dirty="0" smtClean="0"/>
+                  <a:rPr lang="en-US" dirty="0"/>
                 </a:br>
                 <a14:m>
                   <m:oMath xmlns:m="http://schemas.openxmlformats.org/officeDocument/2006/math">
@@ -21416,46 +22737,37 @@
                 </a14:m>
                 <a:r>
                   <a:rPr lang="en-US" dirty="0"/>
-                  <a:t>  is unique</a:t>
-                </a:r>
-                <a:r>
-                  <a:rPr lang="en-US" dirty="0" smtClean="0"/>
-                  <a:t>!</a:t>
+                  <a:t>  is unique!</a:t>
                 </a:r>
               </a:p>
               <a:p>
                 <a:pPr lvl="8"/>
-                <a:endParaRPr lang="en-US" dirty="0" smtClean="0"/>
+                <a:endParaRPr lang="en-US" dirty="0"/>
               </a:p>
               <a:p>
                 <a:pPr lvl="1"/>
                 <a:r>
-                  <a:rPr lang="en-US" dirty="0" smtClean="0"/>
+                  <a:rPr lang="en-US" dirty="0"/>
                   <a:t>Cone angle (</a:t>
                 </a:r>
                 <a:r>
-                  <a:rPr lang="el-GR" dirty="0" smtClean="0"/>
+                  <a:rPr lang="el-GR" dirty="0"/>
                   <a:t>θ</a:t>
                 </a:r>
                 <a:r>
                   <a:rPr lang="en-US" dirty="0"/>
-                  <a:t>)</a:t>
+                  <a:t>) defines illumination range</a:t>
                 </a:r>
-                <a:r>
-                  <a:rPr lang="en-US" dirty="0" smtClean="0"/>
-                  <a:t> defines illumination range</a:t>
-                </a:r>
-                <a:endParaRPr lang="en-US" dirty="0"/>
               </a:p>
               <a:p>
                 <a:pPr lvl="1"/>
-                <a:endParaRPr lang="en-US" dirty="0" smtClean="0"/>
+                <a:endParaRPr lang="en-US" dirty="0"/>
               </a:p>
               <a:p>
                 <a:pPr marL="3657600" lvl="8" indent="0">
                   <a:buNone/>
                 </a:pPr>
-                <a:endParaRPr lang="en-US" dirty="0" smtClean="0"/>
+                <a:endParaRPr lang="en-US" dirty="0"/>
               </a:p>
             </p:txBody>
           </p:sp>
@@ -22094,7 +23406,7 @@
                 <a:lstStyle/>
                 <a:p>
                   <a:r>
-                    <a:rPr lang="en-US" sz="1600" dirty="0" smtClean="0">
+                    <a:rPr lang="en-US" sz="1600" dirty="0">
                       <a:solidFill>
                         <a:schemeClr val="tx1"/>
                       </a:solidFill>
@@ -22155,18 +23467,13 @@
                     </m:oMath>
                   </a14:m>
                   <a:r>
-                    <a:rPr lang="en-US" sz="1600" dirty="0" smtClean="0">
+                    <a:rPr lang="en-US" sz="1600" dirty="0">
                       <a:solidFill>
                         <a:schemeClr val="tx1"/>
                       </a:solidFill>
                     </a:rPr>
                     <a:t> vector for each visible point</a:t>
                   </a:r>
-                  <a:endParaRPr lang="en-US" sz="1600" dirty="0">
-                    <a:solidFill>
-                      <a:schemeClr val="tx1"/>
-                    </a:solidFill>
-                  </a:endParaRPr>
                 </a:p>
               </p:txBody>
             </p:sp>
@@ -22623,7 +23930,7 @@
             <a:lstStyle/>
             <a:p>
               <a:r>
-                <a:rPr lang="el-GR" sz="2000" dirty="0" smtClean="0">
+                <a:rPr lang="el-GR" sz="2000" dirty="0">
                   <a:solidFill>
                     <a:schemeClr val="tx1"/>
                   </a:solidFill>
@@ -22723,13 +24030,6 @@
   <p:clrMapOvr>
     <a:masterClrMapping/>
   </p:clrMapOvr>
-  <p:timing>
-    <p:tnLst>
-      <p:par>
-        <p:cTn id="1" dur="indefinite" restart="never" nodeType="tmRoot"/>
-      </p:par>
-    </p:tnLst>
-  </p:timing>
 </p:sld>
 </file>
 

--- a/LectureNotes/M2-Phong-Slides/2-3.LightSources.pptx
+++ b/LectureNotes/M2-Phong-Slides/2-3.LightSources.pptx
@@ -140,6 +140,14 @@
     </p:ext>
   </p:extLst>
 </p:presentation>
+</file>
+
+<file path=ppt/revisionInfo.xml><?xml version="1.0" encoding="utf-8"?>
+<p1510:revInfo xmlns:a="http://schemas.openxmlformats.org/drawingml/2006/main" xmlns:r="http://schemas.openxmlformats.org/officeDocument/2006/relationships" xmlns:p1510="http://schemas.microsoft.com/office/powerpoint/2015/10/main">
+  <p1510:revLst>
+    <p1510:client id="{C0D957F8-52D8-462D-B8CB-1518195A005A}" v="2" dt="2026-01-27T23:48:19.993"/>
+  </p1510:revLst>
+</p1510:revInfo>
 </file>
 
 <file path=ppt/slideLayouts/slideLayout1.xml><?xml version="1.0" encoding="utf-8"?>
@@ -11836,8 +11844,8 @@
           </a:p>
         </p:txBody>
       </p:sp>
-      <mc:AlternateContent xmlns:mc="http://schemas.openxmlformats.org/markup-compatibility/2006">
-        <mc:Choice xmlns:a14="http://schemas.microsoft.com/office/drawing/2010/main" Requires="a14">
+      <mc:AlternateContent xmlns:mc="http://schemas.openxmlformats.org/markup-compatibility/2006" xmlns:a14="http://schemas.microsoft.com/office/drawing/2010/main">
+        <mc:Choice Requires="a14">
           <p:sp>
             <p:nvSpPr>
               <p:cNvPr id="3" name="Content Placeholder 2"/>
@@ -11972,7 +11980,7 @@
             </p:txBody>
           </p:sp>
         </mc:Choice>
-        <mc:Fallback>
+        <mc:Fallback xmlns="">
           <p:sp>
             <p:nvSpPr>
               <p:cNvPr id="3" name="Content Placeholder 2"/>
@@ -13476,8 +13484,8 @@
           </a:p>
         </p:txBody>
       </p:sp>
-      <mc:AlternateContent xmlns:mc="http://schemas.openxmlformats.org/markup-compatibility/2006">
-        <mc:Choice xmlns:a14="http://schemas.microsoft.com/office/drawing/2010/main" Requires="a14">
+      <mc:AlternateContent xmlns:mc="http://schemas.openxmlformats.org/markup-compatibility/2006" xmlns:a14="http://schemas.microsoft.com/office/drawing/2010/main">
+        <mc:Choice Requires="a14">
           <p:sp>
             <p:nvSpPr>
               <p:cNvPr id="3" name="Content Placeholder 2">
@@ -13803,7 +13811,7 @@
             </p:txBody>
           </p:sp>
         </mc:Choice>
-        <mc:Fallback>
+        <mc:Fallback xmlns="">
           <p:sp>
             <p:nvSpPr>
               <p:cNvPr id="3" name="Content Placeholder 2">
@@ -13993,8 +14001,8 @@
           </a:prstGeom>
         </p:spPr>
       </p:pic>
-      <mc:AlternateContent xmlns:mc="http://schemas.openxmlformats.org/markup-compatibility/2006">
-        <mc:Choice xmlns:a14="http://schemas.microsoft.com/office/drawing/2010/main" Requires="a14">
+      <mc:AlternateContent xmlns:mc="http://schemas.openxmlformats.org/markup-compatibility/2006" xmlns:a14="http://schemas.microsoft.com/office/drawing/2010/main">
+        <mc:Choice Requires="a14">
           <p:sp>
             <p:nvSpPr>
               <p:cNvPr id="11" name="TextBox 10">
@@ -14114,7 +14122,7 @@
             </p:txBody>
           </p:sp>
         </mc:Choice>
-        <mc:Fallback>
+        <mc:Fallback xmlns="">
           <p:sp>
             <p:nvSpPr>
               <p:cNvPr id="11" name="TextBox 10">
@@ -14159,8 +14167,8 @@
           </p:sp>
         </mc:Fallback>
       </mc:AlternateContent>
-      <mc:AlternateContent xmlns:mc="http://schemas.openxmlformats.org/markup-compatibility/2006">
-        <mc:Choice xmlns:a14="http://schemas.microsoft.com/office/drawing/2010/main" Requires="a14">
+      <mc:AlternateContent xmlns:mc="http://schemas.openxmlformats.org/markup-compatibility/2006" xmlns:a14="http://schemas.microsoft.com/office/drawing/2010/main">
+        <mc:Choice Requires="a14">
           <p:sp>
             <p:nvSpPr>
               <p:cNvPr id="12" name="TextBox 11">
@@ -14262,7 +14270,7 @@
             </p:txBody>
           </p:sp>
         </mc:Choice>
-        <mc:Fallback>
+        <mc:Fallback xmlns="">
           <p:sp>
             <p:nvSpPr>
               <p:cNvPr id="12" name="TextBox 11">
@@ -15610,21 +15618,22 @@
           <a:p>
             <a:r>
               <a:rPr lang="en-US" dirty="0"/>
-              <a:t>General form of </a:t>
+              <a:t>Our MP5 Phong</a:t>
             </a:r>
-            <a:r>
-              <a:rPr lang="en-US" dirty="0" err="1"/>
-              <a:t>Phong</a:t>
-            </a:r>
-            <a:endParaRPr lang="en-US" dirty="0"/>
           </a:p>
         </p:txBody>
       </p:sp>
-      <mc:AlternateContent xmlns:mc="http://schemas.openxmlformats.org/markup-compatibility/2006" xmlns:a14="http://schemas.microsoft.com/office/drawing/2010/main">
-        <mc:Choice Requires="a14">
+      <mc:AlternateContent xmlns:mc="http://schemas.openxmlformats.org/markup-compatibility/2006">
+        <mc:Choice xmlns:a14="http://schemas.microsoft.com/office/drawing/2010/main" Requires="a14">
           <p:sp>
             <p:nvSpPr>
-              <p:cNvPr id="3" name="Content Placeholder 2"/>
+              <p:cNvPr id="6" name="Content Placeholder 5">
+                <a:extLst>
+                  <a:ext uri="{FF2B5EF4-FFF2-40B4-BE49-F238E27FC236}">
+                    <a16:creationId xmlns:a16="http://schemas.microsoft.com/office/drawing/2014/main" id="{F2931529-77F1-A42E-4108-A89118CD14A2}"/>
+                  </a:ext>
+                </a:extLst>
+              </p:cNvPr>
               <p:cNvSpPr>
                 <a:spLocks noGrp="1"/>
               </p:cNvSpPr>
@@ -15632,1216 +15641,12 @@
                 <p:ph idx="1"/>
               </p:nvPr>
             </p:nvSpPr>
-            <p:spPr>
-              <a:xfrm>
-                <a:off x="420610" y="1721824"/>
-                <a:ext cx="8551449" cy="992937"/>
-              </a:xfrm>
-            </p:spPr>
+            <p:spPr/>
             <p:txBody>
               <a:bodyPr>
-                <a:normAutofit fontScale="40000" lnSpcReduction="20000"/>
+                <a:normAutofit fontScale="55000" lnSpcReduction="20000"/>
               </a:bodyPr>
               <a:lstStyle/>
-              <a:p>
-                <a:pPr marL="0" indent="0">
-                  <a:buNone/>
-                </a:pPr>
-                <a14:m>
-                  <m:oMathPara xmlns:m="http://schemas.openxmlformats.org/officeDocument/2006/math">
-                    <m:oMathParaPr>
-                      <m:jc m:val="center"/>
-                    </m:oMathParaPr>
-                    <m:oMath xmlns:m="http://schemas.openxmlformats.org/officeDocument/2006/math">
-                      <m:r>
-                        <a:rPr lang="en-US" i="1" smtClean="0">
-                          <a:latin typeface="Cambria Math"/>
-                        </a:rPr>
-                        <m:t>𝐼</m:t>
-                      </m:r>
-                      <m:r>
-                        <a:rPr lang="en-US" i="1" smtClean="0">
-                          <a:latin typeface="Cambria Math"/>
-                        </a:rPr>
-                        <m:t>=</m:t>
-                      </m:r>
-                      <m:nary>
-                        <m:naryPr>
-                          <m:chr m:val="∑"/>
-                          <m:ctrlPr>
-                            <a:rPr lang="en-US" i="1" smtClean="0">
-                              <a:latin typeface="Cambria Math" panose="02040503050406030204" pitchFamily="18" charset="0"/>
-                            </a:rPr>
-                          </m:ctrlPr>
-                        </m:naryPr>
-                        <m:sub>
-                          <m:r>
-                            <m:rPr>
-                              <m:brk m:alnAt="23"/>
-                            </m:rPr>
-                            <a:rPr lang="en-US" b="0" i="1" smtClean="0">
-                              <a:latin typeface="Cambria Math"/>
-                            </a:rPr>
-                            <m:t>𝑖</m:t>
-                          </m:r>
-                        </m:sub>
-                        <m:sup>
-                          <m:r>
-                            <a:rPr lang="en-US" b="0" i="1" smtClean="0">
-                              <a:latin typeface="Cambria Math"/>
-                            </a:rPr>
-                            <m:t>𝐴𝑙𝑙</m:t>
-                          </m:r>
-                          <m:r>
-                            <a:rPr lang="en-US" b="0" i="1" smtClean="0">
-                              <a:latin typeface="Cambria Math"/>
-                            </a:rPr>
-                            <m:t> </m:t>
-                          </m:r>
-                          <m:r>
-                            <a:rPr lang="en-US" b="0" i="1" smtClean="0">
-                              <a:latin typeface="Cambria Math"/>
-                            </a:rPr>
-                            <m:t>𝐿𝑖𝑔h𝑡𝑠</m:t>
-                          </m:r>
-                        </m:sup>
-                        <m:e>
-                          <m:sSub>
-                            <m:sSubPr>
-                              <m:ctrlPr>
-                                <a:rPr lang="en-US" i="1" smtClean="0">
-                                  <a:latin typeface="Cambria Math" panose="02040503050406030204" pitchFamily="18" charset="0"/>
-                                </a:rPr>
-                              </m:ctrlPr>
-                            </m:sSubPr>
-                            <m:e>
-                              <m:r>
-                                <a:rPr lang="en-US" b="0" i="1" smtClean="0">
-                                  <a:latin typeface="Cambria Math"/>
-                                </a:rPr>
-                                <m:t>𝑘</m:t>
-                              </m:r>
-                            </m:e>
-                            <m:sub>
-                              <m:r>
-                                <a:rPr lang="en-US" i="1">
-                                  <a:latin typeface="Cambria Math"/>
-                                </a:rPr>
-                                <m:t>𝑎</m:t>
-                              </m:r>
-                            </m:sub>
-                          </m:sSub>
-                          <m:sSub>
-                            <m:sSubPr>
-                              <m:ctrlPr>
-                                <a:rPr lang="en-US" i="1">
-                                  <a:latin typeface="Cambria Math" panose="02040503050406030204" pitchFamily="18" charset="0"/>
-                                </a:rPr>
-                              </m:ctrlPr>
-                            </m:sSubPr>
-                            <m:e>
-                              <m:r>
-                                <a:rPr lang="en-US" i="1">
-                                  <a:latin typeface="Cambria Math"/>
-                                </a:rPr>
-                                <m:t>𝐿</m:t>
-                              </m:r>
-                            </m:e>
-                            <m:sub>
-                              <m:r>
-                                <a:rPr lang="en-US" i="1">
-                                  <a:latin typeface="Cambria Math"/>
-                                </a:rPr>
-                                <m:t>𝑎</m:t>
-                              </m:r>
-                              <m:r>
-                                <a:rPr lang="en-US" b="0" i="1" smtClean="0">
-                                  <a:latin typeface="Cambria Math"/>
-                                </a:rPr>
-                                <m:t>𝑖</m:t>
-                              </m:r>
-                            </m:sub>
-                          </m:sSub>
-                          <m:r>
-                            <a:rPr lang="en-US" i="1">
-                              <a:latin typeface="Cambria Math"/>
-                              <a:ea typeface="Cambria Math"/>
-                            </a:rPr>
-                            <m:t>+</m:t>
-                          </m:r>
-                          <m:sSub>
-                            <m:sSubPr>
-                              <m:ctrlPr>
-                                <a:rPr lang="en-US" i="1">
-                                  <a:latin typeface="Cambria Math" panose="02040503050406030204" pitchFamily="18" charset="0"/>
-                                </a:rPr>
-                              </m:ctrlPr>
-                            </m:sSubPr>
-                            <m:e>
-                              <m:f>
-                                <m:fPr>
-                                  <m:ctrlPr>
-                                    <a:rPr lang="en-US" i="1" smtClean="0">
-                                      <a:latin typeface="Cambria Math" panose="02040503050406030204" pitchFamily="18" charset="0"/>
-                                    </a:rPr>
-                                  </m:ctrlPr>
-                                </m:fPr>
-                                <m:num>
-                                  <m:sSub>
-                                    <m:sSubPr>
-                                      <m:ctrlPr>
-                                        <a:rPr lang="en-US" i="1">
-                                          <a:latin typeface="Cambria Math" panose="02040503050406030204" pitchFamily="18" charset="0"/>
-                                        </a:rPr>
-                                      </m:ctrlPr>
-                                    </m:sSubPr>
-                                    <m:e>
-                                      <m:r>
-                                        <a:rPr lang="en-US" i="1">
-                                          <a:latin typeface="Cambria Math"/>
-                                        </a:rPr>
-                                        <m:t>𝐿</m:t>
-                                      </m:r>
-                                    </m:e>
-                                    <m:sub>
-                                      <m:r>
-                                        <a:rPr lang="en-US" i="1">
-                                          <a:latin typeface="Cambria Math"/>
-                                        </a:rPr>
-                                        <m:t>𝑑𝑖</m:t>
-                                      </m:r>
-                                    </m:sub>
-                                  </m:sSub>
-                                </m:num>
-                                <m:den>
-                                  <m:sSubSup>
-                                    <m:sSubSupPr>
-                                      <m:ctrlPr>
-                                        <a:rPr lang="en-US" i="1">
-                                          <a:latin typeface="Cambria Math" panose="02040503050406030204" pitchFamily="18" charset="0"/>
-                                          <a:ea typeface="Cambria Math"/>
-                                        </a:rPr>
-                                      </m:ctrlPr>
-                                    </m:sSubSupPr>
-                                    <m:e>
-                                      <m:r>
-                                        <a:rPr lang="en-US" i="1">
-                                          <a:latin typeface="Cambria Math"/>
-                                          <a:ea typeface="Cambria Math"/>
-                                        </a:rPr>
-                                        <m:t>𝐶</m:t>
-                                      </m:r>
-                                    </m:e>
-                                    <m:sub>
-                                      <m:r>
-                                        <a:rPr lang="en-US" i="1">
-                                          <a:latin typeface="Cambria Math"/>
-                                          <a:ea typeface="Cambria Math"/>
-                                        </a:rPr>
-                                        <m:t>0</m:t>
-                                      </m:r>
-                                    </m:sub>
-                                    <m:sup/>
-                                  </m:sSubSup>
-                                  <m:r>
-                                    <a:rPr lang="en-US" i="1">
-                                      <a:latin typeface="Cambria Math"/>
-                                      <a:ea typeface="Cambria Math"/>
-                                    </a:rPr>
-                                    <m:t>+</m:t>
-                                  </m:r>
-                                  <m:sSubSup>
-                                    <m:sSubSupPr>
-                                      <m:ctrlPr>
-                                        <a:rPr lang="en-US" i="1">
-                                          <a:latin typeface="Cambria Math" panose="02040503050406030204" pitchFamily="18" charset="0"/>
-                                          <a:ea typeface="Cambria Math"/>
-                                        </a:rPr>
-                                      </m:ctrlPr>
-                                    </m:sSubSupPr>
-                                    <m:e>
-                                      <m:r>
-                                        <a:rPr lang="en-US" i="1">
-                                          <a:latin typeface="Cambria Math"/>
-                                          <a:ea typeface="Cambria Math"/>
-                                        </a:rPr>
-                                        <m:t>𝐶</m:t>
-                                      </m:r>
-                                    </m:e>
-                                    <m:sub>
-                                      <m:r>
-                                        <a:rPr lang="en-US" i="1">
-                                          <a:latin typeface="Cambria Math"/>
-                                        </a:rPr>
-                                        <m:t>1</m:t>
-                                      </m:r>
-                                    </m:sub>
-                                    <m:sup/>
-                                  </m:sSubSup>
-                                  <m:sSubSup>
-                                    <m:sSubSupPr>
-                                      <m:ctrlPr>
-                                        <a:rPr lang="en-US" i="1">
-                                          <a:latin typeface="Cambria Math" panose="02040503050406030204" pitchFamily="18" charset="0"/>
-                                          <a:ea typeface="Cambria Math"/>
-                                        </a:rPr>
-                                      </m:ctrlPr>
-                                    </m:sSubSupPr>
-                                    <m:e>
-                                      <m:r>
-                                        <a:rPr lang="en-US" b="0" i="1" smtClean="0">
-                                          <a:latin typeface="Cambria Math"/>
-                                          <a:ea typeface="Cambria Math"/>
-                                        </a:rPr>
-                                        <m:t>𝑑</m:t>
-                                      </m:r>
-                                    </m:e>
-                                    <m:sub>
-                                      <m:r>
-                                        <a:rPr lang="en-US" b="0" i="1" smtClean="0">
-                                          <a:latin typeface="Cambria Math"/>
-                                          <a:ea typeface="Cambria Math"/>
-                                        </a:rPr>
-                                        <m:t>𝑖</m:t>
-                                      </m:r>
-                                    </m:sub>
-                                    <m:sup/>
-                                  </m:sSubSup>
-                                  <m:sSup>
-                                    <m:sSupPr>
-                                      <m:ctrlPr>
-                                        <a:rPr lang="en-US" i="1">
-                                          <a:latin typeface="Cambria Math" panose="02040503050406030204" pitchFamily="18" charset="0"/>
-                                          <a:ea typeface="Cambria Math"/>
-                                        </a:rPr>
-                                      </m:ctrlPr>
-                                    </m:sSupPr>
-                                    <m:e>
-                                      <m:r>
-                                        <a:rPr lang="en-US" i="1">
-                                          <a:latin typeface="Cambria Math"/>
-                                          <a:ea typeface="Cambria Math"/>
-                                        </a:rPr>
-                                        <m:t>+</m:t>
-                                      </m:r>
-                                      <m:sSubSup>
-                                        <m:sSubSupPr>
-                                          <m:ctrlPr>
-                                            <a:rPr lang="en-US" i="1">
-                                              <a:latin typeface="Cambria Math" panose="02040503050406030204" pitchFamily="18" charset="0"/>
-                                              <a:ea typeface="Cambria Math"/>
-                                            </a:rPr>
-                                          </m:ctrlPr>
-                                        </m:sSubSupPr>
-                                        <m:e>
-                                          <m:r>
-                                            <a:rPr lang="en-US" i="1">
-                                              <a:latin typeface="Cambria Math"/>
-                                              <a:ea typeface="Cambria Math"/>
-                                            </a:rPr>
-                                            <m:t>𝐶</m:t>
-                                          </m:r>
-                                        </m:e>
-                                        <m:sub>
-                                          <m:r>
-                                            <a:rPr lang="en-US" i="1">
-                                              <a:latin typeface="Cambria Math"/>
-                                              <a:ea typeface="Cambria Math"/>
-                                            </a:rPr>
-                                            <m:t>2</m:t>
-                                          </m:r>
-                                        </m:sub>
-                                        <m:sup/>
-                                      </m:sSubSup>
-                                      <m:sSubSup>
-                                        <m:sSubSupPr>
-                                          <m:ctrlPr>
-                                            <a:rPr lang="en-US" i="1">
-                                              <a:latin typeface="Cambria Math" panose="02040503050406030204" pitchFamily="18" charset="0"/>
-                                              <a:ea typeface="Cambria Math"/>
-                                            </a:rPr>
-                                          </m:ctrlPr>
-                                        </m:sSubSupPr>
-                                        <m:e>
-                                          <m:r>
-                                            <a:rPr lang="en-US" i="1">
-                                              <a:latin typeface="Cambria Math"/>
-                                              <a:ea typeface="Cambria Math"/>
-                                            </a:rPr>
-                                            <m:t>𝑑</m:t>
-                                          </m:r>
-                                        </m:e>
-                                        <m:sub>
-                                          <m:r>
-                                            <a:rPr lang="en-US" i="1">
-                                              <a:latin typeface="Cambria Math"/>
-                                              <a:ea typeface="Cambria Math"/>
-                                            </a:rPr>
-                                            <m:t>𝑖</m:t>
-                                          </m:r>
-                                        </m:sub>
-                                        <m:sup/>
-                                      </m:sSubSup>
-                                    </m:e>
-                                    <m:sup>
-                                      <m:r>
-                                        <a:rPr lang="en-US" b="0" i="1" smtClean="0">
-                                          <a:latin typeface="Cambria Math"/>
-                                          <a:ea typeface="Cambria Math"/>
-                                        </a:rPr>
-                                        <m:t>2</m:t>
-                                      </m:r>
-                                    </m:sup>
-                                  </m:sSup>
-                                  <m:r>
-                                    <a:rPr lang="en-US" i="1">
-                                      <a:latin typeface="Cambria Math"/>
-                                      <a:ea typeface="Cambria Math"/>
-                                    </a:rPr>
-                                    <m:t>+</m:t>
-                                  </m:r>
-                                  <m:sSubSup>
-                                    <m:sSubSupPr>
-                                      <m:ctrlPr>
-                                        <a:rPr lang="en-US" i="1">
-                                          <a:latin typeface="Cambria Math" panose="02040503050406030204" pitchFamily="18" charset="0"/>
-                                          <a:ea typeface="Cambria Math"/>
-                                        </a:rPr>
-                                      </m:ctrlPr>
-                                    </m:sSubSupPr>
-                                    <m:e>
-                                      <m:r>
-                                        <a:rPr lang="en-US" i="1">
-                                          <a:latin typeface="Cambria Math"/>
-                                          <a:ea typeface="Cambria Math"/>
-                                        </a:rPr>
-                                        <m:t>𝐶</m:t>
-                                      </m:r>
-                                    </m:e>
-                                    <m:sub>
-                                      <m:r>
-                                        <a:rPr lang="en-US" i="1">
-                                          <a:latin typeface="Cambria Math"/>
-                                          <a:ea typeface="Cambria Math"/>
-                                        </a:rPr>
-                                        <m:t>3</m:t>
-                                      </m:r>
-                                    </m:sub>
-                                    <m:sup/>
-                                  </m:sSubSup>
-                                  <m:sSup>
-                                    <m:sSupPr>
-                                      <m:ctrlPr>
-                                        <a:rPr lang="en-US" i="1">
-                                          <a:latin typeface="Cambria Math" panose="02040503050406030204" pitchFamily="18" charset="0"/>
-                                          <a:ea typeface="Cambria Math"/>
-                                        </a:rPr>
-                                      </m:ctrlPr>
-                                    </m:sSupPr>
-                                    <m:e>
-                                      <m:sSubSup>
-                                        <m:sSubSupPr>
-                                          <m:ctrlPr>
-                                            <a:rPr lang="en-US" i="1">
-                                              <a:latin typeface="Cambria Math" panose="02040503050406030204" pitchFamily="18" charset="0"/>
-                                              <a:ea typeface="Cambria Math"/>
-                                            </a:rPr>
-                                          </m:ctrlPr>
-                                        </m:sSubSupPr>
-                                        <m:e>
-                                          <m:r>
-                                            <a:rPr lang="en-US" i="1">
-                                              <a:latin typeface="Cambria Math"/>
-                                              <a:ea typeface="Cambria Math"/>
-                                            </a:rPr>
-                                            <m:t>𝑑</m:t>
-                                          </m:r>
-                                        </m:e>
-                                        <m:sub>
-                                          <m:r>
-                                            <a:rPr lang="en-US" i="1">
-                                              <a:latin typeface="Cambria Math"/>
-                                              <a:ea typeface="Cambria Math"/>
-                                            </a:rPr>
-                                            <m:t>𝑖</m:t>
-                                          </m:r>
-                                        </m:sub>
-                                        <m:sup/>
-                                      </m:sSubSup>
-                                    </m:e>
-                                    <m:sup>
-                                      <m:r>
-                                        <a:rPr lang="en-US" i="1">
-                                          <a:latin typeface="Cambria Math"/>
-                                          <a:ea typeface="Cambria Math"/>
-                                        </a:rPr>
-                                        <m:t>3</m:t>
-                                      </m:r>
-                                    </m:sup>
-                                  </m:sSup>
-                                </m:den>
-                              </m:f>
-                              <m:r>
-                                <a:rPr lang="en-US" i="1">
-                                  <a:latin typeface="Cambria Math"/>
-                                </a:rPr>
-                                <m:t>𝑘</m:t>
-                              </m:r>
-                            </m:e>
-                            <m:sub>
-                              <m:r>
-                                <a:rPr lang="en-US" i="1">
-                                  <a:latin typeface="Cambria Math"/>
-                                </a:rPr>
-                                <m:t>𝑑</m:t>
-                              </m:r>
-                            </m:sub>
-                          </m:sSub>
-                          <m:d>
-                            <m:dPr>
-                              <m:ctrlPr>
-                                <a:rPr lang="en-US" i="1">
-                                  <a:latin typeface="Cambria Math" panose="02040503050406030204" pitchFamily="18" charset="0"/>
-                                  <a:ea typeface="Cambria Math"/>
-                                </a:rPr>
-                              </m:ctrlPr>
-                            </m:dPr>
-                            <m:e>
-                              <m:acc>
-                                <m:accPr>
-                                  <m:chr m:val="̂"/>
-                                  <m:ctrlPr>
-                                    <a:rPr lang="en-US" i="1">
-                                      <a:latin typeface="Cambria Math" panose="02040503050406030204" pitchFamily="18" charset="0"/>
-                                      <a:ea typeface="Cambria Math"/>
-                                    </a:rPr>
-                                  </m:ctrlPr>
-                                </m:accPr>
-                                <m:e>
-                                  <m:r>
-                                    <a:rPr lang="en-US" i="1">
-                                      <a:latin typeface="Cambria Math"/>
-                                      <a:ea typeface="Cambria Math"/>
-                                    </a:rPr>
-                                    <m:t>𝑁</m:t>
-                                  </m:r>
-                                </m:e>
-                              </m:acc>
-                              <m:r>
-                                <a:rPr lang="en-US" i="1">
-                                  <a:latin typeface="Cambria Math"/>
-                                  <a:ea typeface="Cambria Math"/>
-                                </a:rPr>
-                                <m:t>∙</m:t>
-                              </m:r>
-                              <m:acc>
-                                <m:accPr>
-                                  <m:chr m:val="̂"/>
-                                  <m:ctrlPr>
-                                    <a:rPr lang="en-US" i="1">
-                                      <a:latin typeface="Cambria Math" panose="02040503050406030204" pitchFamily="18" charset="0"/>
-                                      <a:ea typeface="Cambria Math"/>
-                                    </a:rPr>
-                                  </m:ctrlPr>
-                                </m:accPr>
-                                <m:e>
-                                  <m:sSub>
-                                    <m:sSubPr>
-                                      <m:ctrlPr>
-                                        <a:rPr lang="en-US" i="1">
-                                          <a:latin typeface="Cambria Math" panose="02040503050406030204" pitchFamily="18" charset="0"/>
-                                        </a:rPr>
-                                      </m:ctrlPr>
-                                    </m:sSubPr>
-                                    <m:e>
-                                      <m:r>
-                                        <a:rPr lang="en-US" i="1">
-                                          <a:latin typeface="Cambria Math"/>
-                                        </a:rPr>
-                                        <m:t>𝐿</m:t>
-                                      </m:r>
-                                    </m:e>
-                                    <m:sub>
-                                      <m:r>
-                                        <a:rPr lang="en-US" i="1">
-                                          <a:latin typeface="Cambria Math"/>
-                                        </a:rPr>
-                                        <m:t>𝑖</m:t>
-                                      </m:r>
-                                    </m:sub>
-                                  </m:sSub>
-                                </m:e>
-                              </m:acc>
-                            </m:e>
-                          </m:d>
-                          <m:r>
-                            <a:rPr lang="en-US">
-                              <a:latin typeface="Cambria Math"/>
-                              <a:ea typeface="Cambria Math"/>
-                            </a:rPr>
-                            <m:t>+</m:t>
-                          </m:r>
-                          <m:f>
-                            <m:fPr>
-                              <m:ctrlPr>
-                                <a:rPr lang="en-US" i="1" smtClean="0">
-                                  <a:latin typeface="Cambria Math" panose="02040503050406030204" pitchFamily="18" charset="0"/>
-                                  <a:ea typeface="Cambria Math"/>
-                                </a:rPr>
-                              </m:ctrlPr>
-                            </m:fPr>
-                            <m:num>
-                              <m:sSub>
-                                <m:sSubPr>
-                                  <m:ctrlPr>
-                                    <a:rPr lang="en-US" i="1">
-                                      <a:latin typeface="Cambria Math" panose="02040503050406030204" pitchFamily="18" charset="0"/>
-                                    </a:rPr>
-                                  </m:ctrlPr>
-                                </m:sSubPr>
-                                <m:e>
-                                  <m:r>
-                                    <a:rPr lang="en-US" i="1">
-                                      <a:latin typeface="Cambria Math"/>
-                                    </a:rPr>
-                                    <m:t>𝐿</m:t>
-                                  </m:r>
-                                </m:e>
-                                <m:sub>
-                                  <m:r>
-                                    <a:rPr lang="en-US" i="1">
-                                      <a:latin typeface="Cambria Math"/>
-                                    </a:rPr>
-                                    <m:t>𝑠𝑖</m:t>
-                                  </m:r>
-                                </m:sub>
-                              </m:sSub>
-                            </m:num>
-                            <m:den>
-                              <m:sSubSup>
-                                <m:sSubSupPr>
-                                  <m:ctrlPr>
-                                    <a:rPr lang="en-US" i="1">
-                                      <a:latin typeface="Cambria Math" panose="02040503050406030204" pitchFamily="18" charset="0"/>
-                                      <a:ea typeface="Cambria Math"/>
-                                    </a:rPr>
-                                  </m:ctrlPr>
-                                </m:sSubSupPr>
-                                <m:e>
-                                  <m:r>
-                                    <a:rPr lang="en-US" i="1">
-                                      <a:latin typeface="Cambria Math"/>
-                                      <a:ea typeface="Cambria Math"/>
-                                    </a:rPr>
-                                    <m:t>𝐶</m:t>
-                                  </m:r>
-                                </m:e>
-                                <m:sub>
-                                  <m:r>
-                                    <a:rPr lang="en-US" i="1">
-                                      <a:latin typeface="Cambria Math"/>
-                                      <a:ea typeface="Cambria Math"/>
-                                    </a:rPr>
-                                    <m:t>0</m:t>
-                                  </m:r>
-                                </m:sub>
-                                <m:sup/>
-                              </m:sSubSup>
-                              <m:r>
-                                <a:rPr lang="en-US" i="1">
-                                  <a:latin typeface="Cambria Math"/>
-                                  <a:ea typeface="Cambria Math"/>
-                                </a:rPr>
-                                <m:t>+</m:t>
-                              </m:r>
-                              <m:sSubSup>
-                                <m:sSubSupPr>
-                                  <m:ctrlPr>
-                                    <a:rPr lang="en-US" i="1">
-                                      <a:latin typeface="Cambria Math" panose="02040503050406030204" pitchFamily="18" charset="0"/>
-                                      <a:ea typeface="Cambria Math"/>
-                                    </a:rPr>
-                                  </m:ctrlPr>
-                                </m:sSubSupPr>
-                                <m:e>
-                                  <m:r>
-                                    <a:rPr lang="en-US" i="1">
-                                      <a:latin typeface="Cambria Math"/>
-                                      <a:ea typeface="Cambria Math"/>
-                                    </a:rPr>
-                                    <m:t>𝐶</m:t>
-                                  </m:r>
-                                </m:e>
-                                <m:sub>
-                                  <m:r>
-                                    <a:rPr lang="en-US" i="1">
-                                      <a:latin typeface="Cambria Math"/>
-                                    </a:rPr>
-                                    <m:t>1</m:t>
-                                  </m:r>
-                                </m:sub>
-                                <m:sup/>
-                              </m:sSubSup>
-                              <m:sSubSup>
-                                <m:sSubSupPr>
-                                  <m:ctrlPr>
-                                    <a:rPr lang="en-US" i="1">
-                                      <a:latin typeface="Cambria Math" panose="02040503050406030204" pitchFamily="18" charset="0"/>
-                                      <a:ea typeface="Cambria Math"/>
-                                    </a:rPr>
-                                  </m:ctrlPr>
-                                </m:sSubSupPr>
-                                <m:e>
-                                  <m:r>
-                                    <a:rPr lang="en-US" i="1">
-                                      <a:latin typeface="Cambria Math"/>
-                                      <a:ea typeface="Cambria Math"/>
-                                    </a:rPr>
-                                    <m:t>𝑑</m:t>
-                                  </m:r>
-                                </m:e>
-                                <m:sub>
-                                  <m:r>
-                                    <a:rPr lang="en-US" i="1">
-                                      <a:latin typeface="Cambria Math"/>
-                                      <a:ea typeface="Cambria Math"/>
-                                    </a:rPr>
-                                    <m:t>𝑖</m:t>
-                                  </m:r>
-                                </m:sub>
-                                <m:sup/>
-                              </m:sSubSup>
-                              <m:sSup>
-                                <m:sSupPr>
-                                  <m:ctrlPr>
-                                    <a:rPr lang="en-US" i="1">
-                                      <a:latin typeface="Cambria Math" panose="02040503050406030204" pitchFamily="18" charset="0"/>
-                                      <a:ea typeface="Cambria Math"/>
-                                    </a:rPr>
-                                  </m:ctrlPr>
-                                </m:sSupPr>
-                                <m:e>
-                                  <m:r>
-                                    <a:rPr lang="en-US" i="1">
-                                      <a:latin typeface="Cambria Math"/>
-                                      <a:ea typeface="Cambria Math"/>
-                                    </a:rPr>
-                                    <m:t>+</m:t>
-                                  </m:r>
-                                  <m:sSubSup>
-                                    <m:sSubSupPr>
-                                      <m:ctrlPr>
-                                        <a:rPr lang="en-US" i="1">
-                                          <a:latin typeface="Cambria Math" panose="02040503050406030204" pitchFamily="18" charset="0"/>
-                                          <a:ea typeface="Cambria Math"/>
-                                        </a:rPr>
-                                      </m:ctrlPr>
-                                    </m:sSubSupPr>
-                                    <m:e>
-                                      <m:r>
-                                        <a:rPr lang="en-US" i="1">
-                                          <a:latin typeface="Cambria Math"/>
-                                          <a:ea typeface="Cambria Math"/>
-                                        </a:rPr>
-                                        <m:t>𝐶</m:t>
-                                      </m:r>
-                                    </m:e>
-                                    <m:sub>
-                                      <m:r>
-                                        <a:rPr lang="en-US" i="1">
-                                          <a:latin typeface="Cambria Math"/>
-                                          <a:ea typeface="Cambria Math"/>
-                                        </a:rPr>
-                                        <m:t>2</m:t>
-                                      </m:r>
-                                    </m:sub>
-                                    <m:sup/>
-                                  </m:sSubSup>
-                                  <m:sSubSup>
-                                    <m:sSubSupPr>
-                                      <m:ctrlPr>
-                                        <a:rPr lang="en-US" i="1">
-                                          <a:latin typeface="Cambria Math" panose="02040503050406030204" pitchFamily="18" charset="0"/>
-                                          <a:ea typeface="Cambria Math"/>
-                                        </a:rPr>
-                                      </m:ctrlPr>
-                                    </m:sSubSupPr>
-                                    <m:e>
-                                      <m:r>
-                                        <a:rPr lang="en-US" i="1">
-                                          <a:latin typeface="Cambria Math"/>
-                                          <a:ea typeface="Cambria Math"/>
-                                        </a:rPr>
-                                        <m:t>𝑑</m:t>
-                                      </m:r>
-                                    </m:e>
-                                    <m:sub>
-                                      <m:r>
-                                        <a:rPr lang="en-US" i="1">
-                                          <a:latin typeface="Cambria Math"/>
-                                          <a:ea typeface="Cambria Math"/>
-                                        </a:rPr>
-                                        <m:t>𝑖</m:t>
-                                      </m:r>
-                                    </m:sub>
-                                    <m:sup/>
-                                  </m:sSubSup>
-                                </m:e>
-                                <m:sup>
-                                  <m:r>
-                                    <a:rPr lang="en-US" i="1">
-                                      <a:latin typeface="Cambria Math"/>
-                                      <a:ea typeface="Cambria Math"/>
-                                    </a:rPr>
-                                    <m:t>2</m:t>
-                                  </m:r>
-                                </m:sup>
-                              </m:sSup>
-                              <m:r>
-                                <a:rPr lang="en-US" i="1">
-                                  <a:latin typeface="Cambria Math"/>
-                                  <a:ea typeface="Cambria Math"/>
-                                </a:rPr>
-                                <m:t>+</m:t>
-                              </m:r>
-                              <m:sSubSup>
-                                <m:sSubSupPr>
-                                  <m:ctrlPr>
-                                    <a:rPr lang="en-US" i="1">
-                                      <a:latin typeface="Cambria Math" panose="02040503050406030204" pitchFamily="18" charset="0"/>
-                                      <a:ea typeface="Cambria Math"/>
-                                    </a:rPr>
-                                  </m:ctrlPr>
-                                </m:sSubSupPr>
-                                <m:e>
-                                  <m:r>
-                                    <a:rPr lang="en-US" i="1">
-                                      <a:latin typeface="Cambria Math"/>
-                                      <a:ea typeface="Cambria Math"/>
-                                    </a:rPr>
-                                    <m:t>𝐶</m:t>
-                                  </m:r>
-                                </m:e>
-                                <m:sub>
-                                  <m:r>
-                                    <a:rPr lang="en-US" i="1">
-                                      <a:latin typeface="Cambria Math"/>
-                                      <a:ea typeface="Cambria Math"/>
-                                    </a:rPr>
-                                    <m:t>3</m:t>
-                                  </m:r>
-                                </m:sub>
-                                <m:sup/>
-                              </m:sSubSup>
-                              <m:sSup>
-                                <m:sSupPr>
-                                  <m:ctrlPr>
-                                    <a:rPr lang="en-US" i="1">
-                                      <a:latin typeface="Cambria Math" panose="02040503050406030204" pitchFamily="18" charset="0"/>
-                                      <a:ea typeface="Cambria Math"/>
-                                    </a:rPr>
-                                  </m:ctrlPr>
-                                </m:sSupPr>
-                                <m:e>
-                                  <m:sSubSup>
-                                    <m:sSubSupPr>
-                                      <m:ctrlPr>
-                                        <a:rPr lang="en-US" i="1">
-                                          <a:latin typeface="Cambria Math" panose="02040503050406030204" pitchFamily="18" charset="0"/>
-                                          <a:ea typeface="Cambria Math"/>
-                                        </a:rPr>
-                                      </m:ctrlPr>
-                                    </m:sSubSupPr>
-                                    <m:e>
-                                      <m:r>
-                                        <a:rPr lang="en-US" i="1">
-                                          <a:latin typeface="Cambria Math"/>
-                                          <a:ea typeface="Cambria Math"/>
-                                        </a:rPr>
-                                        <m:t>𝑑</m:t>
-                                      </m:r>
-                                    </m:e>
-                                    <m:sub>
-                                      <m:r>
-                                        <a:rPr lang="en-US" i="1">
-                                          <a:latin typeface="Cambria Math"/>
-                                          <a:ea typeface="Cambria Math"/>
-                                        </a:rPr>
-                                        <m:t>𝑖</m:t>
-                                      </m:r>
-                                    </m:sub>
-                                    <m:sup/>
-                                  </m:sSubSup>
-                                </m:e>
-                                <m:sup>
-                                  <m:r>
-                                    <a:rPr lang="en-US" i="1">
-                                      <a:latin typeface="Cambria Math"/>
-                                      <a:ea typeface="Cambria Math"/>
-                                    </a:rPr>
-                                    <m:t>3</m:t>
-                                  </m:r>
-                                </m:sup>
-                              </m:sSup>
-                            </m:den>
-                          </m:f>
-                          <m:sSub>
-                            <m:sSubPr>
-                              <m:ctrlPr>
-                                <a:rPr lang="en-US" i="1">
-                                  <a:latin typeface="Cambria Math" panose="02040503050406030204" pitchFamily="18" charset="0"/>
-                                </a:rPr>
-                              </m:ctrlPr>
-                            </m:sSubPr>
-                            <m:e>
-                              <m:r>
-                                <a:rPr lang="en-US" i="1">
-                                  <a:latin typeface="Cambria Math"/>
-                                </a:rPr>
-                                <m:t>𝑘</m:t>
-                              </m:r>
-                            </m:e>
-                            <m:sub>
-                              <m:r>
-                                <a:rPr lang="en-US" i="1">
-                                  <a:latin typeface="Cambria Math"/>
-                                </a:rPr>
-                                <m:t>𝑠</m:t>
-                              </m:r>
-                            </m:sub>
-                          </m:sSub>
-                          <m:sSup>
-                            <m:sSupPr>
-                              <m:ctrlPr>
-                                <a:rPr lang="en-US" i="1">
-                                  <a:latin typeface="Cambria Math" panose="02040503050406030204" pitchFamily="18" charset="0"/>
-                                </a:rPr>
-                              </m:ctrlPr>
-                            </m:sSupPr>
-                            <m:e>
-                              <m:d>
-                                <m:dPr>
-                                  <m:ctrlPr>
-                                    <a:rPr lang="en-US" i="1">
-                                      <a:latin typeface="Cambria Math" panose="02040503050406030204" pitchFamily="18" charset="0"/>
-                                      <a:ea typeface="Cambria Math"/>
-                                    </a:rPr>
-                                  </m:ctrlPr>
-                                </m:dPr>
-                                <m:e>
-                                  <m:acc>
-                                    <m:accPr>
-                                      <m:chr m:val="̂"/>
-                                      <m:ctrlPr>
-                                        <a:rPr lang="en-US" i="1">
-                                          <a:latin typeface="Cambria Math" panose="02040503050406030204" pitchFamily="18" charset="0"/>
-                                          <a:ea typeface="Cambria Math"/>
-                                        </a:rPr>
-                                      </m:ctrlPr>
-                                    </m:accPr>
-                                    <m:e>
-                                      <m:r>
-                                        <a:rPr lang="en-US" i="1">
-                                          <a:latin typeface="Cambria Math"/>
-                                          <a:ea typeface="Cambria Math"/>
-                                        </a:rPr>
-                                        <m:t>𝑉</m:t>
-                                      </m:r>
-                                    </m:e>
-                                  </m:acc>
-                                  <m:r>
-                                    <a:rPr lang="en-US" i="1">
-                                      <a:latin typeface="Cambria Math"/>
-                                      <a:ea typeface="Cambria Math"/>
-                                    </a:rPr>
-                                    <m:t>∙</m:t>
-                                  </m:r>
-                                  <m:acc>
-                                    <m:accPr>
-                                      <m:chr m:val="̂"/>
-                                      <m:ctrlPr>
-                                        <a:rPr lang="en-US" i="1">
-                                          <a:latin typeface="Cambria Math" panose="02040503050406030204" pitchFamily="18" charset="0"/>
-                                          <a:ea typeface="Cambria Math"/>
-                                        </a:rPr>
-                                      </m:ctrlPr>
-                                    </m:accPr>
-                                    <m:e>
-                                      <m:sSub>
-                                        <m:sSubPr>
-                                          <m:ctrlPr>
-                                            <a:rPr lang="en-US" i="1" smtClean="0">
-                                              <a:latin typeface="Cambria Math" panose="02040503050406030204" pitchFamily="18" charset="0"/>
-                                            </a:rPr>
-                                          </m:ctrlPr>
-                                        </m:sSubPr>
-                                        <m:e>
-                                          <m:r>
-                                            <a:rPr lang="en-US" b="0" i="1" smtClean="0">
-                                              <a:latin typeface="Cambria Math"/>
-                                            </a:rPr>
-                                            <m:t>𝑅</m:t>
-                                          </m:r>
-                                        </m:e>
-                                        <m:sub>
-                                          <m:r>
-                                            <a:rPr lang="en-US" i="1">
-                                              <a:latin typeface="Cambria Math"/>
-                                            </a:rPr>
-                                            <m:t>𝑖</m:t>
-                                          </m:r>
-                                        </m:sub>
-                                      </m:sSub>
-                                    </m:e>
-                                  </m:acc>
-                                </m:e>
-                              </m:d>
-                            </m:e>
-                            <m:sup>
-                              <m:r>
-                                <a:rPr lang="en-US" i="1">
-                                  <a:latin typeface="Cambria Math"/>
-                                </a:rPr>
-                                <m:t>𝑛</m:t>
-                              </m:r>
-                            </m:sup>
-                          </m:sSup>
-                        </m:e>
-                      </m:nary>
-                    </m:oMath>
-                  </m:oMathPara>
-                </a14:m>
-                <a:endParaRPr lang="en-US" dirty="0"/>
-              </a:p>
-            </p:txBody>
-          </p:sp>
-        </mc:Choice>
-        <mc:Fallback xmlns="">
-          <p:sp>
-            <p:nvSpPr>
-              <p:cNvPr id="3" name="Content Placeholder 2"/>
-              <p:cNvSpPr>
-                <a:spLocks noGrp="1" noRot="1" noChangeAspect="1" noMove="1" noResize="1" noEditPoints="1" noAdjustHandles="1" noChangeArrowheads="1" noChangeShapeType="1" noTextEdit="1"/>
-              </p:cNvSpPr>
-              <p:nvPr>
-                <p:ph idx="1"/>
-              </p:nvPr>
-            </p:nvSpPr>
-            <p:spPr>
-              <a:xfrm>
-                <a:off x="420610" y="1721824"/>
-                <a:ext cx="8551449" cy="992937"/>
-              </a:xfrm>
-              <a:blipFill rotWithShape="0">
-                <a:blip r:embed="rId2"/>
-                <a:stretch>
-                  <a:fillRect/>
-                </a:stretch>
-              </a:blipFill>
-            </p:spPr>
-            <p:txBody>
-              <a:bodyPr/>
-              <a:lstStyle/>
-              <a:p>
-                <a:r>
-                  <a:rPr lang="en-US">
-                    <a:noFill/>
-                  </a:rPr>
-                  <a:t> </a:t>
-                </a:r>
-              </a:p>
-            </p:txBody>
-          </p:sp>
-        </mc:Fallback>
-      </mc:AlternateContent>
-      <p:sp>
-        <p:nvSpPr>
-          <p:cNvPr id="4" name="Rectangle 3"/>
-          <p:cNvSpPr/>
-          <p:nvPr/>
-        </p:nvSpPr>
-        <p:spPr>
-          <a:xfrm>
-            <a:off x="252890" y="2875002"/>
-            <a:ext cx="2786532" cy="369332"/>
-          </a:xfrm>
-          <a:prstGeom prst="rect">
-            <a:avLst/>
-          </a:prstGeom>
-        </p:spPr>
-        <p:txBody>
-          <a:bodyPr wrap="none">
-            <a:spAutoFit/>
-          </a:bodyPr>
-          <a:lstStyle/>
-          <a:p>
-            <a:r>
-              <a:rPr lang="en-US" dirty="0"/>
-              <a:t>Our Ray Tracer implements:</a:t>
-            </a:r>
-          </a:p>
-        </p:txBody>
-      </p:sp>
-      <mc:AlternateContent xmlns:mc="http://schemas.openxmlformats.org/markup-compatibility/2006" xmlns:a14="http://schemas.microsoft.com/office/drawing/2010/main">
-        <mc:Choice Requires="a14">
-          <p:sp>
-            <p:nvSpPr>
-              <p:cNvPr id="26" name="Content Placeholder 2"/>
-              <p:cNvSpPr txBox="1">
-                <a:spLocks/>
-              </p:cNvSpPr>
-              <p:nvPr/>
-            </p:nvSpPr>
-            <p:spPr>
-              <a:xfrm>
-                <a:off x="484110" y="3620474"/>
-                <a:ext cx="8551449" cy="992937"/>
-              </a:xfrm>
-              <a:prstGeom prst="rect">
-                <a:avLst/>
-              </a:prstGeom>
-            </p:spPr>
-            <p:txBody>
-              <a:bodyPr vert="horz" lIns="91440" tIns="45720" rIns="91440" bIns="45720" rtlCol="0">
-                <a:normAutofit fontScale="62500" lnSpcReduction="20000"/>
-              </a:bodyPr>
-              <a:lstStyle>
-                <a:lvl1pPr marL="342900" indent="-342900" algn="l" defTabSz="914400" rtl="0" eaLnBrk="1" latinLnBrk="0" hangingPunct="1">
-                  <a:spcBef>
-                    <a:spcPct val="20000"/>
-                  </a:spcBef>
-                  <a:buFont typeface="Arial" pitchFamily="34" charset="0"/>
-                  <a:buChar char="•"/>
-                  <a:defRPr sz="3200" kern="1200">
-                    <a:solidFill>
-                      <a:schemeClr val="tx1"/>
-                    </a:solidFill>
-                    <a:latin typeface="+mn-lt"/>
-                    <a:ea typeface="+mn-ea"/>
-                    <a:cs typeface="+mn-cs"/>
-                  </a:defRPr>
-                </a:lvl1pPr>
-                <a:lvl2pPr marL="742950" indent="-285750" algn="l" defTabSz="914400" rtl="0" eaLnBrk="1" latinLnBrk="0" hangingPunct="1">
-                  <a:spcBef>
-                    <a:spcPct val="20000"/>
-                  </a:spcBef>
-                  <a:buFont typeface="Arial" pitchFamily="34" charset="0"/>
-                  <a:buChar char="–"/>
-                  <a:defRPr sz="2800" kern="1200">
-                    <a:solidFill>
-                      <a:schemeClr val="tx1"/>
-                    </a:solidFill>
-                    <a:latin typeface="+mn-lt"/>
-                    <a:ea typeface="+mn-ea"/>
-                    <a:cs typeface="+mn-cs"/>
-                  </a:defRPr>
-                </a:lvl2pPr>
-                <a:lvl3pPr marL="1143000" indent="-228600" algn="l" defTabSz="914400" rtl="0" eaLnBrk="1" latinLnBrk="0" hangingPunct="1">
-                  <a:spcBef>
-                    <a:spcPct val="20000"/>
-                  </a:spcBef>
-                  <a:buFont typeface="Arial" pitchFamily="34" charset="0"/>
-                  <a:buChar char="•"/>
-                  <a:defRPr sz="2400" kern="1200">
-                    <a:solidFill>
-                      <a:schemeClr val="tx1"/>
-                    </a:solidFill>
-                    <a:latin typeface="+mn-lt"/>
-                    <a:ea typeface="+mn-ea"/>
-                    <a:cs typeface="+mn-cs"/>
-                  </a:defRPr>
-                </a:lvl3pPr>
-                <a:lvl4pPr marL="1600200" indent="-228600" algn="l" defTabSz="914400" rtl="0" eaLnBrk="1" latinLnBrk="0" hangingPunct="1">
-                  <a:spcBef>
-                    <a:spcPct val="20000"/>
-                  </a:spcBef>
-                  <a:buFont typeface="Arial" pitchFamily="34" charset="0"/>
-                  <a:buChar char="–"/>
-                  <a:defRPr sz="2000" kern="1200">
-                    <a:solidFill>
-                      <a:schemeClr val="tx1"/>
-                    </a:solidFill>
-                    <a:latin typeface="+mn-lt"/>
-                    <a:ea typeface="+mn-ea"/>
-                    <a:cs typeface="+mn-cs"/>
-                  </a:defRPr>
-                </a:lvl4pPr>
-                <a:lvl5pPr marL="2057400" indent="-228600" algn="l" defTabSz="914400" rtl="0" eaLnBrk="1" latinLnBrk="0" hangingPunct="1">
-                  <a:spcBef>
-                    <a:spcPct val="20000"/>
-                  </a:spcBef>
-                  <a:buFont typeface="Arial" pitchFamily="34" charset="0"/>
-                  <a:buChar char="»"/>
-                  <a:defRPr sz="2000" kern="1200">
-                    <a:solidFill>
-                      <a:schemeClr val="tx1"/>
-                    </a:solidFill>
-                    <a:latin typeface="+mn-lt"/>
-                    <a:ea typeface="+mn-ea"/>
-                    <a:cs typeface="+mn-cs"/>
-                  </a:defRPr>
-                </a:lvl5pPr>
-                <a:lvl6pPr marL="2514600" indent="-228600" algn="l" defTabSz="914400" rtl="0" eaLnBrk="1" latinLnBrk="0" hangingPunct="1">
-                  <a:spcBef>
-                    <a:spcPct val="20000"/>
-                  </a:spcBef>
-                  <a:buFont typeface="Arial" pitchFamily="34" charset="0"/>
-                  <a:buChar char="•"/>
-                  <a:defRPr sz="2000" kern="1200">
-                    <a:solidFill>
-                      <a:schemeClr val="tx1"/>
-                    </a:solidFill>
-                    <a:latin typeface="+mn-lt"/>
-                    <a:ea typeface="+mn-ea"/>
-                    <a:cs typeface="+mn-cs"/>
-                  </a:defRPr>
-                </a:lvl6pPr>
-                <a:lvl7pPr marL="2971800" indent="-228600" algn="l" defTabSz="914400" rtl="0" eaLnBrk="1" latinLnBrk="0" hangingPunct="1">
-                  <a:spcBef>
-                    <a:spcPct val="20000"/>
-                  </a:spcBef>
-                  <a:buFont typeface="Arial" pitchFamily="34" charset="0"/>
-                  <a:buChar char="•"/>
-                  <a:defRPr sz="2000" kern="1200">
-                    <a:solidFill>
-                      <a:schemeClr val="tx1"/>
-                    </a:solidFill>
-                    <a:latin typeface="+mn-lt"/>
-                    <a:ea typeface="+mn-ea"/>
-                    <a:cs typeface="+mn-cs"/>
-                  </a:defRPr>
-                </a:lvl7pPr>
-                <a:lvl8pPr marL="3429000" indent="-228600" algn="l" defTabSz="914400" rtl="0" eaLnBrk="1" latinLnBrk="0" hangingPunct="1">
-                  <a:spcBef>
-                    <a:spcPct val="20000"/>
-                  </a:spcBef>
-                  <a:buFont typeface="Arial" pitchFamily="34" charset="0"/>
-                  <a:buChar char="•"/>
-                  <a:defRPr sz="2000" kern="1200">
-                    <a:solidFill>
-                      <a:schemeClr val="tx1"/>
-                    </a:solidFill>
-                    <a:latin typeface="+mn-lt"/>
-                    <a:ea typeface="+mn-ea"/>
-                    <a:cs typeface="+mn-cs"/>
-                  </a:defRPr>
-                </a:lvl8pPr>
-                <a:lvl9pPr marL="3886200" indent="-228600" algn="l" defTabSz="914400" rtl="0" eaLnBrk="1" latinLnBrk="0" hangingPunct="1">
-                  <a:spcBef>
-                    <a:spcPct val="20000"/>
-                  </a:spcBef>
-                  <a:buFont typeface="Arial" pitchFamily="34" charset="0"/>
-                  <a:buChar char="•"/>
-                  <a:defRPr sz="2000" kern="1200">
-                    <a:solidFill>
-                      <a:schemeClr val="tx1"/>
-                    </a:solidFill>
-                    <a:latin typeface="+mn-lt"/>
-                    <a:ea typeface="+mn-ea"/>
-                    <a:cs typeface="+mn-cs"/>
-                  </a:defRPr>
-                </a:lvl9pPr>
-              </a:lstStyle>
               <a:p>
                 <a:pPr marL="0" indent="0">
                   <a:buNone/>
@@ -16853,120 +15658,160 @@
                     </m:oMathParaPr>
                     <m:oMath xmlns:m="http://schemas.openxmlformats.org/officeDocument/2006/math">
                       <m:r>
-                        <a:rPr lang="en-US" i="1" smtClean="0">
-                          <a:latin typeface="Cambria Math"/>
+                        <a:rPr lang="en-US" sz="3800" i="1">
+                          <a:latin typeface="Cambria Math" panose="02040503050406030204" pitchFamily="18" charset="0"/>
                         </a:rPr>
                         <m:t>𝐼</m:t>
                       </m:r>
                       <m:r>
-                        <a:rPr lang="en-US" i="1" smtClean="0">
-                          <a:latin typeface="Cambria Math"/>
+                        <a:rPr lang="en-US" sz="3800" i="1">
+                          <a:latin typeface="Cambria Math" panose="02040503050406030204" pitchFamily="18" charset="0"/>
                         </a:rPr>
-                        <m:t>=</m:t>
+                        <m:t>= </m:t>
                       </m:r>
                       <m:sSub>
                         <m:sSubPr>
                           <m:ctrlPr>
-                            <a:rPr lang="en-US" i="1" smtClean="0">
+                            <a:rPr lang="en-US" sz="3800" i="1">
                               <a:latin typeface="Cambria Math" panose="02040503050406030204" pitchFamily="18" charset="0"/>
                             </a:rPr>
                           </m:ctrlPr>
                         </m:sSubPr>
                         <m:e>
                           <m:r>
-                            <a:rPr lang="en-US" i="1">
-                              <a:latin typeface="Cambria Math"/>
+                            <a:rPr lang="en-US" sz="3800" i="1">
+                              <a:latin typeface="Cambria Math" panose="02040503050406030204" pitchFamily="18" charset="0"/>
                             </a:rPr>
                             <m:t>𝑘</m:t>
                           </m:r>
                         </m:e>
                         <m:sub>
                           <m:r>
-                            <a:rPr lang="en-US" i="1">
-                              <a:latin typeface="Cambria Math"/>
+                            <a:rPr lang="en-US" sz="3800" i="1">
+                              <a:latin typeface="Cambria Math" panose="02040503050406030204" pitchFamily="18" charset="0"/>
                             </a:rPr>
                             <m:t>𝑎</m:t>
                           </m:r>
                         </m:sub>
                       </m:sSub>
                       <m:r>
-                        <a:rPr lang="en-US" b="0" i="1" smtClean="0">
-                          <a:latin typeface="Cambria Math"/>
+                        <a:rPr lang="en-US" sz="3800" i="1">
+                          <a:latin typeface="Cambria Math" panose="02040503050406030204" pitchFamily="18" charset="0"/>
                         </a:rPr>
                         <m:t>+</m:t>
                       </m:r>
                       <m:nary>
                         <m:naryPr>
                           <m:chr m:val="∑"/>
+                          <m:grow m:val="on"/>
                           <m:ctrlPr>
-                            <a:rPr lang="en-US" i="1" smtClean="0">
+                            <a:rPr lang="en-US" sz="3800" i="1">
                               <a:latin typeface="Cambria Math" panose="02040503050406030204" pitchFamily="18" charset="0"/>
                             </a:rPr>
                           </m:ctrlPr>
                         </m:naryPr>
                         <m:sub>
                           <m:r>
-                            <m:rPr>
-                              <m:brk m:alnAt="23"/>
-                            </m:rPr>
-                            <a:rPr lang="en-US" i="1" smtClean="0">
-                              <a:latin typeface="Cambria Math"/>
+                            <a:rPr lang="en-US" sz="3800" i="1">
+                              <a:latin typeface="Cambria Math" panose="02040503050406030204" pitchFamily="18" charset="0"/>
                             </a:rPr>
                             <m:t>𝑖</m:t>
+                          </m:r>
+                          <m:r>
+                            <a:rPr lang="en-US" sz="3800" i="1">
+                              <a:latin typeface="Cambria Math" panose="02040503050406030204" pitchFamily="18" charset="0"/>
+                            </a:rPr>
+                            <m:t>=0</m:t>
                           </m:r>
                         </m:sub>
                         <m:sup>
                           <m:r>
-                            <a:rPr lang="en-US" i="1" smtClean="0">
-                              <a:latin typeface="Cambria Math"/>
+                            <a:rPr lang="en-US" sz="3800" i="1">
+                              <a:latin typeface="Cambria Math" panose="02040503050406030204" pitchFamily="18" charset="0"/>
                             </a:rPr>
-                            <m:t>𝐴𝑙𝑙</m:t>
-                          </m:r>
-                          <m:r>
-                            <a:rPr lang="en-US" i="1" smtClean="0">
-                              <a:latin typeface="Cambria Math"/>
-                            </a:rPr>
-                            <m:t> </m:t>
-                          </m:r>
-                          <m:r>
-                            <a:rPr lang="en-US" i="1" smtClean="0">
-                              <a:latin typeface="Cambria Math"/>
-                            </a:rPr>
-                            <m:t>𝐿𝑖𝑔h𝑡𝑠</m:t>
+                            <m:t>3</m:t>
                           </m:r>
                         </m:sup>
                         <m:e>
                           <m:sSub>
                             <m:sSubPr>
                               <m:ctrlPr>
-                                <a:rPr lang="en-US" i="1">
+                                <a:rPr lang="en-US" sz="3800" i="1">
                                   <a:latin typeface="Cambria Math" panose="02040503050406030204" pitchFamily="18" charset="0"/>
                                 </a:rPr>
                               </m:ctrlPr>
                             </m:sSubPr>
                             <m:e>
                               <m:r>
-                                <a:rPr lang="en-US" i="1">
-                                  <a:latin typeface="Cambria Math"/>
+                                <a:rPr lang="en-US" sz="3800" i="1">
+                                  <a:latin typeface="Cambria Math" panose="02040503050406030204" pitchFamily="18" charset="0"/>
                                 </a:rPr>
-                                <m:t>𝐿</m:t>
+                                <m:t>𝐴</m:t>
                               </m:r>
                             </m:e>
                             <m:sub>
                               <m:r>
-                                <a:rPr lang="en-US" i="1">
-                                  <a:latin typeface="Cambria Math"/>
+                                <a:rPr lang="en-US" sz="3800" i="1">
+                                  <a:latin typeface="Cambria Math" panose="02040503050406030204" pitchFamily="18" charset="0"/>
                                 </a:rPr>
-                                <m:t>𝑑𝑖</m:t>
+                                <m:t>𝑖</m:t>
+                              </m:r>
+                            </m:sub>
+                          </m:sSub>
+                          <m:sSub>
+                            <m:sSubPr>
+                              <m:ctrlPr>
+                                <a:rPr lang="en-US" sz="3800" i="1">
+                                  <a:latin typeface="Cambria Math" panose="02040503050406030204" pitchFamily="18" charset="0"/>
+                                </a:rPr>
+                              </m:ctrlPr>
+                            </m:sSubPr>
+                            <m:e>
+                              <m:r>
+                                <a:rPr lang="en-US" sz="3800" i="1">
+                                  <a:latin typeface="Cambria Math" panose="02040503050406030204" pitchFamily="18" charset="0"/>
+                                </a:rPr>
+                                <m:t>𝐷</m:t>
+                              </m:r>
+                            </m:e>
+                            <m:sub>
+                              <m:r>
+                                <a:rPr lang="en-US" sz="3800" i="1">
+                                  <a:latin typeface="Cambria Math" panose="02040503050406030204" pitchFamily="18" charset="0"/>
+                                </a:rPr>
+                                <m:t>𝑖</m:t>
+                              </m:r>
+                            </m:sub>
+                          </m:sSub>
+                          <m:sSub>
+                            <m:sSubPr>
+                              <m:ctrlPr>
+                                <a:rPr lang="en-US" sz="3800" i="1">
+                                  <a:latin typeface="Cambria Math" panose="02040503050406030204" pitchFamily="18" charset="0"/>
+                                </a:rPr>
+                              </m:ctrlPr>
+                            </m:sSubPr>
+                            <m:e>
+                              <m:r>
+                                <a:rPr lang="en-US" sz="3800" i="1">
+                                  <a:latin typeface="Cambria Math" panose="02040503050406030204" pitchFamily="18" charset="0"/>
+                                </a:rPr>
+                                <m:t>𝐼</m:t>
+                              </m:r>
+                            </m:e>
+                            <m:sub>
+                              <m:r>
+                                <a:rPr lang="en-US" sz="3800" i="1">
+                                  <a:latin typeface="Cambria Math" panose="02040503050406030204" pitchFamily="18" charset="0"/>
+                                </a:rPr>
+                                <m:t>𝑖</m:t>
                               </m:r>
                             </m:sub>
                           </m:sSub>
                           <m:d>
                             <m:dPr>
-                              <m:begChr m:val="["/>
-                              <m:endChr m:val="]"/>
                               <m:ctrlPr>
-                                <a:rPr lang="en-US" b="0" i="1" smtClean="0">
+                                <a:rPr lang="en-US" sz="3800" i="1">
                                   <a:latin typeface="Cambria Math" panose="02040503050406030204" pitchFamily="18" charset="0"/>
                                 </a:rPr>
                               </m:ctrlPr>
@@ -16975,23 +15820,23 @@
                               <m:sSub>
                                 <m:sSubPr>
                                   <m:ctrlPr>
-                                    <a:rPr lang="en-US" i="1">
+                                    <a:rPr lang="en-US" sz="3800" i="1">
                                       <a:latin typeface="Cambria Math" panose="02040503050406030204" pitchFamily="18" charset="0"/>
                                     </a:rPr>
                                   </m:ctrlPr>
                                 </m:sSubPr>
                                 <m:e>
                                   <m:r>
-                                    <a:rPr lang="en-US" i="1">
-                                      <a:latin typeface="Cambria Math"/>
+                                    <a:rPr lang="en-US" sz="3800" i="1">
+                                      <a:latin typeface="Cambria Math" panose="02040503050406030204" pitchFamily="18" charset="0"/>
                                     </a:rPr>
                                     <m:t>𝑘</m:t>
                                   </m:r>
                                 </m:e>
                                 <m:sub>
                                   <m:r>
-                                    <a:rPr lang="en-US" i="1">
-                                      <a:latin typeface="Cambria Math"/>
+                                    <a:rPr lang="en-US" sz="3800" i="1">
+                                      <a:latin typeface="Cambria Math" panose="02040503050406030204" pitchFamily="18" charset="0"/>
                                     </a:rPr>
                                     <m:t>𝑑</m:t>
                                   </m:r>
@@ -17000,9 +15845,8 @@
                               <m:d>
                                 <m:dPr>
                                   <m:ctrlPr>
-                                    <a:rPr lang="en-US" i="1">
+                                    <a:rPr lang="en-US" sz="3800" i="1">
                                       <a:latin typeface="Cambria Math" panose="02040503050406030204" pitchFamily="18" charset="0"/>
-                                      <a:ea typeface="Cambria Math"/>
                                     </a:rPr>
                                   </m:ctrlPr>
                                 </m:dPr>
@@ -17011,26 +15855,23 @@
                                     <m:accPr>
                                       <m:chr m:val="̂"/>
                                       <m:ctrlPr>
-                                        <a:rPr lang="en-US" i="1">
+                                        <a:rPr lang="en-US" sz="3800" i="1">
                                           <a:latin typeface="Cambria Math" panose="02040503050406030204" pitchFamily="18" charset="0"/>
-                                          <a:ea typeface="Cambria Math"/>
                                         </a:rPr>
                                       </m:ctrlPr>
                                     </m:accPr>
                                     <m:e>
                                       <m:r>
-                                        <a:rPr lang="en-US" i="1">
-                                          <a:latin typeface="Cambria Math"/>
-                                          <a:ea typeface="Cambria Math"/>
+                                        <a:rPr lang="en-US" sz="3800" i="1">
+                                          <a:latin typeface="Cambria Math" panose="02040503050406030204" pitchFamily="18" charset="0"/>
                                         </a:rPr>
                                         <m:t>𝑁</m:t>
                                       </m:r>
                                     </m:e>
                                   </m:acc>
                                   <m:r>
-                                    <a:rPr lang="en-US" i="1">
-                                      <a:latin typeface="Cambria Math"/>
-                                      <a:ea typeface="Cambria Math"/>
+                                    <a:rPr lang="en-US" sz="3800" i="1">
+                                      <a:latin typeface="Cambria Math" panose="02040503050406030204" pitchFamily="18" charset="0"/>
                                     </a:rPr>
                                     <m:t>∙</m:t>
                                   </m:r>
@@ -17038,9 +15879,8 @@
                                     <m:accPr>
                                       <m:chr m:val="̂"/>
                                       <m:ctrlPr>
-                                        <a:rPr lang="en-US" i="1">
+                                        <a:rPr lang="en-US" sz="3800" i="1">
                                           <a:latin typeface="Cambria Math" panose="02040503050406030204" pitchFamily="18" charset="0"/>
-                                          <a:ea typeface="Cambria Math"/>
                                         </a:rPr>
                                       </m:ctrlPr>
                                     </m:accPr>
@@ -17048,23 +15888,23 @@
                                       <m:sSub>
                                         <m:sSubPr>
                                           <m:ctrlPr>
-                                            <a:rPr lang="en-US" i="1">
+                                            <a:rPr lang="en-US" sz="3800" i="1">
                                               <a:latin typeface="Cambria Math" panose="02040503050406030204" pitchFamily="18" charset="0"/>
                                             </a:rPr>
                                           </m:ctrlPr>
                                         </m:sSubPr>
                                         <m:e>
                                           <m:r>
-                                            <a:rPr lang="en-US" i="1">
-                                              <a:latin typeface="Cambria Math"/>
+                                            <a:rPr lang="en-US" sz="3800" i="1">
+                                              <a:latin typeface="Cambria Math" panose="02040503050406030204" pitchFamily="18" charset="0"/>
                                             </a:rPr>
                                             <m:t>𝐿</m:t>
                                           </m:r>
                                         </m:e>
                                         <m:sub>
                                           <m:r>
-                                            <a:rPr lang="en-US" i="1">
-                                              <a:latin typeface="Cambria Math"/>
+                                            <a:rPr lang="en-US" sz="3800" i="1">
+                                              <a:latin typeface="Cambria Math" panose="02040503050406030204" pitchFamily="18" charset="0"/>
                                             </a:rPr>
                                             <m:t>𝑖</m:t>
                                           </m:r>
@@ -17075,41 +15915,88 @@
                                 </m:e>
                               </m:d>
                               <m:r>
-                                <a:rPr lang="en-US">
-                                  <a:latin typeface="Cambria Math"/>
-                                  <a:ea typeface="Cambria Math"/>
+                                <a:rPr lang="en-US" sz="3800">
+                                  <a:latin typeface="Cambria Math" panose="02040503050406030204" pitchFamily="18" charset="0"/>
                                 </a:rPr>
                                 <m:t>+</m:t>
                               </m:r>
                               <m:sSub>
                                 <m:sSubPr>
                                   <m:ctrlPr>
-                                    <a:rPr lang="en-US" i="1">
+                                    <a:rPr lang="en-US" sz="3800" i="1">
                                       <a:latin typeface="Cambria Math" panose="02040503050406030204" pitchFamily="18" charset="0"/>
                                     </a:rPr>
                                   </m:ctrlPr>
                                 </m:sSubPr>
                                 <m:e>
                                   <m:r>
-                                    <a:rPr lang="en-US" i="1">
-                                      <a:latin typeface="Cambria Math"/>
+                                    <a:rPr lang="en-US" sz="3800" i="1">
+                                      <a:latin typeface="Cambria Math" panose="02040503050406030204" pitchFamily="18" charset="0"/>
                                     </a:rPr>
                                     <m:t>𝑘</m:t>
                                   </m:r>
                                 </m:e>
                                 <m:sub>
                                   <m:r>
-                                    <a:rPr lang="en-US" i="1">
-                                      <a:latin typeface="Cambria Math"/>
+                                    <a:rPr lang="en-US" sz="3800" i="1">
+                                      <a:latin typeface="Cambria Math" panose="02040503050406030204" pitchFamily="18" charset="0"/>
                                     </a:rPr>
                                     <m:t>𝑠</m:t>
                                   </m:r>
                                 </m:sub>
                               </m:sSub>
+                              <m:d>
+                                <m:dPr>
+                                  <m:ctrlPr>
+                                    <a:rPr lang="en-US" sz="3800" i="1">
+                                      <a:latin typeface="Cambria Math" panose="02040503050406030204" pitchFamily="18" charset="0"/>
+                                    </a:rPr>
+                                  </m:ctrlPr>
+                                </m:dPr>
+                                <m:e>
+                                  <m:f>
+                                    <m:fPr>
+                                      <m:ctrlPr>
+                                        <a:rPr lang="en-US" sz="3800" i="1">
+                                          <a:latin typeface="Cambria Math" panose="02040503050406030204" pitchFamily="18" charset="0"/>
+                                        </a:rPr>
+                                      </m:ctrlPr>
+                                    </m:fPr>
+                                    <m:num>
+                                      <m:r>
+                                        <a:rPr lang="en-US" sz="3800" i="1">
+                                          <a:latin typeface="Cambria Math" panose="02040503050406030204" pitchFamily="18" charset="0"/>
+                                        </a:rPr>
+                                        <m:t>𝑠</m:t>
+                                      </m:r>
+                                      <m:r>
+                                        <a:rPr lang="en-US" sz="3800" i="1">
+                                          <a:latin typeface="Cambria Math" panose="02040503050406030204" pitchFamily="18" charset="0"/>
+                                        </a:rPr>
+                                        <m:t>+2</m:t>
+                                      </m:r>
+                                    </m:num>
+                                    <m:den>
+                                      <m:r>
+                                        <a:rPr lang="en-US" sz="3800" i="1">
+                                          <a:latin typeface="Cambria Math" panose="02040503050406030204" pitchFamily="18" charset="0"/>
+                                        </a:rPr>
+                                        <m:t>2</m:t>
+                                      </m:r>
+                                      <m:r>
+                                        <a:rPr lang="en-US" sz="3800" i="1">
+                                          <a:latin typeface="Cambria Math" panose="02040503050406030204" pitchFamily="18" charset="0"/>
+                                        </a:rPr>
+                                        <m:t>𝜋</m:t>
+                                      </m:r>
+                                    </m:den>
+                                  </m:f>
+                                </m:e>
+                              </m:d>
                               <m:sSup>
                                 <m:sSupPr>
                                   <m:ctrlPr>
-                                    <a:rPr lang="en-US" i="1">
+                                    <a:rPr lang="en-US" sz="3800" i="1">
                                       <a:latin typeface="Cambria Math" panose="02040503050406030204" pitchFamily="18" charset="0"/>
                                     </a:rPr>
                                   </m:ctrlPr>
@@ -17118,9 +16005,8 @@
                                   <m:d>
                                     <m:dPr>
                                       <m:ctrlPr>
-                                        <a:rPr lang="en-US" i="1">
+                                        <a:rPr lang="en-US" sz="3800" i="1">
                                           <a:latin typeface="Cambria Math" panose="02040503050406030204" pitchFamily="18" charset="0"/>
-                                          <a:ea typeface="Cambria Math"/>
                                         </a:rPr>
                                       </m:ctrlPr>
                                     </m:dPr>
@@ -17129,26 +16015,23 @@
                                         <m:accPr>
                                           <m:chr m:val="̂"/>
                                           <m:ctrlPr>
-                                            <a:rPr lang="en-US" i="1">
+                                            <a:rPr lang="en-US" sz="3800" i="1">
                                               <a:latin typeface="Cambria Math" panose="02040503050406030204" pitchFamily="18" charset="0"/>
-                                              <a:ea typeface="Cambria Math"/>
                                             </a:rPr>
                                           </m:ctrlPr>
                                         </m:accPr>
                                         <m:e>
                                           <m:r>
-                                            <a:rPr lang="en-US" i="1">
-                                              <a:latin typeface="Cambria Math"/>
-                                              <a:ea typeface="Cambria Math"/>
+                                            <a:rPr lang="en-US" sz="3800" i="1">
+                                              <a:latin typeface="Cambria Math" panose="02040503050406030204" pitchFamily="18" charset="0"/>
                                             </a:rPr>
-                                            <m:t>𝑉</m:t>
+                                            <m:t>𝑁</m:t>
                                           </m:r>
                                         </m:e>
                                       </m:acc>
                                       <m:r>
-                                        <a:rPr lang="en-US" i="1">
-                                          <a:latin typeface="Cambria Math"/>
-                                          <a:ea typeface="Cambria Math"/>
+                                        <a:rPr lang="en-US" sz="3800" i="1">
+                                          <a:latin typeface="Cambria Math" panose="02040503050406030204" pitchFamily="18" charset="0"/>
                                         </a:rPr>
                                         <m:t>∙</m:t>
                                       </m:r>
@@ -17156,9 +16039,8 @@
                                         <m:accPr>
                                           <m:chr m:val="̂"/>
                                           <m:ctrlPr>
-                                            <a:rPr lang="en-US" i="1">
+                                            <a:rPr lang="en-US" sz="3800" i="1">
                                               <a:latin typeface="Cambria Math" panose="02040503050406030204" pitchFamily="18" charset="0"/>
-                                              <a:ea typeface="Cambria Math"/>
                                             </a:rPr>
                                           </m:ctrlPr>
                                         </m:accPr>
@@ -17166,23 +16048,23 @@
                                           <m:sSub>
                                             <m:sSubPr>
                                               <m:ctrlPr>
-                                                <a:rPr lang="en-US" i="1">
+                                                <a:rPr lang="en-US" sz="3800" i="1">
                                                   <a:latin typeface="Cambria Math" panose="02040503050406030204" pitchFamily="18" charset="0"/>
                                                 </a:rPr>
                                               </m:ctrlPr>
                                             </m:sSubPr>
                                             <m:e>
                                               <m:r>
-                                                <a:rPr lang="en-US" i="1">
-                                                  <a:latin typeface="Cambria Math"/>
+                                                <a:rPr lang="en-US" sz="3800" i="1">
+                                                  <a:latin typeface="Cambria Math" panose="02040503050406030204" pitchFamily="18" charset="0"/>
                                                 </a:rPr>
-                                                <m:t>𝑅</m:t>
+                                                <m:t>𝐻</m:t>
                                               </m:r>
                                             </m:e>
                                             <m:sub>
                                               <m:r>
-                                                <a:rPr lang="en-US" i="1">
-                                                  <a:latin typeface="Cambria Math"/>
+                                                <a:rPr lang="en-US" sz="3800" i="1">
+                                                  <a:latin typeface="Cambria Math" panose="02040503050406030204" pitchFamily="18" charset="0"/>
                                                 </a:rPr>
                                                 <m:t>𝑖</m:t>
                                               </m:r>
@@ -17195,10 +16077,10 @@
                                 </m:e>
                                 <m:sup>
                                   <m:r>
-                                    <a:rPr lang="en-US" i="1">
-                                      <a:latin typeface="Cambria Math"/>
+                                    <a:rPr lang="en-US" sz="3800" i="1">
+                                      <a:latin typeface="Cambria Math" panose="02040503050406030204" pitchFamily="18" charset="0"/>
                                     </a:rPr>
-                                    <m:t>𝑛</m:t>
+                                    <m:t>𝑠</m:t>
                                   </m:r>
                                 </m:sup>
                               </m:sSup>
@@ -17209,30 +16091,419 @@
                     </m:oMath>
                   </m:oMathPara>
                 </a14:m>
+                <a:endParaRPr lang="en-US" sz="3800" dirty="0"/>
+              </a:p>
+              <a:p>
+                <a:pPr marL="0" indent="0">
+                  <a:buNone/>
+                </a:pPr>
+                <a:endParaRPr lang="en-US" sz="2400" dirty="0"/>
+              </a:p>
+              <a:p>
+                <a:pPr lvl="1"/>
+                <a14:m>
+                  <m:oMath xmlns:m="http://schemas.openxmlformats.org/officeDocument/2006/math">
+                    <m:sSub>
+                      <m:sSubPr>
+                        <m:ctrlPr>
+                          <a:rPr lang="en-US" i="1"/>
+                        </m:ctrlPr>
+                      </m:sSubPr>
+                      <m:e>
+                        <m:r>
+                          <a:rPr lang="en-US" i="1"/>
+                          <m:t>𝐴</m:t>
+                        </m:r>
+                      </m:e>
+                      <m:sub>
+                        <m:r>
+                          <a:rPr lang="en-US" i="1"/>
+                          <m:t>𝑖</m:t>
+                        </m:r>
+                      </m:sub>
+                    </m:sSub>
+                  </m:oMath>
+                </a14:m>
+                <a:r>
+                  <a:rPr lang="en-US" dirty="0"/>
+                  <a:t>: angular attenuation defined by two cone angles</a:t>
+                </a:r>
+              </a:p>
+              <a:p>
+                <a:pPr lvl="2"/>
+                <a:r>
+                  <a:rPr lang="en-US" dirty="0"/>
+                  <a:t>If inside the inner cone angle, </a:t>
+                </a:r>
+                <a14:m>
+                  <m:oMath xmlns:m="http://schemas.openxmlformats.org/officeDocument/2006/math">
+                    <m:r>
+                      <a:rPr lang="en-US" i="1"/>
+                      <m:t>𝜃</m:t>
+                    </m:r>
+                  </m:oMath>
+                </a14:m>
+                <a:r>
+                  <a:rPr lang="en-US" dirty="0"/>
+                  <a:t>:  1.0</a:t>
+                </a:r>
+              </a:p>
+              <a:p>
+                <a:pPr lvl="2"/>
+                <a:r>
+                  <a:rPr lang="en-US" dirty="0"/>
+                  <a:t>If outside of the outer cone angle, </a:t>
+                </a:r>
+                <a14:m>
+                  <m:oMath xmlns:m="http://schemas.openxmlformats.org/officeDocument/2006/math">
+                    <m:r>
+                      <a:rPr lang="el-GR" i="1"/>
+                      <m:t>𝜑</m:t>
+                    </m:r>
+                  </m:oMath>
+                </a14:m>
+                <a:r>
+                  <a:rPr lang="en-US" dirty="0"/>
+                  <a:t>: 0.0</a:t>
+                </a:r>
+              </a:p>
+              <a:p>
+                <a:pPr lvl="2"/>
+                <a:r>
+                  <a:rPr lang="en-US" dirty="0"/>
+                  <a:t>If in between, angle of </a:t>
+                </a:r>
+                <a14:m>
+                  <m:oMath xmlns:m="http://schemas.openxmlformats.org/officeDocument/2006/math">
+                    <m:r>
+                      <a:rPr lang="en-US" i="1"/>
+                      <m:t>𝛼</m:t>
+                    </m:r>
+                  </m:oMath>
+                </a14:m>
+                <a:r>
+                  <a:rPr lang="en-US" dirty="0"/>
+                  <a:t> with </a:t>
+                </a:r>
+                <a:r>
+                  <a:rPr lang="en-US" dirty="0" err="1"/>
+                  <a:t>DropOff</a:t>
+                </a:r>
+                <a:r>
+                  <a:rPr lang="en-US" dirty="0"/>
+                  <a:t> being a user define parameter: </a:t>
+                </a:r>
+              </a:p>
+              <a:p>
+                <a:pPr marL="0" indent="0">
+                  <a:buNone/>
+                </a:pPr>
+                <a:r>
+                  <a:rPr lang="en-US" dirty="0"/>
+                  <a:t>		</a:t>
+                </a:r>
+                <a:r>
+                  <a:rPr lang="en-US" sz="2200" dirty="0" err="1"/>
+                  <a:t>smoothstep</a:t>
+                </a:r>
+                <a:r>
+                  <a:rPr lang="en-US" sz="2200" dirty="0"/>
+                  <a:t>(0.0, 1.0, pow(</a:t>
+                </a:r>
+                <a14:m>
+                  <m:oMath xmlns:m="http://schemas.openxmlformats.org/officeDocument/2006/math">
+                    <m:f>
+                      <m:fPr>
+                        <m:ctrlPr>
+                          <a:rPr lang="en-US" sz="2200" i="1"/>
+                        </m:ctrlPr>
+                      </m:fPr>
+                      <m:num>
+                        <m:func>
+                          <m:funcPr>
+                            <m:ctrlPr>
+                              <a:rPr lang="en-US" sz="2200" i="1"/>
+                            </m:ctrlPr>
+                          </m:funcPr>
+                          <m:fName>
+                            <m:r>
+                              <m:rPr>
+                                <m:sty m:val="p"/>
+                              </m:rPr>
+                              <a:rPr lang="en-US" sz="2200"/>
+                              <m:t>cos</m:t>
+                            </m:r>
+                          </m:fName>
+                          <m:e>
+                            <m:r>
+                              <a:rPr lang="en-US" sz="2200" i="1"/>
+                              <m:t>𝛼</m:t>
+                            </m:r>
+                          </m:e>
+                        </m:func>
+                        <m:r>
+                          <a:rPr lang="en-US" sz="2200" i="1"/>
+                          <m:t>−</m:t>
+                        </m:r>
+                        <m:func>
+                          <m:funcPr>
+                            <m:ctrlPr>
+                              <a:rPr lang="en-US" sz="2200" i="1"/>
+                            </m:ctrlPr>
+                          </m:funcPr>
+                          <m:fName>
+                            <m:r>
+                              <m:rPr>
+                                <m:sty m:val="p"/>
+                              </m:rPr>
+                              <a:rPr lang="en-US" sz="2200"/>
+                              <m:t>cos</m:t>
+                            </m:r>
+                          </m:fName>
+                          <m:e>
+                            <m:r>
+                              <a:rPr lang="el-GR" sz="2200" i="1"/>
+                              <m:t>𝜑</m:t>
+                            </m:r>
+                          </m:e>
+                        </m:func>
+                      </m:num>
+                      <m:den>
+                        <m:func>
+                          <m:funcPr>
+                            <m:ctrlPr>
+                              <a:rPr lang="en-US" sz="2200" i="1"/>
+                            </m:ctrlPr>
+                          </m:funcPr>
+                          <m:fName>
+                            <m:r>
+                              <m:rPr>
+                                <m:sty m:val="p"/>
+                              </m:rPr>
+                              <a:rPr lang="en-US" sz="2200"/>
+                              <m:t>cos</m:t>
+                            </m:r>
+                          </m:fName>
+                          <m:e>
+                            <m:r>
+                              <a:rPr lang="en-US" sz="2200" i="1"/>
+                              <m:t>𝜃</m:t>
+                            </m:r>
+                          </m:e>
+                        </m:func>
+                        <m:r>
+                          <a:rPr lang="en-US" sz="2200" i="1"/>
+                          <m:t>−</m:t>
+                        </m:r>
+                        <m:func>
+                          <m:funcPr>
+                            <m:ctrlPr>
+                              <a:rPr lang="en-US" sz="2200" i="1"/>
+                            </m:ctrlPr>
+                          </m:funcPr>
+                          <m:fName>
+                            <m:r>
+                              <m:rPr>
+                                <m:sty m:val="p"/>
+                              </m:rPr>
+                              <a:rPr lang="en-US" sz="2200"/>
+                              <m:t>cos</m:t>
+                            </m:r>
+                          </m:fName>
+                          <m:e>
+                            <m:r>
+                              <a:rPr lang="el-GR" sz="2200" i="1"/>
+                              <m:t>𝜑</m:t>
+                            </m:r>
+                          </m:e>
+                        </m:func>
+                      </m:den>
+                    </m:f>
+                  </m:oMath>
+                </a14:m>
+                <a:r>
+                  <a:rPr lang="en-US" sz="2200" dirty="0"/>
+                  <a:t>, </a:t>
+                </a:r>
+                <a:r>
+                  <a:rPr lang="en-US" sz="2200" dirty="0" err="1"/>
+                  <a:t>DropOff</a:t>
+                </a:r>
+                <a:r>
+                  <a:rPr lang="en-US" sz="2200" dirty="0"/>
+                  <a:t>))</a:t>
+                </a:r>
+              </a:p>
+              <a:p>
+                <a:pPr lvl="1"/>
+                <a14:m>
+                  <m:oMath xmlns:m="http://schemas.openxmlformats.org/officeDocument/2006/math">
+                    <m:sSub>
+                      <m:sSubPr>
+                        <m:ctrlPr>
+                          <a:rPr lang="en-US" i="1"/>
+                        </m:ctrlPr>
+                      </m:sSubPr>
+                      <m:e>
+                        <m:r>
+                          <a:rPr lang="en-US" i="1"/>
+                          <m:t>𝐷</m:t>
+                        </m:r>
+                      </m:e>
+                      <m:sub>
+                        <m:r>
+                          <a:rPr lang="en-US" i="1"/>
+                          <m:t>𝑖</m:t>
+                        </m:r>
+                      </m:sub>
+                    </m:sSub>
+                  </m:oMath>
+                </a14:m>
+                <a:r>
+                  <a:rPr lang="en-US" dirty="0"/>
+                  <a:t>: distance attenuation defined by two distances: near and far</a:t>
+                </a:r>
+              </a:p>
+              <a:p>
+                <a:pPr lvl="2"/>
+                <a:r>
+                  <a:rPr lang="en-US" dirty="0"/>
+                  <a:t>If closer than near: no attenuation </a:t>
+                </a:r>
+              </a:p>
+              <a:p>
+                <a:pPr lvl="2"/>
+                <a:r>
+                  <a:rPr lang="en-US" dirty="0"/>
+                  <a:t>If further than far: all attenuated (no illumination)</a:t>
+                </a:r>
+              </a:p>
+              <a:p>
+                <a:pPr lvl="2"/>
+                <a:r>
+                  <a:rPr lang="en-US" dirty="0"/>
+                  <a:t>If in between:</a:t>
+                </a:r>
+              </a:p>
+              <a:p>
+                <a:pPr marL="1828800" lvl="4" indent="0">
+                  <a:buNone/>
+                </a:pPr>
+                <a:r>
+                  <a:rPr lang="en-US" dirty="0"/>
+                  <a:t>n = </a:t>
+                </a:r>
+                <a:r>
+                  <a:rPr lang="en-US" dirty="0" err="1"/>
+                  <a:t>dist</a:t>
+                </a:r>
+                <a:r>
+                  <a:rPr lang="en-US" dirty="0"/>
+                  <a:t> – near   // </a:t>
+                </a:r>
+                <a:r>
+                  <a:rPr lang="en-US" dirty="0" err="1"/>
+                  <a:t>dist</a:t>
+                </a:r>
+                <a:r>
+                  <a:rPr lang="en-US" dirty="0"/>
+                  <a:t>: distance from the light source</a:t>
+                </a:r>
+              </a:p>
+              <a:p>
+                <a:pPr marL="1828800" lvl="4" indent="0">
+                  <a:buNone/>
+                </a:pPr>
+                <a:r>
+                  <a:rPr lang="en-US" dirty="0"/>
+                  <a:t>d = far - near</a:t>
+                </a:r>
+              </a:p>
+              <a:p>
+                <a:pPr marL="1828800" lvl="4" indent="0">
+                  <a:buNone/>
+                </a:pPr>
+                <a:r>
+                  <a:rPr lang="en-US" dirty="0" err="1"/>
+                  <a:t>smoothstep</a:t>
+                </a:r>
+                <a:r>
+                  <a:rPr lang="en-US" dirty="0"/>
+                  <a:t>(0.0, 1.0, 1.0 - </a:t>
+                </a:r>
+                <a14:m>
+                  <m:oMath xmlns:m="http://schemas.openxmlformats.org/officeDocument/2006/math">
+                    <m:f>
+                      <m:fPr>
+                        <m:ctrlPr>
+                          <a:rPr lang="en-US" i="1"/>
+                        </m:ctrlPr>
+                      </m:fPr>
+                      <m:num>
+                        <m:r>
+                          <a:rPr lang="en-US" i="1"/>
+                          <m:t>𝑛</m:t>
+                        </m:r>
+                        <m:r>
+                          <a:rPr lang="en-US" i="1"/>
+                          <m:t>∗ </m:t>
+                        </m:r>
+                        <m:r>
+                          <a:rPr lang="en-US" i="1"/>
+                          <m:t>𝑛</m:t>
+                        </m:r>
+                      </m:num>
+                      <m:den>
+                        <m:r>
+                          <a:rPr lang="en-US" i="1"/>
+                          <m:t>𝑑</m:t>
+                        </m:r>
+                        <m:r>
+                          <a:rPr lang="en-US" i="1"/>
+                          <m:t> ∗</m:t>
+                        </m:r>
+                        <m:r>
+                          <a:rPr lang="en-US" i="1"/>
+                          <m:t>𝑑</m:t>
+                        </m:r>
+                      </m:den>
+                    </m:f>
+                  </m:oMath>
+                </a14:m>
+                <a:r>
+                  <a:rPr lang="en-US" dirty="0"/>
+                  <a:t>)</a:t>
+                </a:r>
+              </a:p>
+              <a:p>
+                <a:pPr marL="0" indent="0">
+                  <a:buNone/>
+                </a:pPr>
                 <a:endParaRPr lang="en-US" dirty="0"/>
               </a:p>
             </p:txBody>
           </p:sp>
         </mc:Choice>
-        <mc:Fallback xmlns="">
+        <mc:Fallback>
           <p:sp>
             <p:nvSpPr>
-              <p:cNvPr id="26" name="Content Placeholder 2"/>
-              <p:cNvSpPr txBox="1">
-                <a:spLocks noRot="1" noChangeAspect="1" noMove="1" noResize="1" noEditPoints="1" noAdjustHandles="1" noChangeArrowheads="1" noChangeShapeType="1" noTextEdit="1"/>
+              <p:cNvPr id="6" name="Content Placeholder 5">
+                <a:extLst>
+                  <a:ext uri="{FF2B5EF4-FFF2-40B4-BE49-F238E27FC236}">
+                    <a16:creationId xmlns:a16="http://schemas.microsoft.com/office/drawing/2014/main" id="{F2931529-77F1-A42E-4108-A89118CD14A2}"/>
+                  </a:ext>
+                </a:extLst>
+              </p:cNvPr>
+              <p:cNvSpPr>
+                <a:spLocks noGrp="1" noRot="1" noChangeAspect="1" noMove="1" noResize="1" noEditPoints="1" noAdjustHandles="1" noChangeArrowheads="1" noChangeShapeType="1" noTextEdit="1"/>
               </p:cNvSpPr>
-              <p:nvPr/>
+              <p:nvPr>
+                <p:ph idx="1"/>
+              </p:nvPr>
             </p:nvSpPr>
             <p:spPr>
-              <a:xfrm>
-                <a:off x="484110" y="3620474"/>
-                <a:ext cx="8551449" cy="992937"/>
-              </a:xfrm>
-              <a:prstGeom prst="rect">
-                <a:avLst/>
-              </a:prstGeom>
-              <a:blipFill rotWithShape="1">
-                <a:blip r:embed="rId3"/>
+              <a:blipFill>
+                <a:blip r:embed="rId2"/>
                 <a:stretch>
                   <a:fillRect/>
                 </a:stretch>
